--- a/pptx/数学·节级精细讲解课件.pptx
+++ b/pptx/数学·节级精细讲解课件.pptx
@@ -10281,11 +10281,11 @@
         <p:spPr>
           <a:xfrm>
             <a:off x="609905" y="1748790"/>
-            <a:ext cx="10971886" cy="1234440"/>
+            <a:ext cx="10971886" cy="1147801"/>
           </a:xfrm>
           <a:prstGeom prst="roundRect">
             <a:avLst>
-              <a:gd name="adj" fmla="val 4444"/>
+              <a:gd name="adj" fmla="val 4780"/>
             </a:avLst>
           </a:prstGeom>
           <a:solidFill>
@@ -10310,7 +10310,7 @@
         <p:spPr>
           <a:xfrm>
             <a:off x="829361" y="1840230"/>
-            <a:ext cx="10532974" cy="1051560"/>
+            <a:ext cx="10532974" cy="964921"/>
           </a:xfrm>
           <a:prstGeom prst="rect">
             <a:avLst/>
@@ -10363,6 +10363,192 @@
       <p:sp>
         <p:nvSpPr>
           <p:cNvPr id="7" name="Shape 5"/>
+          <p:cNvSpPr/>
+          <p:nvPr/>
+        </p:nvSpPr>
+        <p:spPr>
+          <a:xfrm>
+            <a:off x="609905" y="3042895"/>
+            <a:ext cx="10971886" cy="1147801"/>
+          </a:xfrm>
+          <a:prstGeom prst="roundRect">
+            <a:avLst>
+              <a:gd name="adj" fmla="val 4780"/>
+            </a:avLst>
+          </a:prstGeom>
+          <a:solidFill>
+            <a:srgbClr val="FFFFFF"/>
+          </a:solidFill>
+          <a:ln/>
+          <a:effectLst>
+            <a:outerShdw sx="100000" sy="100000" kx="0" ky="0" algn="bl" rotWithShape="0" blurRad="88900" dist="25400" dir="3600000">
+              <a:srgbClr val="3A3A32">
+                <a:alpha val="16000"/>
+              </a:srgbClr>
+            </a:outerShdw>
+          </a:effectLst>
+        </p:spPr>
+      </p:sp>
+      <p:sp>
+        <p:nvSpPr>
+          <p:cNvPr id="8" name="Text 6"/>
+          <p:cNvSpPr/>
+          <p:nvPr/>
+        </p:nvSpPr>
+        <p:spPr>
+          <a:xfrm>
+            <a:off x="829361" y="3134335"/>
+            <a:ext cx="10532974" cy="964921"/>
+          </a:xfrm>
+          <a:prstGeom prst="rect">
+            <a:avLst/>
+          </a:prstGeom>
+          <a:noFill/>
+          <a:ln/>
+        </p:spPr>
+        <p:txBody>
+          <a:bodyPr wrap="square" lIns="0" tIns="0" rIns="0" bIns="0" rtlCol="0" anchor="ctr"/>
+          <a:lstStyle/>
+          <a:p>
+            <a:pPr indent="0" marL="0">
+              <a:lnSpc>
+                <a:spcPct val="115000"/>
+              </a:lnSpc>
+              <a:buNone/>
+            </a:pPr>
+            <a:r>
+              <a:rPr lang="en-US" sz="1350" b="1" dirty="0">
+                <a:solidFill>
+                  <a:srgbClr val="285C94"/>
+                </a:solidFill>
+                <a:latin typeface="Microsoft YaHei" pitchFamily="34" charset="0"/>
+                <a:ea typeface="Microsoft YaHei" pitchFamily="34" charset="-122"/>
+                <a:cs typeface="Microsoft YaHei" pitchFamily="34" charset="-120"/>
+              </a:rPr>
+              <a:t>练习 2　</a:t>
+            </a:r>
+            <a:pPr indent="0" marL="0">
+              <a:lnSpc>
+                <a:spcPct val="115000"/>
+              </a:lnSpc>
+              <a:buNone/>
+            </a:pPr>
+            <a:r>
+              <a:rPr lang="en-US" sz="1400" dirty="0">
+                <a:solidFill>
+                  <a:srgbClr val="202D37"/>
+                </a:solidFill>
+                <a:latin typeface="Microsoft YaHei" pitchFamily="34" charset="0"/>
+                <a:ea typeface="Microsoft YaHei" pitchFamily="34" charset="-122"/>
+                <a:cs typeface="Microsoft YaHei" pitchFamily="34" charset="-120"/>
+              </a:rPr>
+              <a:t>计算 (−12) × (1/3 − 1/4 + 1/6)，要求用运算律简算并写出所用运算律。</a:t>
+            </a:r>
+            <a:endParaRPr lang="en-US" sz="1350" dirty="0"/>
+          </a:p>
+        </p:txBody>
+      </p:sp>
+      <p:sp>
+        <p:nvSpPr>
+          <p:cNvPr id="9" name="Shape 7"/>
+          <p:cNvSpPr/>
+          <p:nvPr/>
+        </p:nvSpPr>
+        <p:spPr>
+          <a:xfrm>
+            <a:off x="609905" y="4949647"/>
+            <a:ext cx="10971886" cy="585216"/>
+          </a:xfrm>
+          <a:prstGeom prst="roundRect">
+            <a:avLst>
+              <a:gd name="adj" fmla="val 7813"/>
+            </a:avLst>
+          </a:prstGeom>
+          <a:solidFill>
+            <a:srgbClr val="F2E3DC"/>
+          </a:solidFill>
+          <a:ln/>
+        </p:spPr>
+      </p:sp>
+      <p:sp>
+        <p:nvSpPr>
+          <p:cNvPr id="10" name="Text 8"/>
+          <p:cNvSpPr/>
+          <p:nvPr/>
+        </p:nvSpPr>
+        <p:spPr>
+          <a:xfrm>
+            <a:off x="811073" y="5004511"/>
+            <a:ext cx="10569550" cy="493776"/>
+          </a:xfrm>
+          <a:prstGeom prst="rect">
+            <a:avLst/>
+          </a:prstGeom>
+          <a:noFill/>
+          <a:ln/>
+        </p:spPr>
+        <p:txBody>
+          <a:bodyPr wrap="square" lIns="0" tIns="0" rIns="0" bIns="0" rtlCol="0" anchor="ctr"/>
+          <a:lstStyle/>
+          <a:p>
+            <a:pPr indent="0" marL="0">
+              <a:lnSpc>
+                <a:spcPct val="110000"/>
+              </a:lnSpc>
+              <a:buNone/>
+            </a:pPr>
+            <a:r>
+              <a:rPr lang="en-US" sz="1250" b="1" dirty="0">
+                <a:solidFill>
+                  <a:srgbClr val="B45F47"/>
+                </a:solidFill>
+                <a:latin typeface="Microsoft YaHei" pitchFamily="34" charset="0"/>
+                <a:ea typeface="Microsoft YaHei" pitchFamily="34" charset="-122"/>
+                <a:cs typeface="Microsoft YaHei" pitchFamily="34" charset="-120"/>
+              </a:rPr>
+              <a:t>变式挑战（选做）　</a:t>
+            </a:r>
+            <a:pPr indent="0" marL="0">
+              <a:lnSpc>
+                <a:spcPct val="110000"/>
+              </a:lnSpc>
+              <a:buNone/>
+            </a:pPr>
+            <a:r>
+              <a:rPr lang="en-US" sz="1250" dirty="0">
+                <a:solidFill>
+                  <a:srgbClr val="202D37"/>
+                </a:solidFill>
+                <a:latin typeface="Microsoft YaHei" pitchFamily="34" charset="0"/>
+                <a:ea typeface="Microsoft YaHei" pitchFamily="34" charset="-122"/>
+                <a:cs typeface="Microsoft YaHei" pitchFamily="34" charset="-120"/>
+              </a:rPr>
+              <a:t>计算：−2⁴ ÷ (−2)² − (−3) × 2。</a:t>
+            </a:r>
+            <a:pPr indent="0" marL="0">
+              <a:lnSpc>
+                <a:spcPct val="110000"/>
+              </a:lnSpc>
+              <a:buNone/>
+            </a:pPr>
+            <a:r>
+              <a:rPr lang="en-US" sz="1150" dirty="0">
+                <a:solidFill>
+                  <a:srgbClr val="6E7B85"/>
+                </a:solidFill>
+                <a:latin typeface="Microsoft YaHei" pitchFamily="34" charset="0"/>
+                <a:ea typeface="Microsoft YaHei" pitchFamily="34" charset="-122"/>
+                <a:cs typeface="Microsoft YaHei" pitchFamily="34" charset="-120"/>
+              </a:rPr>
+              <a:t>　提示：先定两处乘方：−2⁴ 的底数是 2（负号在括号外），(−2)² 的底数是 −2；再按先乘除后加减收尾。</a:t>
+            </a:r>
+            <a:endParaRPr lang="en-US" sz="1250" dirty="0"/>
+          </a:p>
+        </p:txBody>
+      </p:sp>
+      <p:sp>
+        <p:nvSpPr>
+          <p:cNvPr id="11" name="Shape 9"/>
           <p:cNvSpPr/>
           <p:nvPr/>
         </p:nvSpPr>
@@ -10384,7 +10570,7 @@
       </p:sp>
       <p:sp>
         <p:nvSpPr>
-          <p:cNvPr id="8" name="Text 6"/>
+          <p:cNvPr id="12" name="Text 10"/>
           <p:cNvSpPr/>
           <p:nvPr/>
         </p:nvSpPr>
@@ -10423,7 +10609,7 @@
       </p:sp>
       <p:sp>
         <p:nvSpPr>
-          <p:cNvPr id="9" name="Text 7"/>
+          <p:cNvPr id="13" name="Text 11"/>
           <p:cNvSpPr/>
           <p:nvPr/>
         </p:nvSpPr>
@@ -11450,11 +11636,11 @@
         <p:spPr>
           <a:xfrm>
             <a:off x="609905" y="2535174"/>
-            <a:ext cx="7818120" cy="2523744"/>
+            <a:ext cx="7818120" cy="3330702"/>
           </a:xfrm>
           <a:prstGeom prst="roundRect">
             <a:avLst>
-              <a:gd name="adj" fmla="val 2174"/>
+              <a:gd name="adj" fmla="val 1647"/>
             </a:avLst>
           </a:prstGeom>
           <a:solidFill>
@@ -11479,7 +11665,7 @@
         <p:spPr>
           <a:xfrm>
             <a:off x="865937" y="2681478"/>
-            <a:ext cx="7315200" cy="2249424"/>
+            <a:ext cx="7315200" cy="3056382"/>
           </a:xfrm>
           <a:prstGeom prst="rect">
             <a:avLst/>
@@ -11509,7 +11695,7 @@
                 <a:ea typeface="Microsoft YaHei" pitchFamily="34" charset="-122"/>
                 <a:cs typeface="Microsoft YaHei" pitchFamily="34" charset="-120"/>
               </a:rPr>
-              <a:t>引入：用字母表示数后，运算律依然成立。判断同类项只看“两同”：所含字母相同，并且相同字母的指数也相同，与系数、字母顺序无关——5x²y 与 3x²y 是同类项，x²y 与 xy² 不是。合并的推导依据是逆用分配律：5x²y+3x²y=(5+3)x²y，即系数相加、字母和指数不变。</a:t>
+              <a:t>开场追问：a 支笔加 2a 支笔是几支？a 未知也能写成 3a——字母参与运算，这就是代数式。再换成 5x²y 与 3x²y 相加：有的式子能合并，有的不能。学生尝试归类时自然会问“凭什么它能合、它不能合”，合并的资格标准就是本节的第一个概念。</a:t>
             </a:r>
             <a:endParaRPr lang="en-US" sz="1350" dirty="0"/>
           </a:p>
@@ -11532,7 +11718,30 @@
                 <a:ea typeface="Microsoft YaHei" pitchFamily="34" charset="-122"/>
                 <a:cs typeface="Microsoft YaHei" pitchFamily="34" charset="-120"/>
               </a:rPr>
-              <a:t>整式加减两步走：先去括号，再合并同类项。去括号法则的依据是分配律：括号前是“+”，去括号后各项不变号；括号前是“−”，去括号后各项都变号，因为 a−(b+c)=a+(−1)(b+c)。常见错误有两个：一是负号去括号只变第一项的号；二是合并时把 x² 与 x 当同类项。检验习惯：代入特殊值（如 x=1）验证化简前后是否相等。</a:t>
+              <a:t>同类项“两同”：所含字母相同，并且相同字母的指数也相同，与系数和字母顺序无关。合并的推导依据是逆用分配律：5x²y+3x²y=(5+3)x²y，即系数相加、字母及其指数不变。整式加减两步走：先去括号，再合并同类项；去括号法则由分配律推得——a−(b+c)=a+(−1)(b+c)，所以括号前是“−”时各项都变号。</a:t>
+            </a:r>
+            <a:endParaRPr lang="en-US" sz="1350" dirty="0"/>
+          </a:p>
+          <a:p>
+            <a:pPr indent="0" marL="0">
+              <a:lnSpc>
+                <a:spcPct val="130000"/>
+              </a:lnSpc>
+              <a:spcAft>
+                <a:spcPts val="1000"/>
+              </a:spcAft>
+              <a:buNone/>
+            </a:pPr>
+            <a:r>
+              <a:rPr lang="en-US" sz="1350" dirty="0">
+                <a:solidFill>
+                  <a:srgbClr val="202D37"/>
+                </a:solidFill>
+                <a:latin typeface="Microsoft YaHei" pitchFamily="34" charset="0"/>
+                <a:ea typeface="Microsoft YaHei" pitchFamily="34" charset="-122"/>
+                <a:cs typeface="Microsoft YaHei" pitchFamily="34" charset="-120"/>
+              </a:rPr>
+              <a:t>高频错误显式纠正：负号去括号只变第一项的号，如 4x²−(3x²−5x) 应得 4x²−3x²+5x；x² 与 x 指数不同不是同类项，不能合并。适用边界：合并同类项只改系数，字母和指数一律不动；检验的法宝是代入特殊值（如 x=1）看化简前后是否相等——这个办法对一切整式恒等变形都适用。</a:t>
             </a:r>
             <a:endParaRPr lang="en-US" sz="1350" dirty="0"/>
           </a:p>
@@ -12609,11 +12818,11 @@
         <p:spPr>
           <a:xfrm>
             <a:off x="609905" y="1748790"/>
-            <a:ext cx="10971886" cy="1234440"/>
+            <a:ext cx="10971886" cy="1147801"/>
           </a:xfrm>
           <a:prstGeom prst="roundRect">
             <a:avLst>
-              <a:gd name="adj" fmla="val 4444"/>
+              <a:gd name="adj" fmla="val 4780"/>
             </a:avLst>
           </a:prstGeom>
           <a:solidFill>
@@ -12638,7 +12847,7 @@
         <p:spPr>
           <a:xfrm>
             <a:off x="829361" y="1840230"/>
-            <a:ext cx="10532974" cy="1051560"/>
+            <a:ext cx="10532974" cy="964921"/>
           </a:xfrm>
           <a:prstGeom prst="rect">
             <a:avLst/>
@@ -12691,6 +12900,192 @@
       <p:sp>
         <p:nvSpPr>
           <p:cNvPr id="7" name="Shape 5"/>
+          <p:cNvSpPr/>
+          <p:nvPr/>
+        </p:nvSpPr>
+        <p:spPr>
+          <a:xfrm>
+            <a:off x="609905" y="3042895"/>
+            <a:ext cx="10971886" cy="1147801"/>
+          </a:xfrm>
+          <a:prstGeom prst="roundRect">
+            <a:avLst>
+              <a:gd name="adj" fmla="val 4780"/>
+            </a:avLst>
+          </a:prstGeom>
+          <a:solidFill>
+            <a:srgbClr val="FFFFFF"/>
+          </a:solidFill>
+          <a:ln/>
+          <a:effectLst>
+            <a:outerShdw sx="100000" sy="100000" kx="0" ky="0" algn="bl" rotWithShape="0" blurRad="88900" dist="25400" dir="3600000">
+              <a:srgbClr val="3A3A32">
+                <a:alpha val="16000"/>
+              </a:srgbClr>
+            </a:outerShdw>
+          </a:effectLst>
+        </p:spPr>
+      </p:sp>
+      <p:sp>
+        <p:nvSpPr>
+          <p:cNvPr id="8" name="Text 6"/>
+          <p:cNvSpPr/>
+          <p:nvPr/>
+        </p:nvSpPr>
+        <p:spPr>
+          <a:xfrm>
+            <a:off x="829361" y="3134335"/>
+            <a:ext cx="10532974" cy="964921"/>
+          </a:xfrm>
+          <a:prstGeom prst="rect">
+            <a:avLst/>
+          </a:prstGeom>
+          <a:noFill/>
+          <a:ln/>
+        </p:spPr>
+        <p:txBody>
+          <a:bodyPr wrap="square" lIns="0" tIns="0" rIns="0" bIns="0" rtlCol="0" anchor="ctr"/>
+          <a:lstStyle/>
+          <a:p>
+            <a:pPr indent="0" marL="0">
+              <a:lnSpc>
+                <a:spcPct val="115000"/>
+              </a:lnSpc>
+              <a:buNone/>
+            </a:pPr>
+            <a:r>
+              <a:rPr lang="en-US" sz="1350" b="1" dirty="0">
+                <a:solidFill>
+                  <a:srgbClr val="285C94"/>
+                </a:solidFill>
+                <a:latin typeface="Microsoft YaHei" pitchFamily="34" charset="0"/>
+                <a:ea typeface="Microsoft YaHei" pitchFamily="34" charset="-122"/>
+                <a:cs typeface="Microsoft YaHei" pitchFamily="34" charset="-120"/>
+              </a:rPr>
+              <a:t>练习 2　</a:t>
+            </a:r>
+            <a:pPr indent="0" marL="0">
+              <a:lnSpc>
+                <a:spcPct val="115000"/>
+              </a:lnSpc>
+              <a:buNone/>
+            </a:pPr>
+            <a:r>
+              <a:rPr lang="en-US" sz="1400" dirty="0">
+                <a:solidFill>
+                  <a:srgbClr val="202D37"/>
+                </a:solidFill>
+                <a:latin typeface="Microsoft YaHei" pitchFamily="34" charset="0"/>
+                <a:ea typeface="Microsoft YaHei" pitchFamily="34" charset="-122"/>
+                <a:cs typeface="Microsoft YaHei" pitchFamily="34" charset="-120"/>
+              </a:rPr>
+              <a:t>先化简，再求值：2(a²b − ab) − 3(a²b + ab) + 1，其中 a=2，b=−1。</a:t>
+            </a:r>
+            <a:endParaRPr lang="en-US" sz="1350" dirty="0"/>
+          </a:p>
+        </p:txBody>
+      </p:sp>
+      <p:sp>
+        <p:nvSpPr>
+          <p:cNvPr id="9" name="Shape 7"/>
+          <p:cNvSpPr/>
+          <p:nvPr/>
+        </p:nvSpPr>
+        <p:spPr>
+          <a:xfrm>
+            <a:off x="609905" y="4949647"/>
+            <a:ext cx="10971886" cy="585216"/>
+          </a:xfrm>
+          <a:prstGeom prst="roundRect">
+            <a:avLst>
+              <a:gd name="adj" fmla="val 7813"/>
+            </a:avLst>
+          </a:prstGeom>
+          <a:solidFill>
+            <a:srgbClr val="F2E3DC"/>
+          </a:solidFill>
+          <a:ln/>
+        </p:spPr>
+      </p:sp>
+      <p:sp>
+        <p:nvSpPr>
+          <p:cNvPr id="10" name="Text 8"/>
+          <p:cNvSpPr/>
+          <p:nvPr/>
+        </p:nvSpPr>
+        <p:spPr>
+          <a:xfrm>
+            <a:off x="811073" y="5004511"/>
+            <a:ext cx="10569550" cy="493776"/>
+          </a:xfrm>
+          <a:prstGeom prst="rect">
+            <a:avLst/>
+          </a:prstGeom>
+          <a:noFill/>
+          <a:ln/>
+        </p:spPr>
+        <p:txBody>
+          <a:bodyPr wrap="square" lIns="0" tIns="0" rIns="0" bIns="0" rtlCol="0" anchor="ctr"/>
+          <a:lstStyle/>
+          <a:p>
+            <a:pPr indent="0" marL="0">
+              <a:lnSpc>
+                <a:spcPct val="110000"/>
+              </a:lnSpc>
+              <a:buNone/>
+            </a:pPr>
+            <a:r>
+              <a:rPr lang="en-US" sz="1250" b="1" dirty="0">
+                <a:solidFill>
+                  <a:srgbClr val="B45F47"/>
+                </a:solidFill>
+                <a:latin typeface="Microsoft YaHei" pitchFamily="34" charset="0"/>
+                <a:ea typeface="Microsoft YaHei" pitchFamily="34" charset="-122"/>
+                <a:cs typeface="Microsoft YaHei" pitchFamily="34" charset="-120"/>
+              </a:rPr>
+              <a:t>变式挑战（选做）　</a:t>
+            </a:r>
+            <a:pPr indent="0" marL="0">
+              <a:lnSpc>
+                <a:spcPct val="110000"/>
+              </a:lnSpc>
+              <a:buNone/>
+            </a:pPr>
+            <a:r>
+              <a:rPr lang="en-US" sz="1250" dirty="0">
+                <a:solidFill>
+                  <a:srgbClr val="202D37"/>
+                </a:solidFill>
+                <a:latin typeface="Microsoft YaHei" pitchFamily="34" charset="0"/>
+                <a:ea typeface="Microsoft YaHei" pitchFamily="34" charset="-122"/>
+                <a:cs typeface="Microsoft YaHei" pitchFamily="34" charset="-120"/>
+              </a:rPr>
+              <a:t>化简：5x²y − 3xy + 2 − 4x²y + xy − 7。</a:t>
+            </a:r>
+            <a:pPr indent="0" marL="0">
+              <a:lnSpc>
+                <a:spcPct val="110000"/>
+              </a:lnSpc>
+              <a:buNone/>
+            </a:pPr>
+            <a:r>
+              <a:rPr lang="en-US" sz="1150" dirty="0">
+                <a:solidFill>
+                  <a:srgbClr val="6E7B85"/>
+                </a:solidFill>
+                <a:latin typeface="Microsoft YaHei" pitchFamily="34" charset="0"/>
+                <a:ea typeface="Microsoft YaHei" pitchFamily="34" charset="-122"/>
+                <a:cs typeface="Microsoft YaHei" pitchFamily="34" charset="-120"/>
+              </a:rPr>
+              <a:t>　提示：先用记号把同类项标出来：x²y 一组、xy 一组、常数一组，再各组系数相加减。</a:t>
+            </a:r>
+            <a:endParaRPr lang="en-US" sz="1250" dirty="0"/>
+          </a:p>
+        </p:txBody>
+      </p:sp>
+      <p:sp>
+        <p:nvSpPr>
+          <p:cNvPr id="11" name="Shape 9"/>
           <p:cNvSpPr/>
           <p:nvPr/>
         </p:nvSpPr>
@@ -12712,7 +13107,7 @@
       </p:sp>
       <p:sp>
         <p:nvSpPr>
-          <p:cNvPr id="8" name="Text 6"/>
+          <p:cNvPr id="12" name="Text 10"/>
           <p:cNvSpPr/>
           <p:nvPr/>
         </p:nvSpPr>
@@ -12751,7 +13146,7 @@
       </p:sp>
       <p:sp>
         <p:nvSpPr>
-          <p:cNvPr id="9" name="Text 7"/>
+          <p:cNvPr id="13" name="Text 11"/>
           <p:cNvSpPr/>
           <p:nvPr/>
         </p:nvSpPr>
@@ -13008,11 +13403,11 @@
         <p:spPr>
           <a:xfrm>
             <a:off x="609905" y="2535174"/>
-            <a:ext cx="7818120" cy="2523744"/>
+            <a:ext cx="7818120" cy="3330702"/>
           </a:xfrm>
           <a:prstGeom prst="roundRect">
             <a:avLst>
-              <a:gd name="adj" fmla="val 2174"/>
+              <a:gd name="adj" fmla="val 1647"/>
             </a:avLst>
           </a:prstGeom>
           <a:solidFill>
@@ -13037,7 +13432,7 @@
         <p:spPr>
           <a:xfrm>
             <a:off x="865937" y="2681478"/>
-            <a:ext cx="7315200" cy="2249424"/>
+            <a:ext cx="7315200" cy="3056382"/>
           </a:xfrm>
           <a:prstGeom prst="rect">
             <a:avLst/>
@@ -13067,7 +13462,7 @@
                 <a:ea typeface="Microsoft YaHei" pitchFamily="34" charset="-122"/>
                 <a:cs typeface="Microsoft YaHei" pitchFamily="34" charset="-120"/>
               </a:rPr>
-              <a:t>引入：商品打折销售里藏着三个量的关系。推导等量关系：标价=成本×(1+提高的幅度)，售价=标价×折扣，利润=售价−成本。把三个式子串起来，利润就能用成本 x 一次表示出来，这正是设未知数列方程的桥梁。解方程的依据是等式性质：移项变号源于“两边同减”，系数化为 1 源于“两边同除”。</a:t>
+              <a:t>从打折销售的生活情境开场：标价、折扣、利润三个词天天见，但“提高五成再打八折到底赚不赚”，直觉经常失灵。让学生先猜再算，猜错的体验恰好说明这类问题必须建模——把语言翻译成方程，用未知数把所有量统一起来。</a:t>
             </a:r>
             <a:endParaRPr lang="en-US" sz="1350" dirty="0"/>
           </a:p>
@@ -13090,7 +13485,30 @@
                 <a:ea typeface="Microsoft YaHei" pitchFamily="34" charset="-122"/>
                 <a:cs typeface="Microsoft YaHei" pitchFamily="34" charset="-120"/>
               </a:rPr>
-              <a:t>解应用题按五字诀“设、列、解、验、答”进行，最容易丢的是“验”：既要检验 x 是否满足方程（数学解），又要检验是否符合实际（实际解，如成本不能为负、人数必须为整数）。示范解法五步板演：去分母、去括号、移项、合并同类项、系数化为 1，每一步都要能说出依据。误区纠正：移项不变号是最高频失分点；打折后利润率的基准是成本而不是标价。</a:t>
+              <a:t>建模本体：标价=成本×(1+提高幅度)，售价=标价×折扣，利润=售价−成本。三个关系串起来，利润就能用成本 x 一次表示，方程随之而出。解方程五步“去分母、去括号、移项、合并同类项、系数化为 1”每步有依据：移项变号源于两边同减，系数化为 1 源于两边同除。</a:t>
+            </a:r>
+            <a:endParaRPr lang="en-US" sz="1350" dirty="0"/>
+          </a:p>
+          <a:p>
+            <a:pPr indent="0" marL="0">
+              <a:lnSpc>
+                <a:spcPct val="130000"/>
+              </a:lnSpc>
+              <a:spcAft>
+                <a:spcPts val="1000"/>
+              </a:spcAft>
+              <a:buNone/>
+            </a:pPr>
+            <a:r>
+              <a:rPr lang="en-US" sz="1350" dirty="0">
+                <a:solidFill>
+                  <a:srgbClr val="202D37"/>
+                </a:solidFill>
+                <a:latin typeface="Microsoft YaHei" pitchFamily="34" charset="0"/>
+                <a:ea typeface="Microsoft YaHei" pitchFamily="34" charset="-122"/>
+                <a:cs typeface="Microsoft YaHei" pitchFamily="34" charset="-120"/>
+              </a:rPr>
+              <a:t>高频误区：移项不变号是第一失分点；打折后利润的基准是成本不是标价；“验”只代回方程不够，还要验实际意义（成本非负、件数为整数）。适用边界：一元一次方程只能刻画一个未知数、一次关系；打折问题里“提高幅度不够、折扣又深”会出现售价低于成本，此时利润为负，方程里就是“亏多少”。</a:t>
             </a:r>
             <a:endParaRPr lang="en-US" sz="1350" dirty="0"/>
           </a:p>
@@ -14268,11 +14686,11 @@
         <p:spPr>
           <a:xfrm>
             <a:off x="609905" y="1748790"/>
-            <a:ext cx="10971886" cy="1234440"/>
+            <a:ext cx="10971886" cy="1147801"/>
           </a:xfrm>
           <a:prstGeom prst="roundRect">
             <a:avLst>
-              <a:gd name="adj" fmla="val 4444"/>
+              <a:gd name="adj" fmla="val 4780"/>
             </a:avLst>
           </a:prstGeom>
           <a:solidFill>
@@ -14297,7 +14715,7 @@
         <p:spPr>
           <a:xfrm>
             <a:off x="829361" y="1840230"/>
-            <a:ext cx="10532974" cy="1051560"/>
+            <a:ext cx="10532974" cy="964921"/>
           </a:xfrm>
           <a:prstGeom prst="rect">
             <a:avLst/>
@@ -14350,6 +14768,192 @@
       <p:sp>
         <p:nvSpPr>
           <p:cNvPr id="7" name="Shape 5"/>
+          <p:cNvSpPr/>
+          <p:nvPr/>
+        </p:nvSpPr>
+        <p:spPr>
+          <a:xfrm>
+            <a:off x="609905" y="3042895"/>
+            <a:ext cx="10971886" cy="1147801"/>
+          </a:xfrm>
+          <a:prstGeom prst="roundRect">
+            <a:avLst>
+              <a:gd name="adj" fmla="val 4780"/>
+            </a:avLst>
+          </a:prstGeom>
+          <a:solidFill>
+            <a:srgbClr val="FFFFFF"/>
+          </a:solidFill>
+          <a:ln/>
+          <a:effectLst>
+            <a:outerShdw sx="100000" sy="100000" kx="0" ky="0" algn="bl" rotWithShape="0" blurRad="88900" dist="25400" dir="3600000">
+              <a:srgbClr val="3A3A32">
+                <a:alpha val="16000"/>
+              </a:srgbClr>
+            </a:outerShdw>
+          </a:effectLst>
+        </p:spPr>
+      </p:sp>
+      <p:sp>
+        <p:nvSpPr>
+          <p:cNvPr id="8" name="Text 6"/>
+          <p:cNvSpPr/>
+          <p:nvPr/>
+        </p:nvSpPr>
+        <p:spPr>
+          <a:xfrm>
+            <a:off x="829361" y="3134335"/>
+            <a:ext cx="10532974" cy="964921"/>
+          </a:xfrm>
+          <a:prstGeom prst="rect">
+            <a:avLst/>
+          </a:prstGeom>
+          <a:noFill/>
+          <a:ln/>
+        </p:spPr>
+        <p:txBody>
+          <a:bodyPr wrap="square" lIns="0" tIns="0" rIns="0" bIns="0" rtlCol="0" anchor="ctr"/>
+          <a:lstStyle/>
+          <a:p>
+            <a:pPr indent="0" marL="0">
+              <a:lnSpc>
+                <a:spcPct val="115000"/>
+              </a:lnSpc>
+              <a:buNone/>
+            </a:pPr>
+            <a:r>
+              <a:rPr lang="en-US" sz="1350" b="1" dirty="0">
+                <a:solidFill>
+                  <a:srgbClr val="285C94"/>
+                </a:solidFill>
+                <a:latin typeface="Microsoft YaHei" pitchFamily="34" charset="0"/>
+                <a:ea typeface="Microsoft YaHei" pitchFamily="34" charset="-122"/>
+                <a:cs typeface="Microsoft YaHei" pitchFamily="34" charset="-120"/>
+              </a:rPr>
+              <a:t>练习 2　</a:t>
+            </a:r>
+            <a:pPr indent="0" marL="0">
+              <a:lnSpc>
+                <a:spcPct val="115000"/>
+              </a:lnSpc>
+              <a:buNone/>
+            </a:pPr>
+            <a:r>
+              <a:rPr lang="en-US" sz="1400" dirty="0">
+                <a:solidFill>
+                  <a:srgbClr val="202D37"/>
+                </a:solidFill>
+                <a:latin typeface="Microsoft YaHei" pitchFamily="34" charset="0"/>
+                <a:ea typeface="Microsoft YaHei" pitchFamily="34" charset="-122"/>
+                <a:cs typeface="Microsoft YaHei" pitchFamily="34" charset="-120"/>
+              </a:rPr>
+              <a:t>甲、乙两地相距 240 km。一辆汽车从甲地出发，前 2 h 平均每小时行 60 km，之后因拥堵平均每小时只行 40 km，还需多少小时到达乙地？</a:t>
+            </a:r>
+            <a:endParaRPr lang="en-US" sz="1350" dirty="0"/>
+          </a:p>
+        </p:txBody>
+      </p:sp>
+      <p:sp>
+        <p:nvSpPr>
+          <p:cNvPr id="9" name="Shape 7"/>
+          <p:cNvSpPr/>
+          <p:nvPr/>
+        </p:nvSpPr>
+        <p:spPr>
+          <a:xfrm>
+            <a:off x="609905" y="4949647"/>
+            <a:ext cx="10971886" cy="585216"/>
+          </a:xfrm>
+          <a:prstGeom prst="roundRect">
+            <a:avLst>
+              <a:gd name="adj" fmla="val 7813"/>
+            </a:avLst>
+          </a:prstGeom>
+          <a:solidFill>
+            <a:srgbClr val="F2E3DC"/>
+          </a:solidFill>
+          <a:ln/>
+        </p:spPr>
+      </p:sp>
+      <p:sp>
+        <p:nvSpPr>
+          <p:cNvPr id="10" name="Text 8"/>
+          <p:cNvSpPr/>
+          <p:nvPr/>
+        </p:nvSpPr>
+        <p:spPr>
+          <a:xfrm>
+            <a:off x="811073" y="5004511"/>
+            <a:ext cx="10569550" cy="493776"/>
+          </a:xfrm>
+          <a:prstGeom prst="rect">
+            <a:avLst/>
+          </a:prstGeom>
+          <a:noFill/>
+          <a:ln/>
+        </p:spPr>
+        <p:txBody>
+          <a:bodyPr wrap="square" lIns="0" tIns="0" rIns="0" bIns="0" rtlCol="0" anchor="ctr"/>
+          <a:lstStyle/>
+          <a:p>
+            <a:pPr indent="0" marL="0">
+              <a:lnSpc>
+                <a:spcPct val="110000"/>
+              </a:lnSpc>
+              <a:buNone/>
+            </a:pPr>
+            <a:r>
+              <a:rPr lang="en-US" sz="1250" b="1" dirty="0">
+                <a:solidFill>
+                  <a:srgbClr val="B45F47"/>
+                </a:solidFill>
+                <a:latin typeface="Microsoft YaHei" pitchFamily="34" charset="0"/>
+                <a:ea typeface="Microsoft YaHei" pitchFamily="34" charset="-122"/>
+                <a:cs typeface="Microsoft YaHei" pitchFamily="34" charset="-120"/>
+              </a:rPr>
+              <a:t>变式挑战（选做）　</a:t>
+            </a:r>
+            <a:pPr indent="0" marL="0">
+              <a:lnSpc>
+                <a:spcPct val="110000"/>
+              </a:lnSpc>
+              <a:buNone/>
+            </a:pPr>
+            <a:r>
+              <a:rPr lang="en-US" sz="1250" dirty="0">
+                <a:solidFill>
+                  <a:srgbClr val="202D37"/>
+                </a:solidFill>
+                <a:latin typeface="Microsoft YaHei" pitchFamily="34" charset="0"/>
+                <a:ea typeface="Microsoft YaHei" pitchFamily="34" charset="-122"/>
+                <a:cs typeface="Microsoft YaHei" pitchFamily="34" charset="-120"/>
+              </a:rPr>
+              <a:t>某商品按成本价提高 20% 标价，再按标价的 8 折出售，结果亏损 2 元。求这件商品的成本价。</a:t>
+            </a:r>
+            <a:pPr indent="0" marL="0">
+              <a:lnSpc>
+                <a:spcPct val="110000"/>
+              </a:lnSpc>
+              <a:buNone/>
+            </a:pPr>
+            <a:r>
+              <a:rPr lang="en-US" sz="1150" dirty="0">
+                <a:solidFill>
+                  <a:srgbClr val="6E7B85"/>
+                </a:solidFill>
+                <a:latin typeface="Microsoft YaHei" pitchFamily="34" charset="0"/>
+                <a:ea typeface="Microsoft YaHei" pitchFamily="34" charset="-122"/>
+                <a:cs typeface="Microsoft YaHei" pitchFamily="34" charset="-120"/>
+              </a:rPr>
+              <a:t>　提示：亏损说明“售价−成本”是负数：等量关系变为 1.2x×0.8−x=−2，先算出 1.2×0.8 再解。</a:t>
+            </a:r>
+            <a:endParaRPr lang="en-US" sz="1250" dirty="0"/>
+          </a:p>
+        </p:txBody>
+      </p:sp>
+      <p:sp>
+        <p:nvSpPr>
+          <p:cNvPr id="11" name="Shape 9"/>
           <p:cNvSpPr/>
           <p:nvPr/>
         </p:nvSpPr>
@@ -14371,7 +14975,7 @@
       </p:sp>
       <p:sp>
         <p:nvSpPr>
-          <p:cNvPr id="8" name="Text 6"/>
+          <p:cNvPr id="12" name="Text 10"/>
           <p:cNvSpPr/>
           <p:nvPr/>
         </p:nvSpPr>
@@ -14410,7 +15014,7 @@
       </p:sp>
       <p:sp>
         <p:nvSpPr>
-          <p:cNvPr id="9" name="Text 7"/>
+          <p:cNvPr id="13" name="Text 11"/>
           <p:cNvSpPr/>
           <p:nvPr/>
         </p:nvSpPr>
@@ -16832,11 +17436,11 @@
         <p:spPr>
           <a:xfrm>
             <a:off x="609905" y="2535174"/>
-            <a:ext cx="7818120" cy="2523744"/>
+            <a:ext cx="7818120" cy="3330702"/>
           </a:xfrm>
           <a:prstGeom prst="roundRect">
             <a:avLst>
-              <a:gd name="adj" fmla="val 2174"/>
+              <a:gd name="adj" fmla="val 1647"/>
             </a:avLst>
           </a:prstGeom>
           <a:solidFill>
@@ -16861,7 +17465,7 @@
         <p:spPr>
           <a:xfrm>
             <a:off x="865937" y="2681478"/>
-            <a:ext cx="7315200" cy="2249424"/>
+            <a:ext cx="7315200" cy="3056382"/>
           </a:xfrm>
           <a:prstGeom prst="rect">
             <a:avLst/>
@@ -16891,7 +17495,7 @@
                 <a:ea typeface="Microsoft YaHei" pitchFamily="34" charset="-122"/>
                 <a:cs typeface="Microsoft YaHei" pitchFamily="34" charset="-120"/>
               </a:rPr>
-              <a:t>引入：角的度量单位是度、分、秒。推导换算关系：把 1° 平均分成 60 份，每份是 1′；把 1′ 平均分成 60 份，每份是 1″——六十进制，1°=60′，1′=60″，1°=3600″。大单位化小单位乘 60，小单位化大单位除以 60，方向决定乘除，绝不能按百进制想当然。</a:t>
+              <a:t>开场演示：只用“度”记录钟面指针转过的角度不够细，精确到分和秒才有工程与天文级的精度——引出度、分、秒。再让学生用尺规作一条线段等于已知线段，提醒“圆弧痕迹必须留下”：痕迹是作图过程的证据，擦掉痕迹等于没做。两件事合成本节起点。</a:t>
             </a:r>
             <a:endParaRPr lang="en-US" sz="1350" dirty="0"/>
           </a:p>
@@ -16914,7 +17518,30 @@
                 <a:ea typeface="Microsoft YaHei" pitchFamily="34" charset="-122"/>
                 <a:cs typeface="Microsoft YaHei" pitchFamily="34" charset="-120"/>
               </a:rPr>
-              <a:t>线段的表示与作图：尺规作线段等于已知线段、作角平分线都要保留作图痕迹，痕迹是推理的证据。两个常用概念：余角（和为 90°）、补角（和为 180°），性质是“同角（等角）的余角相等、补角相等”，推导只需用等量代换。常见误区：把 0.5° 写成 5′（应为 30′）；认为补角一定是钝角（直角的补角还是直角）。</a:t>
+              <a:t>换算关系本体：1°=60′，1′=60″，1°=3600″，是六十进制。大单位化小单位乘 60，小单位化大单位除以 60——方向决定乘除。余角（两角和为 90°）与补角（两角和为 180°）的性质“同角（等角）的余角相等、补角相等”，用等量代换一步推出，是角度证明的常用依据。</a:t>
+            </a:r>
+            <a:endParaRPr lang="en-US" sz="1350" dirty="0"/>
+          </a:p>
+          <a:p>
+            <a:pPr indent="0" marL="0">
+              <a:lnSpc>
+                <a:spcPct val="130000"/>
+              </a:lnSpc>
+              <a:spcAft>
+                <a:spcPts val="1000"/>
+              </a:spcAft>
+              <a:buNone/>
+            </a:pPr>
+            <a:r>
+              <a:rPr lang="en-US" sz="1350" dirty="0">
+                <a:solidFill>
+                  <a:srgbClr val="202D37"/>
+                </a:solidFill>
+                <a:latin typeface="Microsoft YaHei" pitchFamily="34" charset="0"/>
+                <a:ea typeface="Microsoft YaHei" pitchFamily="34" charset="-122"/>
+                <a:cs typeface="Microsoft YaHei" pitchFamily="34" charset="-120"/>
+              </a:rPr>
+              <a:t>高频误区：把 0.5° 写成 5′（应为 30′）——按百进制想当然是根源；认为互余互补必须相邻（只与“和”有关，位置无关）。适用边界：度分秒换算只在度、分、秒三级单位内进行；补角不一定是钝角，直角的补角还是直角；“同角的余角相等”必须以同一个角（或等角）作基准，乱配基准结论不成立。</a:t>
             </a:r>
             <a:endParaRPr lang="en-US" sz="1350" dirty="0"/>
           </a:p>
@@ -18092,11 +18719,11 @@
         <p:spPr>
           <a:xfrm>
             <a:off x="609905" y="1748790"/>
-            <a:ext cx="10971886" cy="1234440"/>
+            <a:ext cx="10971886" cy="1147801"/>
           </a:xfrm>
           <a:prstGeom prst="roundRect">
             <a:avLst>
-              <a:gd name="adj" fmla="val 4444"/>
+              <a:gd name="adj" fmla="val 4780"/>
             </a:avLst>
           </a:prstGeom>
           <a:solidFill>
@@ -18121,7 +18748,7 @@
         <p:spPr>
           <a:xfrm>
             <a:off x="829361" y="1840230"/>
-            <a:ext cx="10532974" cy="1051560"/>
+            <a:ext cx="10532974" cy="964921"/>
           </a:xfrm>
           <a:prstGeom prst="rect">
             <a:avLst/>
@@ -18174,6 +18801,192 @@
       <p:sp>
         <p:nvSpPr>
           <p:cNvPr id="7" name="Shape 5"/>
+          <p:cNvSpPr/>
+          <p:nvPr/>
+        </p:nvSpPr>
+        <p:spPr>
+          <a:xfrm>
+            <a:off x="609905" y="3042895"/>
+            <a:ext cx="10971886" cy="1147801"/>
+          </a:xfrm>
+          <a:prstGeom prst="roundRect">
+            <a:avLst>
+              <a:gd name="adj" fmla="val 4780"/>
+            </a:avLst>
+          </a:prstGeom>
+          <a:solidFill>
+            <a:srgbClr val="FFFFFF"/>
+          </a:solidFill>
+          <a:ln/>
+          <a:effectLst>
+            <a:outerShdw sx="100000" sy="100000" kx="0" ky="0" algn="bl" rotWithShape="0" blurRad="88900" dist="25400" dir="3600000">
+              <a:srgbClr val="3A3A32">
+                <a:alpha val="16000"/>
+              </a:srgbClr>
+            </a:outerShdw>
+          </a:effectLst>
+        </p:spPr>
+      </p:sp>
+      <p:sp>
+        <p:nvSpPr>
+          <p:cNvPr id="8" name="Text 6"/>
+          <p:cNvSpPr/>
+          <p:nvPr/>
+        </p:nvSpPr>
+        <p:spPr>
+          <a:xfrm>
+            <a:off x="829361" y="3134335"/>
+            <a:ext cx="10532974" cy="964921"/>
+          </a:xfrm>
+          <a:prstGeom prst="rect">
+            <a:avLst/>
+          </a:prstGeom>
+          <a:noFill/>
+          <a:ln/>
+        </p:spPr>
+        <p:txBody>
+          <a:bodyPr wrap="square" lIns="0" tIns="0" rIns="0" bIns="0" rtlCol="0" anchor="ctr"/>
+          <a:lstStyle/>
+          <a:p>
+            <a:pPr indent="0" marL="0">
+              <a:lnSpc>
+                <a:spcPct val="115000"/>
+              </a:lnSpc>
+              <a:buNone/>
+            </a:pPr>
+            <a:r>
+              <a:rPr lang="en-US" sz="1350" b="1" dirty="0">
+                <a:solidFill>
+                  <a:srgbClr val="285C94"/>
+                </a:solidFill>
+                <a:latin typeface="Microsoft YaHei" pitchFamily="34" charset="0"/>
+                <a:ea typeface="Microsoft YaHei" pitchFamily="34" charset="-122"/>
+                <a:cs typeface="Microsoft YaHei" pitchFamily="34" charset="-120"/>
+              </a:rPr>
+              <a:t>练习 2　</a:t>
+            </a:r>
+            <a:pPr indent="0" marL="0">
+              <a:lnSpc>
+                <a:spcPct val="115000"/>
+              </a:lnSpc>
+              <a:buNone/>
+            </a:pPr>
+            <a:r>
+              <a:rPr lang="en-US" sz="1400" dirty="0">
+                <a:solidFill>
+                  <a:srgbClr val="202D37"/>
+                </a:solidFill>
+                <a:latin typeface="Microsoft YaHei" pitchFamily="34" charset="0"/>
+                <a:ea typeface="Microsoft YaHei" pitchFamily="34" charset="-122"/>
+                <a:cs typeface="Microsoft YaHei" pitchFamily="34" charset="-120"/>
+              </a:rPr>
+              <a:t>一个角的补角是它的余角的 4 倍，求这个角的度数。</a:t>
+            </a:r>
+            <a:endParaRPr lang="en-US" sz="1350" dirty="0"/>
+          </a:p>
+        </p:txBody>
+      </p:sp>
+      <p:sp>
+        <p:nvSpPr>
+          <p:cNvPr id="9" name="Shape 7"/>
+          <p:cNvSpPr/>
+          <p:nvPr/>
+        </p:nvSpPr>
+        <p:spPr>
+          <a:xfrm>
+            <a:off x="609905" y="4949647"/>
+            <a:ext cx="10971886" cy="585216"/>
+          </a:xfrm>
+          <a:prstGeom prst="roundRect">
+            <a:avLst>
+              <a:gd name="adj" fmla="val 7813"/>
+            </a:avLst>
+          </a:prstGeom>
+          <a:solidFill>
+            <a:srgbClr val="F2E3DC"/>
+          </a:solidFill>
+          <a:ln/>
+        </p:spPr>
+      </p:sp>
+      <p:sp>
+        <p:nvSpPr>
+          <p:cNvPr id="10" name="Text 8"/>
+          <p:cNvSpPr/>
+          <p:nvPr/>
+        </p:nvSpPr>
+        <p:spPr>
+          <a:xfrm>
+            <a:off x="811073" y="5004511"/>
+            <a:ext cx="10569550" cy="493776"/>
+          </a:xfrm>
+          <a:prstGeom prst="rect">
+            <a:avLst/>
+          </a:prstGeom>
+          <a:noFill/>
+          <a:ln/>
+        </p:spPr>
+        <p:txBody>
+          <a:bodyPr wrap="square" lIns="0" tIns="0" rIns="0" bIns="0" rtlCol="0" anchor="ctr"/>
+          <a:lstStyle/>
+          <a:p>
+            <a:pPr indent="0" marL="0">
+              <a:lnSpc>
+                <a:spcPct val="110000"/>
+              </a:lnSpc>
+              <a:buNone/>
+            </a:pPr>
+            <a:r>
+              <a:rPr lang="en-US" sz="1250" b="1" dirty="0">
+                <a:solidFill>
+                  <a:srgbClr val="B45F47"/>
+                </a:solidFill>
+                <a:latin typeface="Microsoft YaHei" pitchFamily="34" charset="0"/>
+                <a:ea typeface="Microsoft YaHei" pitchFamily="34" charset="-122"/>
+                <a:cs typeface="Microsoft YaHei" pitchFamily="34" charset="-120"/>
+              </a:rPr>
+              <a:t>变式挑战（选做）　</a:t>
+            </a:r>
+            <a:pPr indent="0" marL="0">
+              <a:lnSpc>
+                <a:spcPct val="110000"/>
+              </a:lnSpc>
+              <a:buNone/>
+            </a:pPr>
+            <a:r>
+              <a:rPr lang="en-US" sz="1250" dirty="0">
+                <a:solidFill>
+                  <a:srgbClr val="202D37"/>
+                </a:solidFill>
+                <a:latin typeface="Microsoft YaHei" pitchFamily="34" charset="0"/>
+                <a:ea typeface="Microsoft YaHei" pitchFamily="34" charset="-122"/>
+                <a:cs typeface="Microsoft YaHei" pitchFamily="34" charset="-120"/>
+              </a:rPr>
+              <a:t>①把 56.25° 化成度、分、秒；②把 110°31′30″ 化成度。</a:t>
+            </a:r>
+            <a:pPr indent="0" marL="0">
+              <a:lnSpc>
+                <a:spcPct val="110000"/>
+              </a:lnSpc>
+              <a:buNone/>
+            </a:pPr>
+            <a:r>
+              <a:rPr lang="en-US" sz="1150" dirty="0">
+                <a:solidFill>
+                  <a:srgbClr val="6E7B85"/>
+                </a:solidFill>
+                <a:latin typeface="Microsoft YaHei" pitchFamily="34" charset="0"/>
+                <a:ea typeface="Microsoft YaHei" pitchFamily="34" charset="-122"/>
+                <a:cs typeface="Microsoft YaHei" pitchFamily="34" charset="-120"/>
+              </a:rPr>
+              <a:t>　提示：大化小乘 60，小化大除以 60；②先把秒化成分，再把分化成度。</a:t>
+            </a:r>
+            <a:endParaRPr lang="en-US" sz="1250" dirty="0"/>
+          </a:p>
+        </p:txBody>
+      </p:sp>
+      <p:sp>
+        <p:nvSpPr>
+          <p:cNvPr id="11" name="Shape 9"/>
           <p:cNvSpPr/>
           <p:nvPr/>
         </p:nvSpPr>
@@ -18195,7 +19008,7 @@
       </p:sp>
       <p:sp>
         <p:nvSpPr>
-          <p:cNvPr id="8" name="Text 6"/>
+          <p:cNvPr id="12" name="Text 10"/>
           <p:cNvSpPr/>
           <p:nvPr/>
         </p:nvSpPr>
@@ -18234,7 +19047,7 @@
       </p:sp>
       <p:sp>
         <p:nvSpPr>
-          <p:cNvPr id="9" name="Text 7"/>
+          <p:cNvPr id="13" name="Text 11"/>
           <p:cNvSpPr/>
           <p:nvPr/>
         </p:nvSpPr>
@@ -18491,11 +19304,11 @@
         <p:spPr>
           <a:xfrm>
             <a:off x="609905" y="2535174"/>
-            <a:ext cx="7818120" cy="2750058"/>
+            <a:ext cx="7818120" cy="3330702"/>
           </a:xfrm>
           <a:prstGeom prst="roundRect">
             <a:avLst>
-              <a:gd name="adj" fmla="val 1995"/>
+              <a:gd name="adj" fmla="val 1647"/>
             </a:avLst>
           </a:prstGeom>
           <a:solidFill>
@@ -18520,7 +19333,7 @@
         <p:spPr>
           <a:xfrm>
             <a:off x="865937" y="2681478"/>
-            <a:ext cx="7315200" cy="2475738"/>
+            <a:ext cx="7315200" cy="3056382"/>
           </a:xfrm>
           <a:prstGeom prst="rect">
             <a:avLst/>
@@ -18550,7 +19363,7 @@
                 <a:ea typeface="Microsoft YaHei" pitchFamily="34" charset="-122"/>
                 <a:cs typeface="Microsoft YaHei" pitchFamily="34" charset="-120"/>
               </a:rPr>
-              <a:t>引入三线八角：两条直线被第三条直线所截，同位角成 F 型、内错角成 Z 型、同旁内角成 U 型。识别时只看角的位置关系，与图形摆放方向无关——把图旋转 45°，F 型还是 F 型。对顶角要抓住本质：两直线相交才有，且“对顶角相等”是定理，可以直接当依据使用。</a:t>
+              <a:t>开场玩“找造型”限时游戏：在平行线被截的图中 5 秒内找出所有 F 型、Z 型、U 型的角；把图旋转 45° 再找一遍——造型不变，学生立刻体会同位角看的是位置关系、不是摆放方向。顺势追问：“对顶角相等”能不能反过来说？由此引出命题的题设与结论。</a:t>
             </a:r>
             <a:endParaRPr lang="en-US" sz="1350" dirty="0"/>
           </a:p>
@@ -18573,7 +19386,30 @@
                 <a:ea typeface="Microsoft YaHei" pitchFamily="34" charset="-122"/>
                 <a:cs typeface="Microsoft YaHei" pitchFamily="34" charset="-120"/>
               </a:rPr>
-              <a:t>平行线的判定与性质是一对互逆命题：判定是“由角定线”——同位角相等（或内错角相等，或同旁内角互补），两直线平行，用来证明平行；性质是“由线定角”——两直线平行，同位角相等、内错角相等、同旁内角互补，用来由平行求角度。方向反了整道题就废了，审题先问自己：已知的是角还是平行？命题由题设和结论两部分组成，改写成“如果……那么……”的形式是规范训练。</a:t>
+              <a:t>判定与性质本体：判定是“由角定线”——同位角相等（或内错角相等、同旁内角互补），两直线平行，用于证明平行；性质是“由线定角”——两直线平行，同位角相等、内错角相等、同旁内角互补，用于由平行求角度，两者互逆。命题由题设和结论组成，规范训练改写成“如果……那么……”的形式。</a:t>
+            </a:r>
+            <a:endParaRPr lang="en-US" sz="1350" dirty="0"/>
+          </a:p>
+          <a:p>
+            <a:pPr indent="0" marL="0">
+              <a:lnSpc>
+                <a:spcPct val="130000"/>
+              </a:lnSpc>
+              <a:spcAft>
+                <a:spcPts val="1000"/>
+              </a:spcAft>
+              <a:buNone/>
+            </a:pPr>
+            <a:r>
+              <a:rPr lang="en-US" sz="1350" dirty="0">
+                <a:solidFill>
+                  <a:srgbClr val="202D37"/>
+                </a:solidFill>
+                <a:latin typeface="Microsoft YaHei" pitchFamily="34" charset="0"/>
+                <a:ea typeface="Microsoft YaHei" pitchFamily="34" charset="-122"/>
+                <a:cs typeface="Microsoft YaHei" pitchFamily="34" charset="-120"/>
+              </a:rPr>
+              <a:t>高频误区：判定与性质用反方向，整道证明题就塌了——审题先问自己“已知的是角还是平行”；“对顶角相等”是定理可直接引用，但“相等的角是对顶角”不成立。适用边界：三线八角必须在“两条直线被第三条直线所截”的图形中辨认；书写推理每步都要注明依据，不允许跳步凭感觉。</a:t>
             </a:r>
             <a:endParaRPr lang="en-US" sz="1350" dirty="0"/>
           </a:p>
@@ -19650,11 +20486,11 @@
         <p:spPr>
           <a:xfrm>
             <a:off x="609905" y="1748790"/>
-            <a:ext cx="10971886" cy="1234440"/>
+            <a:ext cx="10971886" cy="1147801"/>
           </a:xfrm>
           <a:prstGeom prst="roundRect">
             <a:avLst>
-              <a:gd name="adj" fmla="val 4444"/>
+              <a:gd name="adj" fmla="val 4780"/>
             </a:avLst>
           </a:prstGeom>
           <a:solidFill>
@@ -19679,7 +20515,7 @@
         <p:spPr>
           <a:xfrm>
             <a:off x="829361" y="1840230"/>
-            <a:ext cx="10532974" cy="1051560"/>
+            <a:ext cx="10532974" cy="964921"/>
           </a:xfrm>
           <a:prstGeom prst="rect">
             <a:avLst/>
@@ -19732,6 +20568,192 @@
       <p:sp>
         <p:nvSpPr>
           <p:cNvPr id="7" name="Shape 5"/>
+          <p:cNvSpPr/>
+          <p:nvPr/>
+        </p:nvSpPr>
+        <p:spPr>
+          <a:xfrm>
+            <a:off x="609905" y="3042895"/>
+            <a:ext cx="10971886" cy="1147801"/>
+          </a:xfrm>
+          <a:prstGeom prst="roundRect">
+            <a:avLst>
+              <a:gd name="adj" fmla="val 4780"/>
+            </a:avLst>
+          </a:prstGeom>
+          <a:solidFill>
+            <a:srgbClr val="FFFFFF"/>
+          </a:solidFill>
+          <a:ln/>
+          <a:effectLst>
+            <a:outerShdw sx="100000" sy="100000" kx="0" ky="0" algn="bl" rotWithShape="0" blurRad="88900" dist="25400" dir="3600000">
+              <a:srgbClr val="3A3A32">
+                <a:alpha val="16000"/>
+              </a:srgbClr>
+            </a:outerShdw>
+          </a:effectLst>
+        </p:spPr>
+      </p:sp>
+      <p:sp>
+        <p:nvSpPr>
+          <p:cNvPr id="8" name="Text 6"/>
+          <p:cNvSpPr/>
+          <p:nvPr/>
+        </p:nvSpPr>
+        <p:spPr>
+          <a:xfrm>
+            <a:off x="829361" y="3134335"/>
+            <a:ext cx="10532974" cy="964921"/>
+          </a:xfrm>
+          <a:prstGeom prst="rect">
+            <a:avLst/>
+          </a:prstGeom>
+          <a:noFill/>
+          <a:ln/>
+        </p:spPr>
+        <p:txBody>
+          <a:bodyPr wrap="square" lIns="0" tIns="0" rIns="0" bIns="0" rtlCol="0" anchor="ctr"/>
+          <a:lstStyle/>
+          <a:p>
+            <a:pPr indent="0" marL="0">
+              <a:lnSpc>
+                <a:spcPct val="115000"/>
+              </a:lnSpc>
+              <a:buNone/>
+            </a:pPr>
+            <a:r>
+              <a:rPr lang="en-US" sz="1350" b="1" dirty="0">
+                <a:solidFill>
+                  <a:srgbClr val="285C94"/>
+                </a:solidFill>
+                <a:latin typeface="Microsoft YaHei" pitchFamily="34" charset="0"/>
+                <a:ea typeface="Microsoft YaHei" pitchFamily="34" charset="-122"/>
+                <a:cs typeface="Microsoft YaHei" pitchFamily="34" charset="-120"/>
+              </a:rPr>
+              <a:t>练习 2　</a:t>
+            </a:r>
+            <a:pPr indent="0" marL="0">
+              <a:lnSpc>
+                <a:spcPct val="115000"/>
+              </a:lnSpc>
+              <a:buNone/>
+            </a:pPr>
+            <a:r>
+              <a:rPr lang="en-US" sz="1400" dirty="0">
+                <a:solidFill>
+                  <a:srgbClr val="202D37"/>
+                </a:solidFill>
+                <a:latin typeface="Microsoft YaHei" pitchFamily="34" charset="0"/>
+                <a:ea typeface="Microsoft YaHei" pitchFamily="34" charset="-122"/>
+                <a:cs typeface="Microsoft YaHei" pitchFamily="34" charset="-120"/>
+              </a:rPr>
+              <a:t>补全推理依据：①因为 AB∥CD，所以 ∠B=∠C（两直线平行，______）；②因为 ∠B=∠C，所以 AB∥CD（______，两直线平行）。</a:t>
+            </a:r>
+            <a:endParaRPr lang="en-US" sz="1350" dirty="0"/>
+          </a:p>
+        </p:txBody>
+      </p:sp>
+      <p:sp>
+        <p:nvSpPr>
+          <p:cNvPr id="9" name="Shape 7"/>
+          <p:cNvSpPr/>
+          <p:nvPr/>
+        </p:nvSpPr>
+        <p:spPr>
+          <a:xfrm>
+            <a:off x="609905" y="4949647"/>
+            <a:ext cx="10971886" cy="585216"/>
+          </a:xfrm>
+          <a:prstGeom prst="roundRect">
+            <a:avLst>
+              <a:gd name="adj" fmla="val 7813"/>
+            </a:avLst>
+          </a:prstGeom>
+          <a:solidFill>
+            <a:srgbClr val="F2E3DC"/>
+          </a:solidFill>
+          <a:ln/>
+        </p:spPr>
+      </p:sp>
+      <p:sp>
+        <p:nvSpPr>
+          <p:cNvPr id="10" name="Text 8"/>
+          <p:cNvSpPr/>
+          <p:nvPr/>
+        </p:nvSpPr>
+        <p:spPr>
+          <a:xfrm>
+            <a:off x="811073" y="5004511"/>
+            <a:ext cx="10569550" cy="493776"/>
+          </a:xfrm>
+          <a:prstGeom prst="rect">
+            <a:avLst/>
+          </a:prstGeom>
+          <a:noFill/>
+          <a:ln/>
+        </p:spPr>
+        <p:txBody>
+          <a:bodyPr wrap="square" lIns="0" tIns="0" rIns="0" bIns="0" rtlCol="0" anchor="ctr"/>
+          <a:lstStyle/>
+          <a:p>
+            <a:pPr indent="0" marL="0">
+              <a:lnSpc>
+                <a:spcPct val="110000"/>
+              </a:lnSpc>
+              <a:buNone/>
+            </a:pPr>
+            <a:r>
+              <a:rPr lang="en-US" sz="1250" b="1" dirty="0">
+                <a:solidFill>
+                  <a:srgbClr val="B45F47"/>
+                </a:solidFill>
+                <a:latin typeface="Microsoft YaHei" pitchFamily="34" charset="0"/>
+                <a:ea typeface="Microsoft YaHei" pitchFamily="34" charset="-122"/>
+                <a:cs typeface="Microsoft YaHei" pitchFamily="34" charset="-120"/>
+              </a:rPr>
+              <a:t>变式挑战（选做）　</a:t>
+            </a:r>
+            <a:pPr indent="0" marL="0">
+              <a:lnSpc>
+                <a:spcPct val="110000"/>
+              </a:lnSpc>
+              <a:buNone/>
+            </a:pPr>
+            <a:r>
+              <a:rPr lang="en-US" sz="1250" dirty="0">
+                <a:solidFill>
+                  <a:srgbClr val="202D37"/>
+                </a:solidFill>
+                <a:latin typeface="Microsoft YaHei" pitchFamily="34" charset="0"/>
+                <a:ea typeface="Microsoft YaHei" pitchFamily="34" charset="-122"/>
+                <a:cs typeface="Microsoft YaHei" pitchFamily="34" charset="-120"/>
+              </a:rPr>
+              <a:t>直线 a∥b，直线 c 截 a、b，∠1 与 ∠2 是同旁内角，∠1=110°。求 ∠2 的度数，并写出依据。</a:t>
+            </a:r>
+            <a:pPr indent="0" marL="0">
+              <a:lnSpc>
+                <a:spcPct val="110000"/>
+              </a:lnSpc>
+              <a:buNone/>
+            </a:pPr>
+            <a:r>
+              <a:rPr lang="en-US" sz="1150" dirty="0">
+                <a:solidFill>
+                  <a:srgbClr val="6E7B85"/>
+                </a:solidFill>
+                <a:latin typeface="Microsoft YaHei" pitchFamily="34" charset="0"/>
+                <a:ea typeface="Microsoft YaHei" pitchFamily="34" charset="-122"/>
+                <a:cs typeface="Microsoft YaHei" pitchFamily="34" charset="-120"/>
+              </a:rPr>
+              <a:t>　提示：同旁内角在截线同侧、两被截线之间；已知平行时它们的关系是“互补”，不是相等。</a:t>
+            </a:r>
+            <a:endParaRPr lang="en-US" sz="1250" dirty="0"/>
+          </a:p>
+        </p:txBody>
+      </p:sp>
+      <p:sp>
+        <p:nvSpPr>
+          <p:cNvPr id="11" name="Shape 9"/>
           <p:cNvSpPr/>
           <p:nvPr/>
         </p:nvSpPr>
@@ -19753,7 +20775,7 @@
       </p:sp>
       <p:sp>
         <p:nvSpPr>
-          <p:cNvPr id="8" name="Text 6"/>
+          <p:cNvPr id="12" name="Text 10"/>
           <p:cNvSpPr/>
           <p:nvPr/>
         </p:nvSpPr>
@@ -19792,7 +20814,7 @@
       </p:sp>
       <p:sp>
         <p:nvSpPr>
-          <p:cNvPr id="9" name="Text 7"/>
+          <p:cNvPr id="13" name="Text 11"/>
           <p:cNvSpPr/>
           <p:nvPr/>
         </p:nvSpPr>
@@ -21749,11 +22771,11 @@
         <p:spPr>
           <a:xfrm>
             <a:off x="609905" y="2535174"/>
-            <a:ext cx="7818120" cy="2523744"/>
+            <a:ext cx="7818120" cy="3330702"/>
           </a:xfrm>
           <a:prstGeom prst="roundRect">
             <a:avLst>
-              <a:gd name="adj" fmla="val 2174"/>
+              <a:gd name="adj" fmla="val 1647"/>
             </a:avLst>
           </a:prstGeom>
           <a:solidFill>
@@ -21778,7 +22800,7 @@
         <p:spPr>
           <a:xfrm>
             <a:off x="865937" y="2681478"/>
-            <a:ext cx="7315200" cy="2249424"/>
+            <a:ext cx="7315200" cy="3056382"/>
           </a:xfrm>
           <a:prstGeom prst="rect">
             <a:avLst/>
@@ -21808,7 +22830,7 @@
                 <a:ea typeface="Microsoft YaHei" pitchFamily="34" charset="-122"/>
                 <a:cs typeface="Microsoft YaHei" pitchFamily="34" charset="-120"/>
               </a:rPr>
-              <a:t>引入三边关系：三角形任意两边之和大于第三边。推导依据是“两点之间线段最短”——第三边是连接两点的第三条路径，必小于折线。速判方法：只需检验“两小边之和是否大于最大边”，如 4+4=8＜9，立刻排除。由此得等价推论：两边之差小于第三边，所以已知两边 a、b 时，第三边 x 满足 |a−b|＜x＜a+b。</a:t>
+              <a:t>动手开场：发下 4、4、9（单位 cm）三根小棒让学生围三角形——怎么都合不拢，一量 4+4=8 比 9 还短。失败的亲手操作比讲十遍更能立起三边关系。再把三角形三个内角撕下来拼在一起，恰好拼成一个平角——内角和 180° 有了直观证据，推理与实验互相印证。</a:t>
             </a:r>
             <a:endParaRPr lang="en-US" sz="1350" dirty="0"/>
           </a:p>
@@ -21831,7 +22853,30 @@
                 <a:ea typeface="Microsoft YaHei" pitchFamily="34" charset="-122"/>
                 <a:cs typeface="Microsoft YaHei" pitchFamily="34" charset="-120"/>
               </a:rPr>
-              <a:t>内外角的关系由内角和定理推出：三角形内角和为 180°，任一外角与相邻内角互补，因此外角等于与它不相邻的两个内角之和。推导：∠ACD=180°−∠C=∠A+∠B。这条“外角定理”在证明里常用来一步转化角度。常见误区：钝角三角形的高画到了三角形外部就以为画错（垂足在延长线上恰恰是对的）；把外角当成“相邻内角的对顶角”。</a:t>
+              <a:t>本体与推导：三角形任意两边之和大于第三边，依据是“两点之间线段最短”——第三边是连接两点的第三条路径，必小于折线。速判只查“两小边之和是否大于最大边”；等价形式是两边之差小于第三边，已知 a、b 时第三边 x 满足 |a−b|＜x＜a+b。外角与相邻内角互补，所以外角等于不相邻两内角之和。</a:t>
+            </a:r>
+            <a:endParaRPr lang="en-US" sz="1350" dirty="0"/>
+          </a:p>
+          <a:p>
+            <a:pPr indent="0" marL="0">
+              <a:lnSpc>
+                <a:spcPct val="130000"/>
+              </a:lnSpc>
+              <a:spcAft>
+                <a:spcPts val="1000"/>
+              </a:spcAft>
+              <a:buNone/>
+            </a:pPr>
+            <a:r>
+              <a:rPr lang="en-US" sz="1350" dirty="0">
+                <a:solidFill>
+                  <a:srgbClr val="202D37"/>
+                </a:solidFill>
+                <a:latin typeface="Microsoft YaHei" pitchFamily="34" charset="0"/>
+                <a:ea typeface="Microsoft YaHei" pitchFamily="34" charset="-122"/>
+                <a:cs typeface="Microsoft YaHei" pitchFamily="34" charset="-120"/>
+              </a:rPr>
+              <a:t>高频误区：钝角三角形的高画到形外就以为画错——垂足落在对边延长线上恰恰是对的；三边关系漏了“任意”二字，只查一次就下结论。适用边界：等腰问题先分类再用三边关系筛解，两小边之和小于最大边的直接舍去；外角定理只对三角形的“外角”成立，随手画的角不能乱套。</a:t>
             </a:r>
             <a:endParaRPr lang="en-US" sz="1350" dirty="0"/>
           </a:p>
@@ -22908,11 +23953,11 @@
         <p:spPr>
           <a:xfrm>
             <a:off x="609905" y="1748790"/>
-            <a:ext cx="10971886" cy="1234440"/>
+            <a:ext cx="10971886" cy="1147801"/>
           </a:xfrm>
           <a:prstGeom prst="roundRect">
             <a:avLst>
-              <a:gd name="adj" fmla="val 4444"/>
+              <a:gd name="adj" fmla="val 4780"/>
             </a:avLst>
           </a:prstGeom>
           <a:solidFill>
@@ -22937,7 +23982,7 @@
         <p:spPr>
           <a:xfrm>
             <a:off x="829361" y="1840230"/>
-            <a:ext cx="10532974" cy="1051560"/>
+            <a:ext cx="10532974" cy="964921"/>
           </a:xfrm>
           <a:prstGeom prst="rect">
             <a:avLst/>
@@ -22990,6 +24035,192 @@
       <p:sp>
         <p:nvSpPr>
           <p:cNvPr id="7" name="Shape 5"/>
+          <p:cNvSpPr/>
+          <p:nvPr/>
+        </p:nvSpPr>
+        <p:spPr>
+          <a:xfrm>
+            <a:off x="609905" y="3042895"/>
+            <a:ext cx="10971886" cy="1147801"/>
+          </a:xfrm>
+          <a:prstGeom prst="roundRect">
+            <a:avLst>
+              <a:gd name="adj" fmla="val 4780"/>
+            </a:avLst>
+          </a:prstGeom>
+          <a:solidFill>
+            <a:srgbClr val="FFFFFF"/>
+          </a:solidFill>
+          <a:ln/>
+          <a:effectLst>
+            <a:outerShdw sx="100000" sy="100000" kx="0" ky="0" algn="bl" rotWithShape="0" blurRad="88900" dist="25400" dir="3600000">
+              <a:srgbClr val="3A3A32">
+                <a:alpha val="16000"/>
+              </a:srgbClr>
+            </a:outerShdw>
+          </a:effectLst>
+        </p:spPr>
+      </p:sp>
+      <p:sp>
+        <p:nvSpPr>
+          <p:cNvPr id="8" name="Text 6"/>
+          <p:cNvSpPr/>
+          <p:nvPr/>
+        </p:nvSpPr>
+        <p:spPr>
+          <a:xfrm>
+            <a:off x="829361" y="3134335"/>
+            <a:ext cx="10532974" cy="964921"/>
+          </a:xfrm>
+          <a:prstGeom prst="rect">
+            <a:avLst/>
+          </a:prstGeom>
+          <a:noFill/>
+          <a:ln/>
+        </p:spPr>
+        <p:txBody>
+          <a:bodyPr wrap="square" lIns="0" tIns="0" rIns="0" bIns="0" rtlCol="0" anchor="ctr"/>
+          <a:lstStyle/>
+          <a:p>
+            <a:pPr indent="0" marL="0">
+              <a:lnSpc>
+                <a:spcPct val="115000"/>
+              </a:lnSpc>
+              <a:buNone/>
+            </a:pPr>
+            <a:r>
+              <a:rPr lang="en-US" sz="1350" b="1" dirty="0">
+                <a:solidFill>
+                  <a:srgbClr val="285C94"/>
+                </a:solidFill>
+                <a:latin typeface="Microsoft YaHei" pitchFamily="34" charset="0"/>
+                <a:ea typeface="Microsoft YaHei" pitchFamily="34" charset="-122"/>
+                <a:cs typeface="Microsoft YaHei" pitchFamily="34" charset="-120"/>
+              </a:rPr>
+              <a:t>练习 2　</a:t>
+            </a:r>
+            <a:pPr indent="0" marL="0">
+              <a:lnSpc>
+                <a:spcPct val="115000"/>
+              </a:lnSpc>
+              <a:buNone/>
+            </a:pPr>
+            <a:r>
+              <a:rPr lang="en-US" sz="1400" dirty="0">
+                <a:solidFill>
+                  <a:srgbClr val="202D37"/>
+                </a:solidFill>
+                <a:latin typeface="Microsoft YaHei" pitchFamily="34" charset="0"/>
+                <a:ea typeface="Microsoft YaHei" pitchFamily="34" charset="-122"/>
+                <a:cs typeface="Microsoft YaHei" pitchFamily="34" charset="-120"/>
+              </a:rPr>
+              <a:t>三角形两边长分别为 3 和 7，第三边长为整数 x。求 x 的取值范围；若这个三角形的周长是偶数，x 可以取哪些值？</a:t>
+            </a:r>
+            <a:endParaRPr lang="en-US" sz="1350" dirty="0"/>
+          </a:p>
+        </p:txBody>
+      </p:sp>
+      <p:sp>
+        <p:nvSpPr>
+          <p:cNvPr id="9" name="Shape 7"/>
+          <p:cNvSpPr/>
+          <p:nvPr/>
+        </p:nvSpPr>
+        <p:spPr>
+          <a:xfrm>
+            <a:off x="609905" y="4949647"/>
+            <a:ext cx="10971886" cy="585216"/>
+          </a:xfrm>
+          <a:prstGeom prst="roundRect">
+            <a:avLst>
+              <a:gd name="adj" fmla="val 7813"/>
+            </a:avLst>
+          </a:prstGeom>
+          <a:solidFill>
+            <a:srgbClr val="F2E3DC"/>
+          </a:solidFill>
+          <a:ln/>
+        </p:spPr>
+      </p:sp>
+      <p:sp>
+        <p:nvSpPr>
+          <p:cNvPr id="10" name="Text 8"/>
+          <p:cNvSpPr/>
+          <p:nvPr/>
+        </p:nvSpPr>
+        <p:spPr>
+          <a:xfrm>
+            <a:off x="811073" y="5004511"/>
+            <a:ext cx="10569550" cy="493776"/>
+          </a:xfrm>
+          <a:prstGeom prst="rect">
+            <a:avLst/>
+          </a:prstGeom>
+          <a:noFill/>
+          <a:ln/>
+        </p:spPr>
+        <p:txBody>
+          <a:bodyPr wrap="square" lIns="0" tIns="0" rIns="0" bIns="0" rtlCol="0" anchor="ctr"/>
+          <a:lstStyle/>
+          <a:p>
+            <a:pPr indent="0" marL="0">
+              <a:lnSpc>
+                <a:spcPct val="110000"/>
+              </a:lnSpc>
+              <a:buNone/>
+            </a:pPr>
+            <a:r>
+              <a:rPr lang="en-US" sz="1250" b="1" dirty="0">
+                <a:solidFill>
+                  <a:srgbClr val="B45F47"/>
+                </a:solidFill>
+                <a:latin typeface="Microsoft YaHei" pitchFamily="34" charset="0"/>
+                <a:ea typeface="Microsoft YaHei" pitchFamily="34" charset="-122"/>
+                <a:cs typeface="Microsoft YaHei" pitchFamily="34" charset="-120"/>
+              </a:rPr>
+              <a:t>变式挑战（选做）　</a:t>
+            </a:r>
+            <a:pPr indent="0" marL="0">
+              <a:lnSpc>
+                <a:spcPct val="110000"/>
+              </a:lnSpc>
+              <a:buNone/>
+            </a:pPr>
+            <a:r>
+              <a:rPr lang="en-US" sz="1250" dirty="0">
+                <a:solidFill>
+                  <a:srgbClr val="202D37"/>
+                </a:solidFill>
+                <a:latin typeface="Microsoft YaHei" pitchFamily="34" charset="0"/>
+                <a:ea typeface="Microsoft YaHei" pitchFamily="34" charset="-122"/>
+                <a:cs typeface="Microsoft YaHei" pitchFamily="34" charset="-120"/>
+              </a:rPr>
+              <a:t>在 △ABC 中，∠A=48°，∠B=52°。求 ∠C 及与 ∠C 相邻的外角的度数。</a:t>
+            </a:r>
+            <a:pPr indent="0" marL="0">
+              <a:lnSpc>
+                <a:spcPct val="110000"/>
+              </a:lnSpc>
+              <a:buNone/>
+            </a:pPr>
+            <a:r>
+              <a:rPr lang="en-US" sz="1150" dirty="0">
+                <a:solidFill>
+                  <a:srgbClr val="6E7B85"/>
+                </a:solidFill>
+                <a:latin typeface="Microsoft YaHei" pitchFamily="34" charset="0"/>
+                <a:ea typeface="Microsoft YaHei" pitchFamily="34" charset="-122"/>
+                <a:cs typeface="Microsoft YaHei" pitchFamily="34" charset="-120"/>
+              </a:rPr>
+              <a:t>　提示：先用内角和求 ∠C；外角既可按“180°−相邻内角”算，也可按“不相邻两内角之和”算，两种算法互相检验。</a:t>
+            </a:r>
+            <a:endParaRPr lang="en-US" sz="1250" dirty="0"/>
+          </a:p>
+        </p:txBody>
+      </p:sp>
+      <p:sp>
+        <p:nvSpPr>
+          <p:cNvPr id="11" name="Shape 9"/>
           <p:cNvSpPr/>
           <p:nvPr/>
         </p:nvSpPr>
@@ -23011,7 +24242,7 @@
       </p:sp>
       <p:sp>
         <p:nvSpPr>
-          <p:cNvPr id="8" name="Text 6"/>
+          <p:cNvPr id="12" name="Text 10"/>
           <p:cNvSpPr/>
           <p:nvPr/>
         </p:nvSpPr>
@@ -23050,7 +24281,7 @@
       </p:sp>
       <p:sp>
         <p:nvSpPr>
-          <p:cNvPr id="9" name="Text 7"/>
+          <p:cNvPr id="13" name="Text 11"/>
           <p:cNvSpPr/>
           <p:nvPr/>
         </p:nvSpPr>
@@ -23307,11 +24538,11 @@
         <p:spPr>
           <a:xfrm>
             <a:off x="609905" y="2535174"/>
-            <a:ext cx="7818120" cy="2523744"/>
+            <a:ext cx="7818120" cy="3330702"/>
           </a:xfrm>
           <a:prstGeom prst="roundRect">
             <a:avLst>
-              <a:gd name="adj" fmla="val 2174"/>
+              <a:gd name="adj" fmla="val 1647"/>
             </a:avLst>
           </a:prstGeom>
           <a:solidFill>
@@ -23336,7 +24567,7 @@
         <p:spPr>
           <a:xfrm>
             <a:off x="865937" y="2681478"/>
-            <a:ext cx="7315200" cy="2249424"/>
+            <a:ext cx="7315200" cy="3056382"/>
           </a:xfrm>
           <a:prstGeom prst="rect">
             <a:avLst/>
@@ -23366,7 +24597,7 @@
                 <a:ea typeface="Microsoft YaHei" pitchFamily="34" charset="-122"/>
                 <a:cs typeface="Microsoft YaHei" pitchFamily="34" charset="-120"/>
               </a:rPr>
-              <a:t>引入判定定理：SSS、SAS、ASA、AAS 四条是有效判定，而 SSA（边边角）与 AAA 不能判定全等——SSA 的反例：固定两边和其中一边的对角，能摆出两个形状不同的三角形，这就是规范的教材通行说法。使用时盯住“夹角”：SAS 的角必须是两边的夹角。角平分线性质定理：角平分线上的点到角两边的距离相等，使用前提是先作出两条垂线段。</a:t>
+              <a:t>开场剪两个纸片三角形演示 SSA 的反例：固定两条边和其中一边的对角，能摆出一钝一尖两个形状不同的三角形——眼见为实，“边边角”不能判定全等。再让学生在两个全等三角形图中找公共边、公共角、对顶角，体会条件经常藏在图形里，不写在题干上。</a:t>
             </a:r>
             <a:endParaRPr lang="en-US" sz="1350" dirty="0"/>
           </a:p>
@@ -23389,7 +24620,30 @@
                 <a:ea typeface="Microsoft YaHei" pitchFamily="34" charset="-122"/>
                 <a:cs typeface="Microsoft YaHei" pitchFamily="34" charset="-120"/>
               </a:rPr>
-              <a:t>证明题找条件的顺序：先抄已知，再挖隐含条件——公共边、公共角、对顶角、等角加公共角。书写规范步步有依据：判定方法写在括号里，对应顶点字母按顺序写。示范：题目同时给两组边和“一角相等”时，先检查这个角是不是夹角，不是就想办法通过等式加减把它变成夹角。误区：把 SSA 侥幸当判定用，或在两图中用不同依据硬凑。</a:t>
+              <a:t>判定本体：SSS、SAS、ASA、AAS 四条有效；SAS 的角必须是两边的夹角，AAS 可由 ASA 配合内角和推出。角平分线性质：角平分线上的点到角两边的距离相等，使用前先作出两条垂线段。找条件的次序：先抄已知，再挖隐含——公共边、公共角、对顶角，最后用等式性质把已知角的和差转化成需要的夹角。</a:t>
+            </a:r>
+            <a:endParaRPr lang="en-US" sz="1350" dirty="0"/>
+          </a:p>
+          <a:p>
+            <a:pPr indent="0" marL="0">
+              <a:lnSpc>
+                <a:spcPct val="130000"/>
+              </a:lnSpc>
+              <a:spcAft>
+                <a:spcPts val="1000"/>
+              </a:spcAft>
+              <a:buNone/>
+            </a:pPr>
+            <a:r>
+              <a:rPr lang="en-US" sz="1350" dirty="0">
+                <a:solidFill>
+                  <a:srgbClr val="202D37"/>
+                </a:solidFill>
+                <a:latin typeface="Microsoft YaHei" pitchFamily="34" charset="0"/>
+                <a:ea typeface="Microsoft YaHei" pitchFamily="34" charset="-122"/>
+                <a:cs typeface="Microsoft YaHei" pitchFamily="34" charset="-120"/>
+              </a:rPr>
+              <a:t>高频误区：把 SSA 侥幸当判定用；书写时对应顶点不按顺序、括号里不注判定方法。适用边界：AAA 只保证形状相同、大小不一定相等，而全等要求形状大小都相同，所以判定必须至少有一组对应边参与——这一条能快速排除 AAA 和 SSA，也可用来检查自己凑的条件齐不齐。</a:t>
             </a:r>
             <a:endParaRPr lang="en-US" sz="1350" dirty="0"/>
           </a:p>
@@ -24466,11 +25720,11 @@
         <p:spPr>
           <a:xfrm>
             <a:off x="609905" y="1748790"/>
-            <a:ext cx="10971886" cy="1234440"/>
+            <a:ext cx="10971886" cy="1147801"/>
           </a:xfrm>
           <a:prstGeom prst="roundRect">
             <a:avLst>
-              <a:gd name="adj" fmla="val 4444"/>
+              <a:gd name="adj" fmla="val 4780"/>
             </a:avLst>
           </a:prstGeom>
           <a:solidFill>
@@ -24495,7 +25749,7 @@
         <p:spPr>
           <a:xfrm>
             <a:off x="829361" y="1840230"/>
-            <a:ext cx="10532974" cy="1051560"/>
+            <a:ext cx="10532974" cy="964921"/>
           </a:xfrm>
           <a:prstGeom prst="rect">
             <a:avLst/>
@@ -24548,6 +25802,192 @@
       <p:sp>
         <p:nvSpPr>
           <p:cNvPr id="7" name="Shape 5"/>
+          <p:cNvSpPr/>
+          <p:nvPr/>
+        </p:nvSpPr>
+        <p:spPr>
+          <a:xfrm>
+            <a:off x="609905" y="3042895"/>
+            <a:ext cx="10971886" cy="1147801"/>
+          </a:xfrm>
+          <a:prstGeom prst="roundRect">
+            <a:avLst>
+              <a:gd name="adj" fmla="val 4780"/>
+            </a:avLst>
+          </a:prstGeom>
+          <a:solidFill>
+            <a:srgbClr val="FFFFFF"/>
+          </a:solidFill>
+          <a:ln/>
+          <a:effectLst>
+            <a:outerShdw sx="100000" sy="100000" kx="0" ky="0" algn="bl" rotWithShape="0" blurRad="88900" dist="25400" dir="3600000">
+              <a:srgbClr val="3A3A32">
+                <a:alpha val="16000"/>
+              </a:srgbClr>
+            </a:outerShdw>
+          </a:effectLst>
+        </p:spPr>
+      </p:sp>
+      <p:sp>
+        <p:nvSpPr>
+          <p:cNvPr id="8" name="Text 6"/>
+          <p:cNvSpPr/>
+          <p:nvPr/>
+        </p:nvSpPr>
+        <p:spPr>
+          <a:xfrm>
+            <a:off x="829361" y="3134335"/>
+            <a:ext cx="10532974" cy="964921"/>
+          </a:xfrm>
+          <a:prstGeom prst="rect">
+            <a:avLst/>
+          </a:prstGeom>
+          <a:noFill/>
+          <a:ln/>
+        </p:spPr>
+        <p:txBody>
+          <a:bodyPr wrap="square" lIns="0" tIns="0" rIns="0" bIns="0" rtlCol="0" anchor="ctr"/>
+          <a:lstStyle/>
+          <a:p>
+            <a:pPr indent="0" marL="0">
+              <a:lnSpc>
+                <a:spcPct val="115000"/>
+              </a:lnSpc>
+              <a:buNone/>
+            </a:pPr>
+            <a:r>
+              <a:rPr lang="en-US" sz="1350" b="1" dirty="0">
+                <a:solidFill>
+                  <a:srgbClr val="285C94"/>
+                </a:solidFill>
+                <a:latin typeface="Microsoft YaHei" pitchFamily="34" charset="0"/>
+                <a:ea typeface="Microsoft YaHei" pitchFamily="34" charset="-122"/>
+                <a:cs typeface="Microsoft YaHei" pitchFamily="34" charset="-120"/>
+              </a:rPr>
+              <a:t>练习 2　</a:t>
+            </a:r>
+            <a:pPr indent="0" marL="0">
+              <a:lnSpc>
+                <a:spcPct val="115000"/>
+              </a:lnSpc>
+              <a:buNone/>
+            </a:pPr>
+            <a:r>
+              <a:rPr lang="en-US" sz="1400" dirty="0">
+                <a:solidFill>
+                  <a:srgbClr val="202D37"/>
+                </a:solidFill>
+                <a:latin typeface="Microsoft YaHei" pitchFamily="34" charset="0"/>
+                <a:ea typeface="Microsoft YaHei" pitchFamily="34" charset="-122"/>
+                <a:cs typeface="Microsoft YaHei" pitchFamily="34" charset="-120"/>
+              </a:rPr>
+              <a:t>点 B、E、C、F 在同一条直线上，AB=DE，AC=DF，BE=CF。求证：△ABC≌△DEF。</a:t>
+            </a:r>
+            <a:endParaRPr lang="en-US" sz="1350" dirty="0"/>
+          </a:p>
+        </p:txBody>
+      </p:sp>
+      <p:sp>
+        <p:nvSpPr>
+          <p:cNvPr id="9" name="Shape 7"/>
+          <p:cNvSpPr/>
+          <p:nvPr/>
+        </p:nvSpPr>
+        <p:spPr>
+          <a:xfrm>
+            <a:off x="609905" y="4949647"/>
+            <a:ext cx="10971886" cy="585216"/>
+          </a:xfrm>
+          <a:prstGeom prst="roundRect">
+            <a:avLst>
+              <a:gd name="adj" fmla="val 7813"/>
+            </a:avLst>
+          </a:prstGeom>
+          <a:solidFill>
+            <a:srgbClr val="F2E3DC"/>
+          </a:solidFill>
+          <a:ln/>
+        </p:spPr>
+      </p:sp>
+      <p:sp>
+        <p:nvSpPr>
+          <p:cNvPr id="10" name="Text 8"/>
+          <p:cNvSpPr/>
+          <p:nvPr/>
+        </p:nvSpPr>
+        <p:spPr>
+          <a:xfrm>
+            <a:off x="811073" y="5004511"/>
+            <a:ext cx="10569550" cy="493776"/>
+          </a:xfrm>
+          <a:prstGeom prst="rect">
+            <a:avLst/>
+          </a:prstGeom>
+          <a:noFill/>
+          <a:ln/>
+        </p:spPr>
+        <p:txBody>
+          <a:bodyPr wrap="square" lIns="0" tIns="0" rIns="0" bIns="0" rtlCol="0" anchor="ctr"/>
+          <a:lstStyle/>
+          <a:p>
+            <a:pPr indent="0" marL="0">
+              <a:lnSpc>
+                <a:spcPct val="110000"/>
+              </a:lnSpc>
+              <a:buNone/>
+            </a:pPr>
+            <a:r>
+              <a:rPr lang="en-US" sz="1250" b="1" dirty="0">
+                <a:solidFill>
+                  <a:srgbClr val="B45F47"/>
+                </a:solidFill>
+                <a:latin typeface="Microsoft YaHei" pitchFamily="34" charset="0"/>
+                <a:ea typeface="Microsoft YaHei" pitchFamily="34" charset="-122"/>
+                <a:cs typeface="Microsoft YaHei" pitchFamily="34" charset="-120"/>
+              </a:rPr>
+              <a:t>变式挑战（选做）　</a:t>
+            </a:r>
+            <a:pPr indent="0" marL="0">
+              <a:lnSpc>
+                <a:spcPct val="110000"/>
+              </a:lnSpc>
+              <a:buNone/>
+            </a:pPr>
+            <a:r>
+              <a:rPr lang="en-US" sz="1250" dirty="0">
+                <a:solidFill>
+                  <a:srgbClr val="202D37"/>
+                </a:solidFill>
+                <a:latin typeface="Microsoft YaHei" pitchFamily="34" charset="0"/>
+                <a:ea typeface="Microsoft YaHei" pitchFamily="34" charset="-122"/>
+                <a:cs typeface="Microsoft YaHei" pitchFamily="34" charset="-120"/>
+              </a:rPr>
+              <a:t>已知：AB=AC，BD=CD（D 在 BC 上）。求证：△ABD≌△ACD。</a:t>
+            </a:r>
+            <a:pPr indent="0" marL="0">
+              <a:lnSpc>
+                <a:spcPct val="110000"/>
+              </a:lnSpc>
+              <a:buNone/>
+            </a:pPr>
+            <a:r>
+              <a:rPr lang="en-US" sz="1150" dirty="0">
+                <a:solidFill>
+                  <a:srgbClr val="6E7B85"/>
+                </a:solidFill>
+                <a:latin typeface="Microsoft YaHei" pitchFamily="34" charset="0"/>
+                <a:ea typeface="Microsoft YaHei" pitchFamily="34" charset="-122"/>
+                <a:cs typeface="Microsoft YaHei" pitchFamily="34" charset="-120"/>
+              </a:rPr>
+              <a:t>　提示：两组边是已知，第三组边看图形——两个三角形有一条公共边。</a:t>
+            </a:r>
+            <a:endParaRPr lang="en-US" sz="1250" dirty="0"/>
+          </a:p>
+        </p:txBody>
+      </p:sp>
+      <p:sp>
+        <p:nvSpPr>
+          <p:cNvPr id="11" name="Shape 9"/>
           <p:cNvSpPr/>
           <p:nvPr/>
         </p:nvSpPr>
@@ -24569,7 +26009,7 @@
       </p:sp>
       <p:sp>
         <p:nvSpPr>
-          <p:cNvPr id="8" name="Text 6"/>
+          <p:cNvPr id="12" name="Text 10"/>
           <p:cNvSpPr/>
           <p:nvPr/>
         </p:nvSpPr>
@@ -24608,7 +26048,7 @@
       </p:sp>
       <p:sp>
         <p:nvSpPr>
-          <p:cNvPr id="9" name="Text 7"/>
+          <p:cNvPr id="13" name="Text 11"/>
           <p:cNvSpPr/>
           <p:nvPr/>
         </p:nvSpPr>
@@ -26281,11 +27721,11 @@
         <p:spPr>
           <a:xfrm>
             <a:off x="609905" y="2535174"/>
-            <a:ext cx="7818120" cy="2750058"/>
+            <a:ext cx="7818120" cy="3104388"/>
           </a:xfrm>
           <a:prstGeom prst="roundRect">
             <a:avLst>
-              <a:gd name="adj" fmla="val 1995"/>
+              <a:gd name="adj" fmla="val 1767"/>
             </a:avLst>
           </a:prstGeom>
           <a:solidFill>
@@ -26310,7 +27750,7 @@
         <p:spPr>
           <a:xfrm>
             <a:off x="865937" y="2681478"/>
-            <a:ext cx="7315200" cy="2475738"/>
+            <a:ext cx="7315200" cy="2830068"/>
           </a:xfrm>
           <a:prstGeom prst="rect">
             <a:avLst/>
@@ -26340,7 +27780,7 @@
                 <a:ea typeface="Microsoft YaHei" pitchFamily="34" charset="-122"/>
                 <a:cs typeface="Microsoft YaHei" pitchFamily="34" charset="-120"/>
               </a:rPr>
-              <a:t>引入等腰三角形的性质：两底角相等，推导依据是等边对等角（可由全等或轴对称说明）。顶角平分线、底边上的中线、底边上的高“三线合一”，但必须先确认三角形是等腰且线在底边上，条件不能省略。已知一角求其余角时先分类：给的角可能是顶角也可能是底角；若给的是钝角或直角，只能当顶角（两个钝角底角之和会超过 180°），这一步排增解。</a:t>
+              <a:t>开场两问：等腰三角形“一个角是 100°”，另两个角是多少？改成 40° 还是一个答案吗？先猜后算，猜错的同学恰好掉进了“这个角是顶角还是底角”的分类坑。再演示对折等腰纸片：两底角完全重合——轴对称性看得见，等腰性质从操作中长出来。</a:t>
             </a:r>
             <a:endParaRPr lang="en-US" sz="1350" dirty="0"/>
           </a:p>
@@ -26363,7 +27803,30 @@
                 <a:ea typeface="Microsoft YaHei" pitchFamily="34" charset="-122"/>
                 <a:cs typeface="Microsoft YaHei" pitchFamily="34" charset="-120"/>
               </a:rPr>
-              <a:t>轴对称的应用：最短路径问题（将军饮马）。推导思路：直线 l 同侧两点 A、B，在 l 上找点 P 使 AP+PB 最小。作 A 关于 l 的对称点 A′，则 AP=A′P（垂直平分线性质），AP+PB 转化为 A′P+PB；再依据“两点之间线段最短”，当 A′、P、B 共线时和最小，最小值就是 A′B。化折为直是把对称变换当工具，而不是无来由地添辅助线。</a:t>
+              <a:t>性质本体：等边对等角（两底角相等），可由全等或对折重合说明；顶角平分线、底边上的中线、底边上的高“三线合一”，前提是等腰且线在底边上。已知一角求其余角先分类：钝角（或直角）只能当顶角，否则两个底角之和超过 180°，这一步排增解。最短路径问题作对称点化折为直，依据“两点之间线段最短”。</a:t>
+            </a:r>
+            <a:endParaRPr lang="en-US" sz="1350" dirty="0"/>
+          </a:p>
+          <a:p>
+            <a:pPr indent="0" marL="0">
+              <a:lnSpc>
+                <a:spcPct val="130000"/>
+              </a:lnSpc>
+              <a:spcAft>
+                <a:spcPts val="1000"/>
+              </a:spcAft>
+              <a:buNone/>
+            </a:pPr>
+            <a:r>
+              <a:rPr lang="en-US" sz="1350" dirty="0">
+                <a:solidFill>
+                  <a:srgbClr val="202D37"/>
+                </a:solidFill>
+                <a:latin typeface="Microsoft YaHei" pitchFamily="34" charset="0"/>
+                <a:ea typeface="Microsoft YaHei" pitchFamily="34" charset="-122"/>
+                <a:cs typeface="Microsoft YaHei" pitchFamily="34" charset="-120"/>
+              </a:rPr>
+              <a:t>高频误区：见角不分类直接套公式，漏掉一解；把“三线合一”用在任意三角形上；将军饮马问题凭感觉直接连 AB、不作对称点。适用边界：必须先确认“有两边相等”才能使用等腰性质；将军饮马模型要求两定点在直线同侧，异侧时直接连线即为最短，不必对称化折。</a:t>
             </a:r>
             <a:endParaRPr lang="en-US" sz="1350" dirty="0"/>
           </a:p>
@@ -27440,11 +28903,11 @@
         <p:spPr>
           <a:xfrm>
             <a:off x="609905" y="1748790"/>
-            <a:ext cx="10971886" cy="1234440"/>
+            <a:ext cx="10971886" cy="1147801"/>
           </a:xfrm>
           <a:prstGeom prst="roundRect">
             <a:avLst>
-              <a:gd name="adj" fmla="val 4444"/>
+              <a:gd name="adj" fmla="val 4780"/>
             </a:avLst>
           </a:prstGeom>
           <a:solidFill>
@@ -27469,7 +28932,7 @@
         <p:spPr>
           <a:xfrm>
             <a:off x="829361" y="1840230"/>
-            <a:ext cx="10532974" cy="1051560"/>
+            <a:ext cx="10532974" cy="964921"/>
           </a:xfrm>
           <a:prstGeom prst="rect">
             <a:avLst/>
@@ -27522,6 +28985,192 @@
       <p:sp>
         <p:nvSpPr>
           <p:cNvPr id="7" name="Shape 5"/>
+          <p:cNvSpPr/>
+          <p:nvPr/>
+        </p:nvSpPr>
+        <p:spPr>
+          <a:xfrm>
+            <a:off x="609905" y="3042895"/>
+            <a:ext cx="10971886" cy="1147801"/>
+          </a:xfrm>
+          <a:prstGeom prst="roundRect">
+            <a:avLst>
+              <a:gd name="adj" fmla="val 4780"/>
+            </a:avLst>
+          </a:prstGeom>
+          <a:solidFill>
+            <a:srgbClr val="FFFFFF"/>
+          </a:solidFill>
+          <a:ln/>
+          <a:effectLst>
+            <a:outerShdw sx="100000" sy="100000" kx="0" ky="0" algn="bl" rotWithShape="0" blurRad="88900" dist="25400" dir="3600000">
+              <a:srgbClr val="3A3A32">
+                <a:alpha val="16000"/>
+              </a:srgbClr>
+            </a:outerShdw>
+          </a:effectLst>
+        </p:spPr>
+      </p:sp>
+      <p:sp>
+        <p:nvSpPr>
+          <p:cNvPr id="8" name="Text 6"/>
+          <p:cNvSpPr/>
+          <p:nvPr/>
+        </p:nvSpPr>
+        <p:spPr>
+          <a:xfrm>
+            <a:off x="829361" y="3134335"/>
+            <a:ext cx="10532974" cy="964921"/>
+          </a:xfrm>
+          <a:prstGeom prst="rect">
+            <a:avLst/>
+          </a:prstGeom>
+          <a:noFill/>
+          <a:ln/>
+        </p:spPr>
+        <p:txBody>
+          <a:bodyPr wrap="square" lIns="0" tIns="0" rIns="0" bIns="0" rtlCol="0" anchor="ctr"/>
+          <a:lstStyle/>
+          <a:p>
+            <a:pPr indent="0" marL="0">
+              <a:lnSpc>
+                <a:spcPct val="115000"/>
+              </a:lnSpc>
+              <a:buNone/>
+            </a:pPr>
+            <a:r>
+              <a:rPr lang="en-US" sz="1350" b="1" dirty="0">
+                <a:solidFill>
+                  <a:srgbClr val="285C94"/>
+                </a:solidFill>
+                <a:latin typeface="Microsoft YaHei" pitchFamily="34" charset="0"/>
+                <a:ea typeface="Microsoft YaHei" pitchFamily="34" charset="-122"/>
+                <a:cs typeface="Microsoft YaHei" pitchFamily="34" charset="-120"/>
+              </a:rPr>
+              <a:t>练习 2　</a:t>
+            </a:r>
+            <a:pPr indent="0" marL="0">
+              <a:lnSpc>
+                <a:spcPct val="115000"/>
+              </a:lnSpc>
+              <a:buNone/>
+            </a:pPr>
+            <a:r>
+              <a:rPr lang="en-US" sz="1400" dirty="0">
+                <a:solidFill>
+                  <a:srgbClr val="202D37"/>
+                </a:solidFill>
+                <a:latin typeface="Microsoft YaHei" pitchFamily="34" charset="0"/>
+                <a:ea typeface="Microsoft YaHei" pitchFamily="34" charset="-122"/>
+                <a:cs typeface="Microsoft YaHei" pitchFamily="34" charset="-120"/>
+              </a:rPr>
+              <a:t>等腰三角形的周长为 20，其中一边长为 6，求其余两边的长。</a:t>
+            </a:r>
+            <a:endParaRPr lang="en-US" sz="1350" dirty="0"/>
+          </a:p>
+        </p:txBody>
+      </p:sp>
+      <p:sp>
+        <p:nvSpPr>
+          <p:cNvPr id="9" name="Shape 7"/>
+          <p:cNvSpPr/>
+          <p:nvPr/>
+        </p:nvSpPr>
+        <p:spPr>
+          <a:xfrm>
+            <a:off x="609905" y="4949647"/>
+            <a:ext cx="10971886" cy="585216"/>
+          </a:xfrm>
+          <a:prstGeom prst="roundRect">
+            <a:avLst>
+              <a:gd name="adj" fmla="val 7813"/>
+            </a:avLst>
+          </a:prstGeom>
+          <a:solidFill>
+            <a:srgbClr val="F2E3DC"/>
+          </a:solidFill>
+          <a:ln/>
+        </p:spPr>
+      </p:sp>
+      <p:sp>
+        <p:nvSpPr>
+          <p:cNvPr id="10" name="Text 8"/>
+          <p:cNvSpPr/>
+          <p:nvPr/>
+        </p:nvSpPr>
+        <p:spPr>
+          <a:xfrm>
+            <a:off x="811073" y="5004511"/>
+            <a:ext cx="10569550" cy="493776"/>
+          </a:xfrm>
+          <a:prstGeom prst="rect">
+            <a:avLst/>
+          </a:prstGeom>
+          <a:noFill/>
+          <a:ln/>
+        </p:spPr>
+        <p:txBody>
+          <a:bodyPr wrap="square" lIns="0" tIns="0" rIns="0" bIns="0" rtlCol="0" anchor="ctr"/>
+          <a:lstStyle/>
+          <a:p>
+            <a:pPr indent="0" marL="0">
+              <a:lnSpc>
+                <a:spcPct val="110000"/>
+              </a:lnSpc>
+              <a:buNone/>
+            </a:pPr>
+            <a:r>
+              <a:rPr lang="en-US" sz="1250" b="1" dirty="0">
+                <a:solidFill>
+                  <a:srgbClr val="B45F47"/>
+                </a:solidFill>
+                <a:latin typeface="Microsoft YaHei" pitchFamily="34" charset="0"/>
+                <a:ea typeface="Microsoft YaHei" pitchFamily="34" charset="-122"/>
+                <a:cs typeface="Microsoft YaHei" pitchFamily="34" charset="-120"/>
+              </a:rPr>
+              <a:t>变式挑战（选做）　</a:t>
+            </a:r>
+            <a:pPr indent="0" marL="0">
+              <a:lnSpc>
+                <a:spcPct val="110000"/>
+              </a:lnSpc>
+              <a:buNone/>
+            </a:pPr>
+            <a:r>
+              <a:rPr lang="en-US" sz="1250" dirty="0">
+                <a:solidFill>
+                  <a:srgbClr val="202D37"/>
+                </a:solidFill>
+                <a:latin typeface="Microsoft YaHei" pitchFamily="34" charset="0"/>
+                <a:ea typeface="Microsoft YaHei" pitchFamily="34" charset="-122"/>
+                <a:cs typeface="Microsoft YaHei" pitchFamily="34" charset="-120"/>
+              </a:rPr>
+              <a:t>等腰三角形的一个角是 70°，求另外两个角的度数。</a:t>
+            </a:r>
+            <a:pPr indent="0" marL="0">
+              <a:lnSpc>
+                <a:spcPct val="110000"/>
+              </a:lnSpc>
+              <a:buNone/>
+            </a:pPr>
+            <a:r>
+              <a:rPr lang="en-US" sz="1150" dirty="0">
+                <a:solidFill>
+                  <a:srgbClr val="6E7B85"/>
+                </a:solidFill>
+                <a:latin typeface="Microsoft YaHei" pitchFamily="34" charset="0"/>
+                <a:ea typeface="Microsoft YaHei" pitchFamily="34" charset="-122"/>
+                <a:cs typeface="Microsoft YaHei" pitchFamily="34" charset="-120"/>
+              </a:rPr>
+              <a:t>　提示：70° 是锐角，顶角、底角两种身份都有可能——分两类算，再用内角和逐一检验。</a:t>
+            </a:r>
+            <a:endParaRPr lang="en-US" sz="1250" dirty="0"/>
+          </a:p>
+        </p:txBody>
+      </p:sp>
+      <p:sp>
+        <p:nvSpPr>
+          <p:cNvPr id="11" name="Shape 9"/>
           <p:cNvSpPr/>
           <p:nvPr/>
         </p:nvSpPr>
@@ -27543,7 +29192,7 @@
       </p:sp>
       <p:sp>
         <p:nvSpPr>
-          <p:cNvPr id="8" name="Text 6"/>
+          <p:cNvPr id="12" name="Text 10"/>
           <p:cNvSpPr/>
           <p:nvPr/>
         </p:nvSpPr>
@@ -27582,7 +29231,7 @@
       </p:sp>
       <p:sp>
         <p:nvSpPr>
-          <p:cNvPr id="9" name="Text 7"/>
+          <p:cNvPr id="13" name="Text 11"/>
           <p:cNvSpPr/>
           <p:nvPr/>
         </p:nvSpPr>
@@ -28132,11 +29781,11 @@
         <p:spPr>
           <a:xfrm>
             <a:off x="609905" y="2535174"/>
-            <a:ext cx="7818120" cy="2976372"/>
+            <a:ext cx="7818120" cy="3548329"/>
           </a:xfrm>
           <a:prstGeom prst="roundRect">
             <a:avLst>
-              <a:gd name="adj" fmla="val 1843"/>
+              <a:gd name="adj" fmla="val 1546"/>
             </a:avLst>
           </a:prstGeom>
           <a:solidFill>
@@ -28161,7 +29810,7 @@
         <p:spPr>
           <a:xfrm>
             <a:off x="865937" y="2681478"/>
-            <a:ext cx="7315200" cy="2702052"/>
+            <a:ext cx="7315200" cy="3274009"/>
           </a:xfrm>
           <a:prstGeom prst="rect">
             <a:avLst/>
@@ -28191,7 +29840,7 @@
                 <a:ea typeface="Microsoft YaHei" pitchFamily="34" charset="-122"/>
                 <a:cs typeface="Microsoft YaHei" pitchFamily="34" charset="-120"/>
               </a:rPr>
-              <a:t>引入：从分配律推导两个乘法公式。(a+b)(a−b)=a²−b²，推导：展开合并中间两项互为相反数相消；(a+b)²=a²+2ab+b²，推导：按多项式乘法展开共四项、中间两项合并。几何直观：边长 a 的正方形挖去边长 b 的角，重新拼成长 (a+b)、宽 (a−b) 的长方形，面积相等，这就是平方差公式的图形解释。公式认结构不认长相：a、b 可以是数、字母甚至多项式，如 (2x+3y)(2x−3y)=4x²−9y²。</a:t>
+              <a:t>开场口算 102×98，要求 3 秒报答案：把 102 看成 100+2、98 看成 100−2，结果 10000−4=9996。学生惊讶之余追问“凭什么能这么算”，平方差公式就从数感里长了出来。再画边长 a 的正方形挖去边长 b 的角、重新拼成长方形，几何解释当场完成。</a:t>
             </a:r>
             <a:endParaRPr lang="en-US" sz="1350" dirty="0"/>
           </a:p>
@@ -28214,7 +29863,30 @@
                 <a:ea typeface="Microsoft YaHei" pitchFamily="34" charset="-122"/>
                 <a:cs typeface="Microsoft YaHei" pitchFamily="34" charset="-120"/>
               </a:rPr>
-              <a:t>因式分解与整式乘法互为逆变形，方向相反：乘法是合、分解是分。分解步骤口诀“一提二套三查”：先提公因式（每一项都含的系数与字母），再套公式，最后检查每个因式能否继续分解——分解要彻底。示范 3m³−27m：先提 3m 得 m²−9，再套平方差。最高频错误：(a+b)²=a²+b²，漏了中间项 2ab，推导过程再走一遍即可自纠。</a:t>
+              <a:t>公式本体：(a+b)(a−b)=a²−b²，展开后中间两项互为相反数相消；(a+b)²=a²+2ab+b²，由多项式乘法展开四项合并而来。a、b 可以是数、字母甚至多项式，认结构不认长相。因式分解与整式乘法互逆，方向相反：口诀“一提二套三查”——先提公因式，再套公式，最后查每个因式能否继续分解。</a:t>
+            </a:r>
+            <a:endParaRPr lang="en-US" sz="1350" dirty="0"/>
+          </a:p>
+          <a:p>
+            <a:pPr indent="0" marL="0">
+              <a:lnSpc>
+                <a:spcPct val="130000"/>
+              </a:lnSpc>
+              <a:spcAft>
+                <a:spcPts val="1000"/>
+              </a:spcAft>
+              <a:buNone/>
+            </a:pPr>
+            <a:r>
+              <a:rPr lang="en-US" sz="1350" dirty="0">
+                <a:solidFill>
+                  <a:srgbClr val="202D37"/>
+                </a:solidFill>
+                <a:latin typeface="Microsoft YaHei" pitchFamily="34" charset="0"/>
+                <a:ea typeface="Microsoft YaHei" pitchFamily="34" charset="-122"/>
+                <a:cs typeface="Microsoft YaHei" pitchFamily="34" charset="-120"/>
+              </a:rPr>
+              <a:t>高频误区：(a+b)²=a²+b²，漏中间项 2ab——把推导重走一遍即可自纠；分解不彻底，如 x⁴−1 分到 (x²+1)(x²−1) 就停手，而 x²−1 还能套平方差。适用边界：平方差要求“平方减平方”的结构，减号必须有；提公因式要提净——系数取最大公约数、字母取最低次幂，漏提会让后续无法套公式。</a:t>
             </a:r>
             <a:endParaRPr lang="en-US" sz="1350" dirty="0"/>
           </a:p>
@@ -29291,11 +30963,11 @@
         <p:spPr>
           <a:xfrm>
             <a:off x="609905" y="1748790"/>
-            <a:ext cx="10971886" cy="1234440"/>
+            <a:ext cx="10971886" cy="1147801"/>
           </a:xfrm>
           <a:prstGeom prst="roundRect">
             <a:avLst>
-              <a:gd name="adj" fmla="val 4444"/>
+              <a:gd name="adj" fmla="val 4780"/>
             </a:avLst>
           </a:prstGeom>
           <a:solidFill>
@@ -29320,7 +30992,7 @@
         <p:spPr>
           <a:xfrm>
             <a:off x="829361" y="1840230"/>
-            <a:ext cx="10532974" cy="1051560"/>
+            <a:ext cx="10532974" cy="964921"/>
           </a:xfrm>
           <a:prstGeom prst="rect">
             <a:avLst/>
@@ -29373,6 +31045,192 @@
       <p:sp>
         <p:nvSpPr>
           <p:cNvPr id="7" name="Shape 5"/>
+          <p:cNvSpPr/>
+          <p:nvPr/>
+        </p:nvSpPr>
+        <p:spPr>
+          <a:xfrm>
+            <a:off x="609905" y="3042895"/>
+            <a:ext cx="10971886" cy="1147801"/>
+          </a:xfrm>
+          <a:prstGeom prst="roundRect">
+            <a:avLst>
+              <a:gd name="adj" fmla="val 4780"/>
+            </a:avLst>
+          </a:prstGeom>
+          <a:solidFill>
+            <a:srgbClr val="FFFFFF"/>
+          </a:solidFill>
+          <a:ln/>
+          <a:effectLst>
+            <a:outerShdw sx="100000" sy="100000" kx="0" ky="0" algn="bl" rotWithShape="0" blurRad="88900" dist="25400" dir="3600000">
+              <a:srgbClr val="3A3A32">
+                <a:alpha val="16000"/>
+              </a:srgbClr>
+            </a:outerShdw>
+          </a:effectLst>
+        </p:spPr>
+      </p:sp>
+      <p:sp>
+        <p:nvSpPr>
+          <p:cNvPr id="8" name="Text 6"/>
+          <p:cNvSpPr/>
+          <p:nvPr/>
+        </p:nvSpPr>
+        <p:spPr>
+          <a:xfrm>
+            <a:off x="829361" y="3134335"/>
+            <a:ext cx="10532974" cy="964921"/>
+          </a:xfrm>
+          <a:prstGeom prst="rect">
+            <a:avLst/>
+          </a:prstGeom>
+          <a:noFill/>
+          <a:ln/>
+        </p:spPr>
+        <p:txBody>
+          <a:bodyPr wrap="square" lIns="0" tIns="0" rIns="0" bIns="0" rtlCol="0" anchor="ctr"/>
+          <a:lstStyle/>
+          <a:p>
+            <a:pPr indent="0" marL="0">
+              <a:lnSpc>
+                <a:spcPct val="115000"/>
+              </a:lnSpc>
+              <a:buNone/>
+            </a:pPr>
+            <a:r>
+              <a:rPr lang="en-US" sz="1350" b="1" dirty="0">
+                <a:solidFill>
+                  <a:srgbClr val="285C94"/>
+                </a:solidFill>
+                <a:latin typeface="Microsoft YaHei" pitchFamily="34" charset="0"/>
+                <a:ea typeface="Microsoft YaHei" pitchFamily="34" charset="-122"/>
+                <a:cs typeface="Microsoft YaHei" pitchFamily="34" charset="-120"/>
+              </a:rPr>
+              <a:t>练习 2　</a:t>
+            </a:r>
+            <a:pPr indent="0" marL="0">
+              <a:lnSpc>
+                <a:spcPct val="115000"/>
+              </a:lnSpc>
+              <a:buNone/>
+            </a:pPr>
+            <a:r>
+              <a:rPr lang="en-US" sz="1400" dirty="0">
+                <a:solidFill>
+                  <a:srgbClr val="202D37"/>
+                </a:solidFill>
+                <a:latin typeface="Microsoft YaHei" pitchFamily="34" charset="0"/>
+                <a:ea typeface="Microsoft YaHei" pitchFamily="34" charset="-122"/>
+                <a:cs typeface="Microsoft YaHei" pitchFamily="34" charset="-120"/>
+              </a:rPr>
+              <a:t>分解因式：(x+y)² − 4(x+y) + 4。</a:t>
+            </a:r>
+            <a:endParaRPr lang="en-US" sz="1350" dirty="0"/>
+          </a:p>
+        </p:txBody>
+      </p:sp>
+      <p:sp>
+        <p:nvSpPr>
+          <p:cNvPr id="9" name="Shape 7"/>
+          <p:cNvSpPr/>
+          <p:nvPr/>
+        </p:nvSpPr>
+        <p:spPr>
+          <a:xfrm>
+            <a:off x="609905" y="4949647"/>
+            <a:ext cx="10971886" cy="585216"/>
+          </a:xfrm>
+          <a:prstGeom prst="roundRect">
+            <a:avLst>
+              <a:gd name="adj" fmla="val 7813"/>
+            </a:avLst>
+          </a:prstGeom>
+          <a:solidFill>
+            <a:srgbClr val="F2E3DC"/>
+          </a:solidFill>
+          <a:ln/>
+        </p:spPr>
+      </p:sp>
+      <p:sp>
+        <p:nvSpPr>
+          <p:cNvPr id="10" name="Text 8"/>
+          <p:cNvSpPr/>
+          <p:nvPr/>
+        </p:nvSpPr>
+        <p:spPr>
+          <a:xfrm>
+            <a:off x="811073" y="5004511"/>
+            <a:ext cx="10569550" cy="493776"/>
+          </a:xfrm>
+          <a:prstGeom prst="rect">
+            <a:avLst/>
+          </a:prstGeom>
+          <a:noFill/>
+          <a:ln/>
+        </p:spPr>
+        <p:txBody>
+          <a:bodyPr wrap="square" lIns="0" tIns="0" rIns="0" bIns="0" rtlCol="0" anchor="ctr"/>
+          <a:lstStyle/>
+          <a:p>
+            <a:pPr indent="0" marL="0">
+              <a:lnSpc>
+                <a:spcPct val="110000"/>
+              </a:lnSpc>
+              <a:buNone/>
+            </a:pPr>
+            <a:r>
+              <a:rPr lang="en-US" sz="1250" b="1" dirty="0">
+                <a:solidFill>
+                  <a:srgbClr val="B45F47"/>
+                </a:solidFill>
+                <a:latin typeface="Microsoft YaHei" pitchFamily="34" charset="0"/>
+                <a:ea typeface="Microsoft YaHei" pitchFamily="34" charset="-122"/>
+                <a:cs typeface="Microsoft YaHei" pitchFamily="34" charset="-120"/>
+              </a:rPr>
+              <a:t>变式挑战（选做）　</a:t>
+            </a:r>
+            <a:pPr indent="0" marL="0">
+              <a:lnSpc>
+                <a:spcPct val="110000"/>
+              </a:lnSpc>
+              <a:buNone/>
+            </a:pPr>
+            <a:r>
+              <a:rPr lang="en-US" sz="1250" dirty="0">
+                <a:solidFill>
+                  <a:srgbClr val="202D37"/>
+                </a:solidFill>
+                <a:latin typeface="Microsoft YaHei" pitchFamily="34" charset="0"/>
+                <a:ea typeface="Microsoft YaHei" pitchFamily="34" charset="-122"/>
+                <a:cs typeface="Microsoft YaHei" pitchFamily="34" charset="-120"/>
+              </a:rPr>
+              <a:t>分解因式：2x² − 18。</a:t>
+            </a:r>
+            <a:pPr indent="0" marL="0">
+              <a:lnSpc>
+                <a:spcPct val="110000"/>
+              </a:lnSpc>
+              <a:buNone/>
+            </a:pPr>
+            <a:r>
+              <a:rPr lang="en-US" sz="1150" dirty="0">
+                <a:solidFill>
+                  <a:srgbClr val="6E7B85"/>
+                </a:solidFill>
+                <a:latin typeface="Microsoft YaHei" pitchFamily="34" charset="0"/>
+                <a:ea typeface="Microsoft YaHei" pitchFamily="34" charset="-122"/>
+                <a:cs typeface="Microsoft YaHei" pitchFamily="34" charset="-120"/>
+              </a:rPr>
+              <a:t>　提示：先提公因式 2，看剩下的 x²−9 是不是“平方减平方”结构。</a:t>
+            </a:r>
+            <a:endParaRPr lang="en-US" sz="1250" dirty="0"/>
+          </a:p>
+        </p:txBody>
+      </p:sp>
+      <p:sp>
+        <p:nvSpPr>
+          <p:cNvPr id="11" name="Shape 9"/>
           <p:cNvSpPr/>
           <p:nvPr/>
         </p:nvSpPr>
@@ -29394,7 +31252,7 @@
       </p:sp>
       <p:sp>
         <p:nvSpPr>
-          <p:cNvPr id="8" name="Text 6"/>
+          <p:cNvPr id="12" name="Text 10"/>
           <p:cNvSpPr/>
           <p:nvPr/>
         </p:nvSpPr>
@@ -29433,7 +31291,7 @@
       </p:sp>
       <p:sp>
         <p:nvSpPr>
-          <p:cNvPr id="9" name="Text 7"/>
+          <p:cNvPr id="13" name="Text 11"/>
           <p:cNvSpPr/>
           <p:nvPr/>
         </p:nvSpPr>
@@ -30400,11 +32258,11 @@
         <p:spPr>
           <a:xfrm>
             <a:off x="609905" y="2535174"/>
-            <a:ext cx="7818120" cy="2750058"/>
+            <a:ext cx="7818120" cy="3548329"/>
           </a:xfrm>
           <a:prstGeom prst="roundRect">
             <a:avLst>
-              <a:gd name="adj" fmla="val 1995"/>
+              <a:gd name="adj" fmla="val 1546"/>
             </a:avLst>
           </a:prstGeom>
           <a:solidFill>
@@ -30429,7 +32287,7 @@
         <p:spPr>
           <a:xfrm>
             <a:off x="865937" y="2681478"/>
-            <a:ext cx="7315200" cy="2475738"/>
+            <a:ext cx="7315200" cy="3274009"/>
           </a:xfrm>
           <a:prstGeom prst="rect">
             <a:avLst/>
@@ -30459,7 +32317,7 @@
                 <a:ea typeface="Microsoft YaHei" pitchFamily="34" charset="-122"/>
                 <a:cs typeface="Microsoft YaHei" pitchFamily="34" charset="-120"/>
               </a:rPr>
-              <a:t>先看一组相反意义的量：收入 5 元记作 +5，支出 3 元记作 −3。像这样为了表示“具有相反意义的量”，我们把数系从正数和 0 扩张到负数——0 既不是正数也不是负数，它是分界点。把所有数排到一条直线上：规定原点、正方向、单位长度，这就是数轴三要素，缺一不可；数轴让“数”变成“点”，大小关系一眼看出，越往右越大。</a:t>
+              <a:t>先看一组相反意义的量：收入 5 元记作 +5，支出 3 元记作 −3。像这样为了表示具有相反意义的量，我们把数系从正数和 0 扩张到负数——0 既不是正数也不是负数，它是正负的分界点。把所有数排到规定了原点、正方向、单位长度的直线上，数轴就建成了：数变成了点，越往右越大，大小关系一眼看出。</a:t>
             </a:r>
             <a:endParaRPr lang="en-US" sz="1350" dirty="0"/>
           </a:p>
@@ -30482,7 +32340,30 @@
                 <a:ea typeface="Microsoft YaHei" pitchFamily="34" charset="-122"/>
                 <a:cs typeface="Microsoft YaHei" pitchFamily="34" charset="-120"/>
               </a:rPr>
-              <a:t>绝对值不要背成“去掉负号”，它的本义是距离：数轴上表示一个数的点到原点的距离叫这个数的绝对值。所以 |−3|=3、|3|=3、|0|=0，距离不可能为负。由此得出比较法则：正数都大于 0，负数都小于 0，两个负数比较大小，绝对值大的反而小——因为在原点左边，离原点越远就越靠左、越小。常见错误是把 −3² 当成 (−3)²，这是下一节乘方要重点区分的。</a:t>
+              <a:t>绝对值的本义是距离：数轴上表示一个数的点到原点的距离，叫这个数的绝对值。所以 |−3|=3、|3|=3、|0|=0，距离不可能为负，这叫绝对值的非负性。由数轴上的位置推出比较法则：正数都大于 0，负数都小于 0；两个负数比较大小，绝对值大的反而小——原点左侧，离原点越远越靠左，数就越小。</a:t>
+            </a:r>
+            <a:endParaRPr lang="en-US" sz="1350" dirty="0"/>
+          </a:p>
+          <a:p>
+            <a:pPr indent="0" marL="0">
+              <a:lnSpc>
+                <a:spcPct val="130000"/>
+              </a:lnSpc>
+              <a:spcAft>
+                <a:spcPts val="1000"/>
+              </a:spcAft>
+              <a:buNone/>
+            </a:pPr>
+            <a:r>
+              <a:rPr lang="en-US" sz="1350" dirty="0">
+                <a:solidFill>
+                  <a:srgbClr val="202D37"/>
+                </a:solidFill>
+                <a:latin typeface="Microsoft YaHei" pitchFamily="34" charset="0"/>
+                <a:ea typeface="Microsoft YaHei" pitchFamily="34" charset="-122"/>
+                <a:cs typeface="Microsoft YaHei" pitchFamily="34" charset="-120"/>
+              </a:rPr>
+              <a:t>高频错误有三类，逐一纠正：把绝对值当成“去掉负号”，遇到 |5−7| 这类先算括号内、再求距离就不会错；以为 0 没有相反数（0 的相反数是 0）；给有理数分类时漏掉 0——按“正数、负数、零”或“整数、分数”两套标准逐栏数，才能不重不漏。绝对值的一切应用都要回到“数轴上的距离”这个本源。</a:t>
             </a:r>
             <a:endParaRPr lang="en-US" sz="1350" dirty="0"/>
           </a:p>
@@ -31414,11 +33295,11 @@
         <p:spPr>
           <a:xfrm>
             <a:off x="609905" y="2535174"/>
-            <a:ext cx="7818120" cy="2750058"/>
+            <a:ext cx="7818120" cy="3548329"/>
           </a:xfrm>
           <a:prstGeom prst="roundRect">
             <a:avLst>
-              <a:gd name="adj" fmla="val 1995"/>
+              <a:gd name="adj" fmla="val 1546"/>
             </a:avLst>
           </a:prstGeom>
           <a:solidFill>
@@ -31443,7 +33324,7 @@
         <p:spPr>
           <a:xfrm>
             <a:off x="865937" y="2681478"/>
-            <a:ext cx="7315200" cy="2475738"/>
+            <a:ext cx="7315200" cy="3274009"/>
           </a:xfrm>
           <a:prstGeom prst="rect">
             <a:avLst/>
@@ -31473,7 +33354,7 @@
                 <a:ea typeface="Microsoft YaHei" pitchFamily="34" charset="-122"/>
                 <a:cs typeface="Microsoft YaHei" pitchFamily="34" charset="-120"/>
               </a:rPr>
-              <a:t>引入：分母中含有字母的方程叫分式方程。解法是“去分母化整”：两边同乘最简公分母，依据是分式的基本性质与等式性质 2。最简公分母取各分母系数的最小公倍数与所有因式最高次幂的积，如 1/(x−1) 与 2/(x+1) 的公分母是 (x−1)(x+1)。化成整式方程后按移项、合并、系数化为 1 求解。</a:t>
+              <a:t>开场对比设疑：解整式方程 x+1=2 从不检验，解分式方程却必须验根——差别只在分母。让学生先解 1/(x−1)=2/(x+1)，有的同学会解出一个看似合理、却使分母为 0 的“假根”，抓住它展开全节。再口算 √((−3)²)，多数人脱口而出 −3，又是一坑，两坑一起填。</a:t>
             </a:r>
             <a:endParaRPr lang="en-US" sz="1350" dirty="0"/>
           </a:p>
@@ -31496,7 +33377,30 @@
                 <a:ea typeface="Microsoft YaHei" pitchFamily="34" charset="-122"/>
                 <a:cs typeface="Microsoft YaHei" pitchFamily="34" charset="-120"/>
               </a:rPr>
-              <a:t>为什么必须验根：去分母时对两边同乘了含未知数的式子，若求出的根恰好使公分母为 0，相当于两边乘了 0，方程被“放大”了，这个根不是原方程的解，叫增根——增根是变形过程的副产品，不是计算错。验根两步：代入最简公分母看是否为 0，再代回原方程看左右是否相等。二次根式部分同步掌握最简二次根式两条件：被开方数不含分母、不含能开尽方的因数。误区：√(a²) 直接等于 a，正确结论是 √(a²)=|a|，须讨论 a 的符号。</a:t>
+              <a:t>解法本体：两边同乘最简公分母去分母化整，依据是分式基本性质与等式性质 2；公分母取各分母系数的最小公倍数与所有因式最高次幂的积。化整后按移项、合并、系数化为 1 求解；验根两步：代公分母看是否为 0，再代回原方程看左右是否相等。最简二次根式两条件：被开方数不含分母、不含能开尽方的因数。</a:t>
+            </a:r>
+            <a:endParaRPr lang="en-US" sz="1350" dirty="0"/>
+          </a:p>
+          <a:p>
+            <a:pPr indent="0" marL="0">
+              <a:lnSpc>
+                <a:spcPct val="130000"/>
+              </a:lnSpc>
+              <a:spcAft>
+                <a:spcPts val="1000"/>
+              </a:spcAft>
+              <a:buNone/>
+            </a:pPr>
+            <a:r>
+              <a:rPr lang="en-US" sz="1350" dirty="0">
+                <a:solidFill>
+                  <a:srgbClr val="202D37"/>
+                </a:solidFill>
+                <a:latin typeface="Microsoft YaHei" pitchFamily="34" charset="0"/>
+                <a:ea typeface="Microsoft YaHei" pitchFamily="34" charset="-122"/>
+                <a:cs typeface="Microsoft YaHei" pitchFamily="34" charset="-120"/>
+              </a:rPr>
+              <a:t>高频误区：增根是去分母时“两边同乘了 0”的副产品，不是计算错，但必须舍去；√(a²)=|a| 不能直接写 a，符号要讨论。适用边界：验根是分式方程的必要步骤，缺检验整题扣分；√(a²) 的讨论只对被开方数为非负数有意义——负数开偶次方在实数范围内无意义，先看范围再化简。</a:t>
             </a:r>
             <a:endParaRPr lang="en-US" sz="1350" dirty="0"/>
           </a:p>
@@ -32573,11 +34477,11 @@
         <p:spPr>
           <a:xfrm>
             <a:off x="609905" y="1748790"/>
-            <a:ext cx="10971886" cy="1234440"/>
+            <a:ext cx="10971886" cy="1147801"/>
           </a:xfrm>
           <a:prstGeom prst="roundRect">
             <a:avLst>
-              <a:gd name="adj" fmla="val 4444"/>
+              <a:gd name="adj" fmla="val 4780"/>
             </a:avLst>
           </a:prstGeom>
           <a:solidFill>
@@ -32602,7 +34506,7 @@
         <p:spPr>
           <a:xfrm>
             <a:off x="829361" y="1840230"/>
-            <a:ext cx="10532974" cy="1051560"/>
+            <a:ext cx="10532974" cy="964921"/>
           </a:xfrm>
           <a:prstGeom prst="rect">
             <a:avLst/>
@@ -32655,6 +34559,192 @@
       <p:sp>
         <p:nvSpPr>
           <p:cNvPr id="7" name="Shape 5"/>
+          <p:cNvSpPr/>
+          <p:nvPr/>
+        </p:nvSpPr>
+        <p:spPr>
+          <a:xfrm>
+            <a:off x="609905" y="3042895"/>
+            <a:ext cx="10971886" cy="1147801"/>
+          </a:xfrm>
+          <a:prstGeom prst="roundRect">
+            <a:avLst>
+              <a:gd name="adj" fmla="val 4780"/>
+            </a:avLst>
+          </a:prstGeom>
+          <a:solidFill>
+            <a:srgbClr val="FFFFFF"/>
+          </a:solidFill>
+          <a:ln/>
+          <a:effectLst>
+            <a:outerShdw sx="100000" sy="100000" kx="0" ky="0" algn="bl" rotWithShape="0" blurRad="88900" dist="25400" dir="3600000">
+              <a:srgbClr val="3A3A32">
+                <a:alpha val="16000"/>
+              </a:srgbClr>
+            </a:outerShdw>
+          </a:effectLst>
+        </p:spPr>
+      </p:sp>
+      <p:sp>
+        <p:nvSpPr>
+          <p:cNvPr id="8" name="Text 6"/>
+          <p:cNvSpPr/>
+          <p:nvPr/>
+        </p:nvSpPr>
+        <p:spPr>
+          <a:xfrm>
+            <a:off x="829361" y="3134335"/>
+            <a:ext cx="10532974" cy="964921"/>
+          </a:xfrm>
+          <a:prstGeom prst="rect">
+            <a:avLst/>
+          </a:prstGeom>
+          <a:noFill/>
+          <a:ln/>
+        </p:spPr>
+        <p:txBody>
+          <a:bodyPr wrap="square" lIns="0" tIns="0" rIns="0" bIns="0" rtlCol="0" anchor="ctr"/>
+          <a:lstStyle/>
+          <a:p>
+            <a:pPr indent="0" marL="0">
+              <a:lnSpc>
+                <a:spcPct val="115000"/>
+              </a:lnSpc>
+              <a:buNone/>
+            </a:pPr>
+            <a:r>
+              <a:rPr lang="en-US" sz="1350" b="1" dirty="0">
+                <a:solidFill>
+                  <a:srgbClr val="285C94"/>
+                </a:solidFill>
+                <a:latin typeface="Microsoft YaHei" pitchFamily="34" charset="0"/>
+                <a:ea typeface="Microsoft YaHei" pitchFamily="34" charset="-122"/>
+                <a:cs typeface="Microsoft YaHei" pitchFamily="34" charset="-120"/>
+              </a:rPr>
+              <a:t>练习 2　</a:t>
+            </a:r>
+            <a:pPr indent="0" marL="0">
+              <a:lnSpc>
+                <a:spcPct val="115000"/>
+              </a:lnSpc>
+              <a:buNone/>
+            </a:pPr>
+            <a:r>
+              <a:rPr lang="en-US" sz="1400" dirty="0">
+                <a:solidFill>
+                  <a:srgbClr val="202D37"/>
+                </a:solidFill>
+                <a:latin typeface="Microsoft YaHei" pitchFamily="34" charset="0"/>
+                <a:ea typeface="Microsoft YaHei" pitchFamily="34" charset="-122"/>
+                <a:cs typeface="Microsoft YaHei" pitchFamily="34" charset="-120"/>
+              </a:rPr>
+              <a:t>解分式方程：x/(x−2) − 2 = 2/(x−2)，并写出完整检验。</a:t>
+            </a:r>
+            <a:endParaRPr lang="en-US" sz="1350" dirty="0"/>
+          </a:p>
+        </p:txBody>
+      </p:sp>
+      <p:sp>
+        <p:nvSpPr>
+          <p:cNvPr id="9" name="Shape 7"/>
+          <p:cNvSpPr/>
+          <p:nvPr/>
+        </p:nvSpPr>
+        <p:spPr>
+          <a:xfrm>
+            <a:off x="609905" y="4949647"/>
+            <a:ext cx="10971886" cy="585216"/>
+          </a:xfrm>
+          <a:prstGeom prst="roundRect">
+            <a:avLst>
+              <a:gd name="adj" fmla="val 7813"/>
+            </a:avLst>
+          </a:prstGeom>
+          <a:solidFill>
+            <a:srgbClr val="F2E3DC"/>
+          </a:solidFill>
+          <a:ln/>
+        </p:spPr>
+      </p:sp>
+      <p:sp>
+        <p:nvSpPr>
+          <p:cNvPr id="10" name="Text 8"/>
+          <p:cNvSpPr/>
+          <p:nvPr/>
+        </p:nvSpPr>
+        <p:spPr>
+          <a:xfrm>
+            <a:off x="811073" y="5004511"/>
+            <a:ext cx="10569550" cy="493776"/>
+          </a:xfrm>
+          <a:prstGeom prst="rect">
+            <a:avLst/>
+          </a:prstGeom>
+          <a:noFill/>
+          <a:ln/>
+        </p:spPr>
+        <p:txBody>
+          <a:bodyPr wrap="square" lIns="0" tIns="0" rIns="0" bIns="0" rtlCol="0" anchor="ctr"/>
+          <a:lstStyle/>
+          <a:p>
+            <a:pPr indent="0" marL="0">
+              <a:lnSpc>
+                <a:spcPct val="110000"/>
+              </a:lnSpc>
+              <a:buNone/>
+            </a:pPr>
+            <a:r>
+              <a:rPr lang="en-US" sz="1250" b="1" dirty="0">
+                <a:solidFill>
+                  <a:srgbClr val="B45F47"/>
+                </a:solidFill>
+                <a:latin typeface="Microsoft YaHei" pitchFamily="34" charset="0"/>
+                <a:ea typeface="Microsoft YaHei" pitchFamily="34" charset="-122"/>
+                <a:cs typeface="Microsoft YaHei" pitchFamily="34" charset="-120"/>
+              </a:rPr>
+              <a:t>变式挑战（选做）　</a:t>
+            </a:r>
+            <a:pPr indent="0" marL="0">
+              <a:lnSpc>
+                <a:spcPct val="110000"/>
+              </a:lnSpc>
+              <a:buNone/>
+            </a:pPr>
+            <a:r>
+              <a:rPr lang="en-US" sz="1250" dirty="0">
+                <a:solidFill>
+                  <a:srgbClr val="202D37"/>
+                </a:solidFill>
+                <a:latin typeface="Microsoft YaHei" pitchFamily="34" charset="0"/>
+                <a:ea typeface="Microsoft YaHei" pitchFamily="34" charset="-122"/>
+                <a:cs typeface="Microsoft YaHei" pitchFamily="34" charset="-120"/>
+              </a:rPr>
+              <a:t>解分式方程：3/(x+2) = 2/(x−1)。</a:t>
+            </a:r>
+            <a:pPr indent="0" marL="0">
+              <a:lnSpc>
+                <a:spcPct val="110000"/>
+              </a:lnSpc>
+              <a:buNone/>
+            </a:pPr>
+            <a:r>
+              <a:rPr lang="en-US" sz="1150" dirty="0">
+                <a:solidFill>
+                  <a:srgbClr val="6E7B85"/>
+                </a:solidFill>
+                <a:latin typeface="Microsoft YaHei" pitchFamily="34" charset="0"/>
+                <a:ea typeface="Microsoft YaHei" pitchFamily="34" charset="-122"/>
+                <a:cs typeface="Microsoft YaHei" pitchFamily="34" charset="-120"/>
+              </a:rPr>
+              <a:t>　提示：最简公分母是 (x+2)(x−1)，去分母化成整式方程；解完必须双步检验。</a:t>
+            </a:r>
+            <a:endParaRPr lang="en-US" sz="1250" dirty="0"/>
+          </a:p>
+        </p:txBody>
+      </p:sp>
+      <p:sp>
+        <p:nvSpPr>
+          <p:cNvPr id="11" name="Shape 9"/>
           <p:cNvSpPr/>
           <p:nvPr/>
         </p:nvSpPr>
@@ -32676,7 +34766,7 @@
       </p:sp>
       <p:sp>
         <p:nvSpPr>
-          <p:cNvPr id="8" name="Text 6"/>
+          <p:cNvPr id="12" name="Text 10"/>
           <p:cNvSpPr/>
           <p:nvPr/>
         </p:nvSpPr>
@@ -32715,7 +34805,7 @@
       </p:sp>
       <p:sp>
         <p:nvSpPr>
-          <p:cNvPr id="9" name="Text 7"/>
+          <p:cNvPr id="13" name="Text 11"/>
           <p:cNvSpPr/>
           <p:nvPr/>
         </p:nvSpPr>
@@ -32972,11 +35062,11 @@
         <p:spPr>
           <a:xfrm>
             <a:off x="609905" y="2535174"/>
-            <a:ext cx="7818120" cy="2976372"/>
+            <a:ext cx="7818120" cy="3330702"/>
           </a:xfrm>
           <a:prstGeom prst="roundRect">
             <a:avLst>
-              <a:gd name="adj" fmla="val 1843"/>
+              <a:gd name="adj" fmla="val 1647"/>
             </a:avLst>
           </a:prstGeom>
           <a:solidFill>
@@ -33001,7 +35091,7 @@
         <p:spPr>
           <a:xfrm>
             <a:off x="865937" y="2681478"/>
-            <a:ext cx="7315200" cy="2702052"/>
+            <a:ext cx="7315200" cy="3056382"/>
           </a:xfrm>
           <a:prstGeom prst="rect">
             <a:avLst/>
@@ -33031,7 +35121,7 @@
                 <a:ea typeface="Microsoft YaHei" pitchFamily="34" charset="-122"/>
                 <a:cs typeface="Microsoft YaHei" pitchFamily="34" charset="-120"/>
               </a:rPr>
-              <a:t>引入待定系数法：一次函数 y=kx+b（k≠0）里有两个待定系数，图象上每个点都满足解析式，所以已知两点即可列二元一次方程组求出 k、b——先设式、再代入、后解组，三步定型。推导 k、b 的图象语言：k 决定升降，k＞0 直线上升（y 随 x 增大而增大），k＜0 下降；b 决定与 y 轴的交点 (0, b)，也叫截距。|k| 越大直线越陡。</a:t>
+              <a:t>开场给两道谜题：只知道直线经过 (1,3) 和 (−1,−1) 两个点，能把整条直线“还原”吗？再出示两家的租车价目表，问行驶多少公里时费用相同——第一题练待定系数法，第二题练方案比较，本节两条主线同时上路，学生带着任务学。</a:t>
             </a:r>
             <a:endParaRPr lang="en-US" sz="1350" dirty="0"/>
           </a:p>
@@ -33054,7 +35144,30 @@
                 <a:ea typeface="Microsoft YaHei" pitchFamily="34" charset="-122"/>
                 <a:cs typeface="Microsoft YaHei" pitchFamily="34" charset="-120"/>
               </a:rPr>
-              <a:t>应用题常用方案比较：两家的收费都写成一次函数，找“分段点”——令两个函数值相等解出 x，这一点前后谁更省钱发生对调，画两条直线交点即直观呈现。提醒三件事：自变量取实际范围（时间、件数非负）；k 的正负号与题意（每增加一件多收还是优惠）要对应；答复杂问题时在交点处比较后再下结论。误区：把 k 的意义记反、忘记 b 是 x=0 时的函数值。</a:t>
+              <a:t>本体：一次函数 y=kx+b（k≠0）有两个待定系数，图象上每个点的坐标都满足解析式，两点即可列二元一次方程组求出 k、b——设、代、解三步定型。图象语言：k 定升降（k＞0 上升、k＜0 下降），b 定 y 轴交点 (0, b)，|k| 越大直线越陡。方案比较：令两函数值相等解出分段点，交点前后“谁更省”发生对调。</a:t>
+            </a:r>
+            <a:endParaRPr lang="en-US" sz="1350" dirty="0"/>
+          </a:p>
+          <a:p>
+            <a:pPr indent="0" marL="0">
+              <a:lnSpc>
+                <a:spcPct val="130000"/>
+              </a:lnSpc>
+              <a:spcAft>
+                <a:spcPts val="1000"/>
+              </a:spcAft>
+              <a:buNone/>
+            </a:pPr>
+            <a:r>
+              <a:rPr lang="en-US" sz="1350" dirty="0">
+                <a:solidFill>
+                  <a:srgbClr val="202D37"/>
+                </a:solidFill>
+                <a:latin typeface="Microsoft YaHei" pitchFamily="34" charset="0"/>
+                <a:ea typeface="Microsoft YaHei" pitchFamily="34" charset="-122"/>
+                <a:cs typeface="Microsoft YaHei" pitchFamily="34" charset="-120"/>
+              </a:rPr>
+              <a:t>高频误区：k 的意义记反（k＞0 是上升不是下降）；把 b 当成直线与 x 轴的交点（b 是 x=0 时的函数值）。适用边界：待定系数法求出的解析式必须把两点代回检验；应用题要写自变量的实际范围（时间、件数非负），方案比较的结论要按“分段点前后”分别表述，不能一句话笼统作答。</a:t>
             </a:r>
             <a:endParaRPr lang="en-US" sz="1350" dirty="0"/>
           </a:p>
@@ -34232,11 +36345,11 @@
         <p:spPr>
           <a:xfrm>
             <a:off x="609905" y="1748790"/>
-            <a:ext cx="10971886" cy="1234440"/>
+            <a:ext cx="10971886" cy="1147801"/>
           </a:xfrm>
           <a:prstGeom prst="roundRect">
             <a:avLst>
-              <a:gd name="adj" fmla="val 4444"/>
+              <a:gd name="adj" fmla="val 4780"/>
             </a:avLst>
           </a:prstGeom>
           <a:solidFill>
@@ -34261,7 +36374,7 @@
         <p:spPr>
           <a:xfrm>
             <a:off x="829361" y="1840230"/>
-            <a:ext cx="10532974" cy="1051560"/>
+            <a:ext cx="10532974" cy="964921"/>
           </a:xfrm>
           <a:prstGeom prst="rect">
             <a:avLst/>
@@ -34314,6 +36427,192 @@
       <p:sp>
         <p:nvSpPr>
           <p:cNvPr id="7" name="Shape 5"/>
+          <p:cNvSpPr/>
+          <p:nvPr/>
+        </p:nvSpPr>
+        <p:spPr>
+          <a:xfrm>
+            <a:off x="609905" y="3042895"/>
+            <a:ext cx="10971886" cy="1147801"/>
+          </a:xfrm>
+          <a:prstGeom prst="roundRect">
+            <a:avLst>
+              <a:gd name="adj" fmla="val 4780"/>
+            </a:avLst>
+          </a:prstGeom>
+          <a:solidFill>
+            <a:srgbClr val="FFFFFF"/>
+          </a:solidFill>
+          <a:ln/>
+          <a:effectLst>
+            <a:outerShdw sx="100000" sy="100000" kx="0" ky="0" algn="bl" rotWithShape="0" blurRad="88900" dist="25400" dir="3600000">
+              <a:srgbClr val="3A3A32">
+                <a:alpha val="16000"/>
+              </a:srgbClr>
+            </a:outerShdw>
+          </a:effectLst>
+        </p:spPr>
+      </p:sp>
+      <p:sp>
+        <p:nvSpPr>
+          <p:cNvPr id="8" name="Text 6"/>
+          <p:cNvSpPr/>
+          <p:nvPr/>
+        </p:nvSpPr>
+        <p:spPr>
+          <a:xfrm>
+            <a:off x="829361" y="3134335"/>
+            <a:ext cx="10532974" cy="964921"/>
+          </a:xfrm>
+          <a:prstGeom prst="rect">
+            <a:avLst/>
+          </a:prstGeom>
+          <a:noFill/>
+          <a:ln/>
+        </p:spPr>
+        <p:txBody>
+          <a:bodyPr wrap="square" lIns="0" tIns="0" rIns="0" bIns="0" rtlCol="0" anchor="ctr"/>
+          <a:lstStyle/>
+          <a:p>
+            <a:pPr indent="0" marL="0">
+              <a:lnSpc>
+                <a:spcPct val="115000"/>
+              </a:lnSpc>
+              <a:buNone/>
+            </a:pPr>
+            <a:r>
+              <a:rPr lang="en-US" sz="1350" b="1" dirty="0">
+                <a:solidFill>
+                  <a:srgbClr val="285C94"/>
+                </a:solidFill>
+                <a:latin typeface="Microsoft YaHei" pitchFamily="34" charset="0"/>
+                <a:ea typeface="Microsoft YaHei" pitchFamily="34" charset="-122"/>
+                <a:cs typeface="Microsoft YaHei" pitchFamily="34" charset="-120"/>
+              </a:rPr>
+              <a:t>练习 2　</a:t>
+            </a:r>
+            <a:pPr indent="0" marL="0">
+              <a:lnSpc>
+                <a:spcPct val="115000"/>
+              </a:lnSpc>
+              <a:buNone/>
+            </a:pPr>
+            <a:r>
+              <a:rPr lang="en-US" sz="1400" dirty="0">
+                <a:solidFill>
+                  <a:srgbClr val="202D37"/>
+                </a:solidFill>
+                <a:latin typeface="Microsoft YaHei" pitchFamily="34" charset="0"/>
+                <a:ea typeface="Microsoft YaHei" pitchFamily="34" charset="-122"/>
+                <a:cs typeface="Microsoft YaHei" pitchFamily="34" charset="-120"/>
+              </a:rPr>
+              <a:t>A、B 两家租车公司收费：A 公司每天 200 元，另按每公里 2 元计费；B 公司每天 300 元，另按每公里 1 元计费。日行驶多少公里时两家费用相同？少于这个数选哪家更省？</a:t>
+            </a:r>
+            <a:endParaRPr lang="en-US" sz="1350" dirty="0"/>
+          </a:p>
+        </p:txBody>
+      </p:sp>
+      <p:sp>
+        <p:nvSpPr>
+          <p:cNvPr id="9" name="Shape 7"/>
+          <p:cNvSpPr/>
+          <p:nvPr/>
+        </p:nvSpPr>
+        <p:spPr>
+          <a:xfrm>
+            <a:off x="609905" y="4949647"/>
+            <a:ext cx="10971886" cy="585216"/>
+          </a:xfrm>
+          <a:prstGeom prst="roundRect">
+            <a:avLst>
+              <a:gd name="adj" fmla="val 7813"/>
+            </a:avLst>
+          </a:prstGeom>
+          <a:solidFill>
+            <a:srgbClr val="F2E3DC"/>
+          </a:solidFill>
+          <a:ln/>
+        </p:spPr>
+      </p:sp>
+      <p:sp>
+        <p:nvSpPr>
+          <p:cNvPr id="10" name="Text 8"/>
+          <p:cNvSpPr/>
+          <p:nvPr/>
+        </p:nvSpPr>
+        <p:spPr>
+          <a:xfrm>
+            <a:off x="811073" y="5004511"/>
+            <a:ext cx="10569550" cy="493776"/>
+          </a:xfrm>
+          <a:prstGeom prst="rect">
+            <a:avLst/>
+          </a:prstGeom>
+          <a:noFill/>
+          <a:ln/>
+        </p:spPr>
+        <p:txBody>
+          <a:bodyPr wrap="square" lIns="0" tIns="0" rIns="0" bIns="0" rtlCol="0" anchor="ctr"/>
+          <a:lstStyle/>
+          <a:p>
+            <a:pPr indent="0" marL="0">
+              <a:lnSpc>
+                <a:spcPct val="110000"/>
+              </a:lnSpc>
+              <a:buNone/>
+            </a:pPr>
+            <a:r>
+              <a:rPr lang="en-US" sz="1250" b="1" dirty="0">
+                <a:solidFill>
+                  <a:srgbClr val="B45F47"/>
+                </a:solidFill>
+                <a:latin typeface="Microsoft YaHei" pitchFamily="34" charset="0"/>
+                <a:ea typeface="Microsoft YaHei" pitchFamily="34" charset="-122"/>
+                <a:cs typeface="Microsoft YaHei" pitchFamily="34" charset="-120"/>
+              </a:rPr>
+              <a:t>变式挑战（选做）　</a:t>
+            </a:r>
+            <a:pPr indent="0" marL="0">
+              <a:lnSpc>
+                <a:spcPct val="110000"/>
+              </a:lnSpc>
+              <a:buNone/>
+            </a:pPr>
+            <a:r>
+              <a:rPr lang="en-US" sz="1250" dirty="0">
+                <a:solidFill>
+                  <a:srgbClr val="202D37"/>
+                </a:solidFill>
+                <a:latin typeface="Microsoft YaHei" pitchFamily="34" charset="0"/>
+                <a:ea typeface="Microsoft YaHei" pitchFamily="34" charset="-122"/>
+                <a:cs typeface="Microsoft YaHei" pitchFamily="34" charset="-120"/>
+              </a:rPr>
+              <a:t>一次函数的图象经过点 (2, 1) 和 (−2, −3)，求这个一次函数的解析式。</a:t>
+            </a:r>
+            <a:pPr indent="0" marL="0">
+              <a:lnSpc>
+                <a:spcPct val="110000"/>
+              </a:lnSpc>
+              <a:buNone/>
+            </a:pPr>
+            <a:r>
+              <a:rPr lang="en-US" sz="1150" dirty="0">
+                <a:solidFill>
+                  <a:srgbClr val="6E7B85"/>
+                </a:solidFill>
+                <a:latin typeface="Microsoft YaHei" pitchFamily="34" charset="0"/>
+                <a:ea typeface="Microsoft YaHei" pitchFamily="34" charset="-122"/>
+                <a:cs typeface="Microsoft YaHei" pitchFamily="34" charset="-120"/>
+              </a:rPr>
+              <a:t>　提示：设 y=kx+b，两点代入得两个方程；先两式相加消去 k 求 b。</a:t>
+            </a:r>
+            <a:endParaRPr lang="en-US" sz="1250" dirty="0"/>
+          </a:p>
+        </p:txBody>
+      </p:sp>
+      <p:sp>
+        <p:nvSpPr>
+          <p:cNvPr id="11" name="Shape 9"/>
           <p:cNvSpPr/>
           <p:nvPr/>
         </p:nvSpPr>
@@ -34335,7 +36634,7 @@
       </p:sp>
       <p:sp>
         <p:nvSpPr>
-          <p:cNvPr id="8" name="Text 6"/>
+          <p:cNvPr id="12" name="Text 10"/>
           <p:cNvSpPr/>
           <p:nvPr/>
         </p:nvSpPr>
@@ -34374,7 +36673,7 @@
       </p:sp>
       <p:sp>
         <p:nvSpPr>
-          <p:cNvPr id="9" name="Text 7"/>
+          <p:cNvPr id="13" name="Text 11"/>
           <p:cNvSpPr/>
           <p:nvPr/>
         </p:nvSpPr>
@@ -36335,11 +38634,11 @@
         <p:spPr>
           <a:xfrm>
             <a:off x="609905" y="2535174"/>
-            <a:ext cx="7818120" cy="2750058"/>
+            <a:ext cx="7818120" cy="3548329"/>
           </a:xfrm>
           <a:prstGeom prst="roundRect">
             <a:avLst>
-              <a:gd name="adj" fmla="val 1995"/>
+              <a:gd name="adj" fmla="val 1546"/>
             </a:avLst>
           </a:prstGeom>
           <a:solidFill>
@@ -36364,7 +38663,7 @@
         <p:spPr>
           <a:xfrm>
             <a:off x="865937" y="2681478"/>
-            <a:ext cx="7315200" cy="2475738"/>
+            <a:ext cx="7315200" cy="3274009"/>
           </a:xfrm>
           <a:prstGeom prst="rect">
             <a:avLst/>
@@ -36394,7 +38693,7 @@
                 <a:ea typeface="Microsoft YaHei" pitchFamily="34" charset="-122"/>
                 <a:cs typeface="Microsoft YaHei" pitchFamily="34" charset="-120"/>
               </a:rPr>
-              <a:t>引入：只含一个未知数且最高次数为 2 的方程是一元二次方程，一般形式 ax²+bx+c=0（a≠0），前提 a≠0 必须先判——若 a=0 就退化成一次方程。解法选法顺序：形如 (x+m)²=n（n≥0）先直接开平方；能十字相乘的用因式分解法；其余用配方法推出公式法。推导求根公式：对 ax²+bx+c=0 配方，得 (x+b/2a)²=(b²−4ac)/4a²，要开方必须有 b²−4ac≥0。</a:t>
+              <a:t>开场给两个方程：x²=9 和 x²−4x−5=0。第一个直接开平方秒杀；第二个开不了方——能把它“拆”成两个因式相乘吗？学生在尝试中自己走进因式分解法。追问“拆不开怎么办”，为配方法和公式法留下悬念，解法的选择顺序由此建立，而不是死记四种方法。</a:t>
             </a:r>
             <a:endParaRPr lang="en-US" sz="1350" dirty="0"/>
           </a:p>
@@ -36417,7 +38716,30 @@
                 <a:ea typeface="Microsoft YaHei" pitchFamily="34" charset="-122"/>
                 <a:cs typeface="Microsoft YaHei" pitchFamily="34" charset="-120"/>
               </a:rPr>
-              <a:t>判别式 Δ=b²−4ac 判根三情形：Δ＞0 两个不相等实根，Δ=0 两个相等实根，Δ＜0 无实数根。根与系数关系（韦达定理）：x₁+x₂=−b/a，x₁x₂=c/a，推导来自两根公式的加与乘。常见误区：用公式前不化成一般形式；忘记 a≠0 前提；十字相乘常数项符号配错——拆分后先乘回验算再写答案。</a:t>
+              <a:t>本体：一元二次方程的一般形式 ax²+bx+c=0（a≠0），若 a=0 就退化成一次方程，前提必须先判。选法顺序：形如 (x+m)²=n（n≥0）先直接开平方；能十字相乘的用因式分解法；其余配方推出公式法。判别式 Δ=b²−4ac 判根三情形：Δ＞0 两不等实根、Δ=0 两相等实根、Δ＜0 无实根；韦达定理 x₁+x₂=−b/a、x₁x₂=c/a，由两根公式的加与乘推得。</a:t>
+            </a:r>
+            <a:endParaRPr lang="en-US" sz="1350" dirty="0"/>
+          </a:p>
+          <a:p>
+            <a:pPr indent="0" marL="0">
+              <a:lnSpc>
+                <a:spcPct val="130000"/>
+              </a:lnSpc>
+              <a:spcAft>
+                <a:spcPts val="1000"/>
+              </a:spcAft>
+              <a:buNone/>
+            </a:pPr>
+            <a:r>
+              <a:rPr lang="en-US" sz="1350" dirty="0">
+                <a:solidFill>
+                  <a:srgbClr val="202D37"/>
+                </a:solidFill>
+                <a:latin typeface="Microsoft YaHei" pitchFamily="34" charset="0"/>
+                <a:ea typeface="Microsoft YaHei" pitchFamily="34" charset="-122"/>
+                <a:cs typeface="Microsoft YaHei" pitchFamily="34" charset="-120"/>
+              </a:rPr>
+              <a:t>高频误区：用公式或韦达前不化成一般形式；十字相乘常数项符号配错——拆完先乘回验算再写答案；忘记检验 a≠0。适用边界：直接开平方要求被开方数非负；Δ＜0 是“无实数根”，不是方程无意义；韦达定理只在方程有实根（Δ≥0）时使用，Δ＜0 时两根之积之和没有意义。</a:t>
             </a:r>
             <a:endParaRPr lang="en-US" sz="1350" dirty="0"/>
           </a:p>
@@ -37494,11 +39816,11 @@
         <p:spPr>
           <a:xfrm>
             <a:off x="609905" y="1748790"/>
-            <a:ext cx="10971886" cy="1234440"/>
+            <a:ext cx="10971886" cy="1147801"/>
           </a:xfrm>
           <a:prstGeom prst="roundRect">
             <a:avLst>
-              <a:gd name="adj" fmla="val 4444"/>
+              <a:gd name="adj" fmla="val 4780"/>
             </a:avLst>
           </a:prstGeom>
           <a:solidFill>
@@ -37523,7 +39845,7 @@
         <p:spPr>
           <a:xfrm>
             <a:off x="829361" y="1840230"/>
-            <a:ext cx="10532974" cy="1051560"/>
+            <a:ext cx="10532974" cy="964921"/>
           </a:xfrm>
           <a:prstGeom prst="rect">
             <a:avLst/>
@@ -37576,6 +39898,192 @@
       <p:sp>
         <p:nvSpPr>
           <p:cNvPr id="7" name="Shape 5"/>
+          <p:cNvSpPr/>
+          <p:nvPr/>
+        </p:nvSpPr>
+        <p:spPr>
+          <a:xfrm>
+            <a:off x="609905" y="3042895"/>
+            <a:ext cx="10971886" cy="1147801"/>
+          </a:xfrm>
+          <a:prstGeom prst="roundRect">
+            <a:avLst>
+              <a:gd name="adj" fmla="val 4780"/>
+            </a:avLst>
+          </a:prstGeom>
+          <a:solidFill>
+            <a:srgbClr val="FFFFFF"/>
+          </a:solidFill>
+          <a:ln/>
+          <a:effectLst>
+            <a:outerShdw sx="100000" sy="100000" kx="0" ky="0" algn="bl" rotWithShape="0" blurRad="88900" dist="25400" dir="3600000">
+              <a:srgbClr val="3A3A32">
+                <a:alpha val="16000"/>
+              </a:srgbClr>
+            </a:outerShdw>
+          </a:effectLst>
+        </p:spPr>
+      </p:sp>
+      <p:sp>
+        <p:nvSpPr>
+          <p:cNvPr id="8" name="Text 6"/>
+          <p:cNvSpPr/>
+          <p:nvPr/>
+        </p:nvSpPr>
+        <p:spPr>
+          <a:xfrm>
+            <a:off x="829361" y="3134335"/>
+            <a:ext cx="10532974" cy="964921"/>
+          </a:xfrm>
+          <a:prstGeom prst="rect">
+            <a:avLst/>
+          </a:prstGeom>
+          <a:noFill/>
+          <a:ln/>
+        </p:spPr>
+        <p:txBody>
+          <a:bodyPr wrap="square" lIns="0" tIns="0" rIns="0" bIns="0" rtlCol="0" anchor="ctr"/>
+          <a:lstStyle/>
+          <a:p>
+            <a:pPr indent="0" marL="0">
+              <a:lnSpc>
+                <a:spcPct val="115000"/>
+              </a:lnSpc>
+              <a:buNone/>
+            </a:pPr>
+            <a:r>
+              <a:rPr lang="en-US" sz="1350" b="1" dirty="0">
+                <a:solidFill>
+                  <a:srgbClr val="285C94"/>
+                </a:solidFill>
+                <a:latin typeface="Microsoft YaHei" pitchFamily="34" charset="0"/>
+                <a:ea typeface="Microsoft YaHei" pitchFamily="34" charset="-122"/>
+                <a:cs typeface="Microsoft YaHei" pitchFamily="34" charset="-120"/>
+              </a:rPr>
+              <a:t>练习 2　</a:t>
+            </a:r>
+            <a:pPr indent="0" marL="0">
+              <a:lnSpc>
+                <a:spcPct val="115000"/>
+              </a:lnSpc>
+              <a:buNone/>
+            </a:pPr>
+            <a:r>
+              <a:rPr lang="en-US" sz="1400" dirty="0">
+                <a:solidFill>
+                  <a:srgbClr val="202D37"/>
+                </a:solidFill>
+                <a:latin typeface="Microsoft YaHei" pitchFamily="34" charset="0"/>
+                <a:ea typeface="Microsoft YaHei" pitchFamily="34" charset="-122"/>
+                <a:cs typeface="Microsoft YaHei" pitchFamily="34" charset="-120"/>
+              </a:rPr>
+              <a:t>关于 x 的方程 x² − 2(m−1)x + m² = 0 有两个相等的实数根，求 m 的值。</a:t>
+            </a:r>
+            <a:endParaRPr lang="en-US" sz="1350" dirty="0"/>
+          </a:p>
+        </p:txBody>
+      </p:sp>
+      <p:sp>
+        <p:nvSpPr>
+          <p:cNvPr id="9" name="Shape 7"/>
+          <p:cNvSpPr/>
+          <p:nvPr/>
+        </p:nvSpPr>
+        <p:spPr>
+          <a:xfrm>
+            <a:off x="609905" y="4949647"/>
+            <a:ext cx="10971886" cy="585216"/>
+          </a:xfrm>
+          <a:prstGeom prst="roundRect">
+            <a:avLst>
+              <a:gd name="adj" fmla="val 7813"/>
+            </a:avLst>
+          </a:prstGeom>
+          <a:solidFill>
+            <a:srgbClr val="F2E3DC"/>
+          </a:solidFill>
+          <a:ln/>
+        </p:spPr>
+      </p:sp>
+      <p:sp>
+        <p:nvSpPr>
+          <p:cNvPr id="10" name="Text 8"/>
+          <p:cNvSpPr/>
+          <p:nvPr/>
+        </p:nvSpPr>
+        <p:spPr>
+          <a:xfrm>
+            <a:off x="811073" y="5004511"/>
+            <a:ext cx="10569550" cy="493776"/>
+          </a:xfrm>
+          <a:prstGeom prst="rect">
+            <a:avLst/>
+          </a:prstGeom>
+          <a:noFill/>
+          <a:ln/>
+        </p:spPr>
+        <p:txBody>
+          <a:bodyPr wrap="square" lIns="0" tIns="0" rIns="0" bIns="0" rtlCol="0" anchor="ctr"/>
+          <a:lstStyle/>
+          <a:p>
+            <a:pPr indent="0" marL="0">
+              <a:lnSpc>
+                <a:spcPct val="110000"/>
+              </a:lnSpc>
+              <a:buNone/>
+            </a:pPr>
+            <a:r>
+              <a:rPr lang="en-US" sz="1250" b="1" dirty="0">
+                <a:solidFill>
+                  <a:srgbClr val="B45F47"/>
+                </a:solidFill>
+                <a:latin typeface="Microsoft YaHei" pitchFamily="34" charset="0"/>
+                <a:ea typeface="Microsoft YaHei" pitchFamily="34" charset="-122"/>
+                <a:cs typeface="Microsoft YaHei" pitchFamily="34" charset="-120"/>
+              </a:rPr>
+              <a:t>变式挑战（选做）　</a:t>
+            </a:r>
+            <a:pPr indent="0" marL="0">
+              <a:lnSpc>
+                <a:spcPct val="110000"/>
+              </a:lnSpc>
+              <a:buNone/>
+            </a:pPr>
+            <a:r>
+              <a:rPr lang="en-US" sz="1250" dirty="0">
+                <a:solidFill>
+                  <a:srgbClr val="202D37"/>
+                </a:solidFill>
+                <a:latin typeface="Microsoft YaHei" pitchFamily="34" charset="0"/>
+                <a:ea typeface="Microsoft YaHei" pitchFamily="34" charset="-122"/>
+                <a:cs typeface="Microsoft YaHei" pitchFamily="34" charset="-120"/>
+              </a:rPr>
+              <a:t>解方程 2x² − 7x + 3 = 0，并用根与系数的关系检验。</a:t>
+            </a:r>
+            <a:pPr indent="0" marL="0">
+              <a:lnSpc>
+                <a:spcPct val="110000"/>
+              </a:lnSpc>
+              <a:buNone/>
+            </a:pPr>
+            <a:r>
+              <a:rPr lang="en-US" sz="1150" dirty="0">
+                <a:solidFill>
+                  <a:srgbClr val="6E7B85"/>
+                </a:solidFill>
+                <a:latin typeface="Microsoft YaHei" pitchFamily="34" charset="0"/>
+                <a:ea typeface="Microsoft YaHei" pitchFamily="34" charset="-122"/>
+                <a:cs typeface="Microsoft YaHei" pitchFamily="34" charset="-120"/>
+              </a:rPr>
+              <a:t>　提示：十字相乘试拆：首项 2x² 与末项 3，配 (2x−1)(x−3)，用“乘回去”验一次项系数是不是 −7。</a:t>
+            </a:r>
+            <a:endParaRPr lang="en-US" sz="1250" dirty="0"/>
+          </a:p>
+        </p:txBody>
+      </p:sp>
+      <p:sp>
+        <p:nvSpPr>
+          <p:cNvPr id="11" name="Shape 9"/>
           <p:cNvSpPr/>
           <p:nvPr/>
         </p:nvSpPr>
@@ -37597,7 +40105,7 @@
       </p:sp>
       <p:sp>
         <p:nvSpPr>
-          <p:cNvPr id="8" name="Text 6"/>
+          <p:cNvPr id="12" name="Text 10"/>
           <p:cNvSpPr/>
           <p:nvPr/>
         </p:nvSpPr>
@@ -37636,7 +40144,7 @@
       </p:sp>
       <p:sp>
         <p:nvSpPr>
-          <p:cNvPr id="9" name="Text 7"/>
+          <p:cNvPr id="13" name="Text 11"/>
           <p:cNvSpPr/>
           <p:nvPr/>
         </p:nvSpPr>
@@ -37893,11 +40401,11 @@
         <p:spPr>
           <a:xfrm>
             <a:off x="609905" y="2535174"/>
-            <a:ext cx="7818120" cy="2750058"/>
+            <a:ext cx="7818120" cy="3548329"/>
           </a:xfrm>
           <a:prstGeom prst="roundRect">
             <a:avLst>
-              <a:gd name="adj" fmla="val 1995"/>
+              <a:gd name="adj" fmla="val 1546"/>
             </a:avLst>
           </a:prstGeom>
           <a:solidFill>
@@ -37922,7 +40430,7 @@
         <p:spPr>
           <a:xfrm>
             <a:off x="865937" y="2681478"/>
-            <a:ext cx="7315200" cy="2475738"/>
+            <a:ext cx="7315200" cy="3274009"/>
           </a:xfrm>
           <a:prstGeom prst="rect">
             <a:avLst/>
@@ -37952,7 +40460,7 @@
                 <a:ea typeface="Microsoft YaHei" pitchFamily="34" charset="-122"/>
                 <a:cs typeface="Microsoft YaHei" pitchFamily="34" charset="-120"/>
               </a:rPr>
-              <a:t>引入：二次函数 y=ax²+bx+c 通过配方可化为顶点式 y=a(x−h)²+k，三要素一次读出：开口方向与大小看 a（a＞0 开口向上、有最小值；a＜0 向下、有最大值），对称轴 x=h，顶点 (h, k)。推导配方过程：提出 a、括号内加上并减去“一次项系数一半的平方”，注意 a 要乘进补偿项里，这是最易错的代数细节。</a:t>
+              <a:t>开场动画：抛物线 y=x² 向右平移 2 格、再向上抬 1 格，猜解析式。有同学写 y=(x+2)²+1，把图象画出来对比顶点位置——对不对一目了然。带着“到底给谁加减”的疑问进入顶点式与平移法则，先猜、再算、后验证，三步走完这个易错点。</a:t>
             </a:r>
             <a:endParaRPr lang="en-US" sz="1350" dirty="0"/>
           </a:p>
@@ -37975,7 +40483,30 @@
                 <a:ea typeface="Microsoft YaHei" pitchFamily="34" charset="-122"/>
                 <a:cs typeface="Microsoft YaHei" pitchFamily="34" charset="-120"/>
               </a:rPr>
-              <a:t>平移法则“左加右减自变量，上加下减常数项”：y=x² 右移 2 得 y=(x−2)²——对 x 而言是减；再上移 1 得 y=(x−2)²+1。检验口诀：把新顶点代回解析式必须成立。实际最值应用（如利润、抛物击靶）三步：设自变量并写取值范围、配方求最值、回答实际问题。误区：平移方向记反（向右平移 h，x 就减 h）；求最值忘了先写 x 的实际范围。</a:t>
+              <a:t>本体：配方把 y=ax²+bx+c 化为顶点式 y=a(x−h)²+k，三要素一次读出：a 定开口方向与大小（a＞0 向上有最小值，a＜0 向下有最大值），对称轴 x=h，顶点 (h, k)。配方关键：提出 a 后在括号内加上并减去“一次项系数一半的平方”，补偿项必须乘回 a。平移法则“左加右减自变量、上加下减常数项”，检验法：把新顶点代回解析式。</a:t>
+            </a:r>
+            <a:endParaRPr lang="en-US" sz="1350" dirty="0"/>
+          </a:p>
+          <a:p>
+            <a:pPr indent="0" marL="0">
+              <a:lnSpc>
+                <a:spcPct val="130000"/>
+              </a:lnSpc>
+              <a:spcAft>
+                <a:spcPts val="1000"/>
+              </a:spcAft>
+              <a:buNone/>
+            </a:pPr>
+            <a:r>
+              <a:rPr lang="en-US" sz="1350" dirty="0">
+                <a:solidFill>
+                  <a:srgbClr val="202D37"/>
+                </a:solidFill>
+                <a:latin typeface="Microsoft YaHei" pitchFamily="34" charset="0"/>
+                <a:ea typeface="Microsoft YaHei" pitchFamily="34" charset="-122"/>
+                <a:cs typeface="Microsoft YaHei" pitchFamily="34" charset="-120"/>
+              </a:rPr>
+              <a:t>高频误区：平移方向记反——向右平移 h，x 要减 h 不是加 h；求最值忘写自变量的实际范围。适用边界：顶点式对任何二次函数都成立，但最值问题必须先看 x 的取值范围——范围不含顶点时，最值在端点处取得，不能只报顶点纵坐标；平移只改位置，不改开口方向与大小。</a:t>
             </a:r>
             <a:endParaRPr lang="en-US" sz="1350" dirty="0"/>
           </a:p>
@@ -39153,11 +41684,11 @@
         <p:spPr>
           <a:xfrm>
             <a:off x="609905" y="1748790"/>
-            <a:ext cx="10971886" cy="1234440"/>
+            <a:ext cx="10971886" cy="1147801"/>
           </a:xfrm>
           <a:prstGeom prst="roundRect">
             <a:avLst>
-              <a:gd name="adj" fmla="val 4444"/>
+              <a:gd name="adj" fmla="val 4780"/>
             </a:avLst>
           </a:prstGeom>
           <a:solidFill>
@@ -39182,7 +41713,7 @@
         <p:spPr>
           <a:xfrm>
             <a:off x="829361" y="1840230"/>
-            <a:ext cx="10532974" cy="1051560"/>
+            <a:ext cx="10532974" cy="964921"/>
           </a:xfrm>
           <a:prstGeom prst="rect">
             <a:avLst/>
@@ -39235,6 +41766,192 @@
       <p:sp>
         <p:nvSpPr>
           <p:cNvPr id="7" name="Shape 5"/>
+          <p:cNvSpPr/>
+          <p:nvPr/>
+        </p:nvSpPr>
+        <p:spPr>
+          <a:xfrm>
+            <a:off x="609905" y="3042895"/>
+            <a:ext cx="10971886" cy="1147801"/>
+          </a:xfrm>
+          <a:prstGeom prst="roundRect">
+            <a:avLst>
+              <a:gd name="adj" fmla="val 4780"/>
+            </a:avLst>
+          </a:prstGeom>
+          <a:solidFill>
+            <a:srgbClr val="FFFFFF"/>
+          </a:solidFill>
+          <a:ln/>
+          <a:effectLst>
+            <a:outerShdw sx="100000" sy="100000" kx="0" ky="0" algn="bl" rotWithShape="0" blurRad="88900" dist="25400" dir="3600000">
+              <a:srgbClr val="3A3A32">
+                <a:alpha val="16000"/>
+              </a:srgbClr>
+            </a:outerShdw>
+          </a:effectLst>
+        </p:spPr>
+      </p:sp>
+      <p:sp>
+        <p:nvSpPr>
+          <p:cNvPr id="8" name="Text 6"/>
+          <p:cNvSpPr/>
+          <p:nvPr/>
+        </p:nvSpPr>
+        <p:spPr>
+          <a:xfrm>
+            <a:off x="829361" y="3134335"/>
+            <a:ext cx="10532974" cy="964921"/>
+          </a:xfrm>
+          <a:prstGeom prst="rect">
+            <a:avLst/>
+          </a:prstGeom>
+          <a:noFill/>
+          <a:ln/>
+        </p:spPr>
+        <p:txBody>
+          <a:bodyPr wrap="square" lIns="0" tIns="0" rIns="0" bIns="0" rtlCol="0" anchor="ctr"/>
+          <a:lstStyle/>
+          <a:p>
+            <a:pPr indent="0" marL="0">
+              <a:lnSpc>
+                <a:spcPct val="115000"/>
+              </a:lnSpc>
+              <a:buNone/>
+            </a:pPr>
+            <a:r>
+              <a:rPr lang="en-US" sz="1350" b="1" dirty="0">
+                <a:solidFill>
+                  <a:srgbClr val="285C94"/>
+                </a:solidFill>
+                <a:latin typeface="Microsoft YaHei" pitchFamily="34" charset="0"/>
+                <a:ea typeface="Microsoft YaHei" pitchFamily="34" charset="-122"/>
+                <a:cs typeface="Microsoft YaHei" pitchFamily="34" charset="-120"/>
+              </a:rPr>
+              <a:t>练习 2　</a:t>
+            </a:r>
+            <a:pPr indent="0" marL="0">
+              <a:lnSpc>
+                <a:spcPct val="115000"/>
+              </a:lnSpc>
+              <a:buNone/>
+            </a:pPr>
+            <a:r>
+              <a:rPr lang="en-US" sz="1400" dirty="0">
+                <a:solidFill>
+                  <a:srgbClr val="202D37"/>
+                </a:solidFill>
+                <a:latin typeface="Microsoft YaHei" pitchFamily="34" charset="0"/>
+                <a:ea typeface="Microsoft YaHei" pitchFamily="34" charset="-122"/>
+                <a:cs typeface="Microsoft YaHei" pitchFamily="34" charset="-120"/>
+              </a:rPr>
+              <a:t>把抛物线 y = x² 先向左平移 3 个单位，再向下平移 2 个单位，写出所得抛物线的解析式，并指出新顶点坐标。</a:t>
+            </a:r>
+            <a:endParaRPr lang="en-US" sz="1350" dirty="0"/>
+          </a:p>
+        </p:txBody>
+      </p:sp>
+      <p:sp>
+        <p:nvSpPr>
+          <p:cNvPr id="9" name="Shape 7"/>
+          <p:cNvSpPr/>
+          <p:nvPr/>
+        </p:nvSpPr>
+        <p:spPr>
+          <a:xfrm>
+            <a:off x="609905" y="4949647"/>
+            <a:ext cx="10971886" cy="585216"/>
+          </a:xfrm>
+          <a:prstGeom prst="roundRect">
+            <a:avLst>
+              <a:gd name="adj" fmla="val 7813"/>
+            </a:avLst>
+          </a:prstGeom>
+          <a:solidFill>
+            <a:srgbClr val="F2E3DC"/>
+          </a:solidFill>
+          <a:ln/>
+        </p:spPr>
+      </p:sp>
+      <p:sp>
+        <p:nvSpPr>
+          <p:cNvPr id="10" name="Text 8"/>
+          <p:cNvSpPr/>
+          <p:nvPr/>
+        </p:nvSpPr>
+        <p:spPr>
+          <a:xfrm>
+            <a:off x="811073" y="5004511"/>
+            <a:ext cx="10569550" cy="493776"/>
+          </a:xfrm>
+          <a:prstGeom prst="rect">
+            <a:avLst/>
+          </a:prstGeom>
+          <a:noFill/>
+          <a:ln/>
+        </p:spPr>
+        <p:txBody>
+          <a:bodyPr wrap="square" lIns="0" tIns="0" rIns="0" bIns="0" rtlCol="0" anchor="ctr"/>
+          <a:lstStyle/>
+          <a:p>
+            <a:pPr indent="0" marL="0">
+              <a:lnSpc>
+                <a:spcPct val="110000"/>
+              </a:lnSpc>
+              <a:buNone/>
+            </a:pPr>
+            <a:r>
+              <a:rPr lang="en-US" sz="1250" b="1" dirty="0">
+                <a:solidFill>
+                  <a:srgbClr val="B45F47"/>
+                </a:solidFill>
+                <a:latin typeface="Microsoft YaHei" pitchFamily="34" charset="0"/>
+                <a:ea typeface="Microsoft YaHei" pitchFamily="34" charset="-122"/>
+                <a:cs typeface="Microsoft YaHei" pitchFamily="34" charset="-120"/>
+              </a:rPr>
+              <a:t>变式挑战（选做）　</a:t>
+            </a:r>
+            <a:pPr indent="0" marL="0">
+              <a:lnSpc>
+                <a:spcPct val="110000"/>
+              </a:lnSpc>
+              <a:buNone/>
+            </a:pPr>
+            <a:r>
+              <a:rPr lang="en-US" sz="1250" dirty="0">
+                <a:solidFill>
+                  <a:srgbClr val="202D37"/>
+                </a:solidFill>
+                <a:latin typeface="Microsoft YaHei" pitchFamily="34" charset="0"/>
+                <a:ea typeface="Microsoft YaHei" pitchFamily="34" charset="-122"/>
+                <a:cs typeface="Microsoft YaHei" pitchFamily="34" charset="-120"/>
+              </a:rPr>
+              <a:t>用配方法把 y = 3x² − 6x + 1 化为顶点式，说出三要素，并求函数的最小值。</a:t>
+            </a:r>
+            <a:pPr indent="0" marL="0">
+              <a:lnSpc>
+                <a:spcPct val="110000"/>
+              </a:lnSpc>
+              <a:buNone/>
+            </a:pPr>
+            <a:r>
+              <a:rPr lang="en-US" sz="1150" dirty="0">
+                <a:solidFill>
+                  <a:srgbClr val="6E7B85"/>
+                </a:solidFill>
+                <a:latin typeface="Microsoft YaHei" pitchFamily="34" charset="0"/>
+                <a:ea typeface="Microsoft YaHei" pitchFamily="34" charset="-122"/>
+                <a:cs typeface="Microsoft YaHei" pitchFamily="34" charset="-120"/>
+              </a:rPr>
+              <a:t>　提示：先提出 3：y=3(x²−2x)+1；括号内配 (2/2)²=1，注意补偿项要乘 3 再放回去。</a:t>
+            </a:r>
+            <a:endParaRPr lang="en-US" sz="1250" dirty="0"/>
+          </a:p>
+        </p:txBody>
+      </p:sp>
+      <p:sp>
+        <p:nvSpPr>
+          <p:cNvPr id="11" name="Shape 9"/>
           <p:cNvSpPr/>
           <p:nvPr/>
         </p:nvSpPr>
@@ -39256,7 +41973,7 @@
       </p:sp>
       <p:sp>
         <p:nvSpPr>
-          <p:cNvPr id="8" name="Text 6"/>
+          <p:cNvPr id="12" name="Text 10"/>
           <p:cNvSpPr/>
           <p:nvPr/>
         </p:nvSpPr>
@@ -39295,7 +42012,7 @@
       </p:sp>
       <p:sp>
         <p:nvSpPr>
-          <p:cNvPr id="9" name="Text 7"/>
+          <p:cNvPr id="13" name="Text 11"/>
           <p:cNvSpPr/>
           <p:nvPr/>
         </p:nvSpPr>
@@ -40615,11 +43332,11 @@
         <p:spPr>
           <a:xfrm>
             <a:off x="609905" y="2535174"/>
-            <a:ext cx="7818120" cy="2750058"/>
+            <a:ext cx="7818120" cy="3330702"/>
           </a:xfrm>
           <a:prstGeom prst="roundRect">
             <a:avLst>
-              <a:gd name="adj" fmla="val 1995"/>
+              <a:gd name="adj" fmla="val 1647"/>
             </a:avLst>
           </a:prstGeom>
           <a:solidFill>
@@ -40644,7 +43361,7 @@
         <p:spPr>
           <a:xfrm>
             <a:off x="865937" y="2681478"/>
-            <a:ext cx="7315200" cy="2475738"/>
+            <a:ext cx="7315200" cy="3056382"/>
           </a:xfrm>
           <a:prstGeom prst="rect">
             <a:avLst/>
@@ -40674,7 +43391,7 @@
                 <a:ea typeface="Microsoft YaHei" pitchFamily="34" charset="-122"/>
                 <a:cs typeface="Microsoft YaHei" pitchFamily="34" charset="-120"/>
               </a:rPr>
-              <a:t>引入旋转三要素：旋转中心、旋转方向、旋转角——定位一个旋转变换三个缺一不可，作图时先定点、再定角、后找对应点。性质推导：对应点到旋转中心的距离相等（旋转不改变图形形状大小），对应点与旋转中心连线的夹角等于旋转角。作图示范：连 OA，以 O 为圆心、OA 为半径画弧，再按旋转角量出方向找到 A′。</a:t>
+              <a:t>开场让学生用手比划两种“转”：风车绕中心转过一角、指针转过半圈——一个旋转要说清绕哪个点（中心）、朝哪个方向、转过多大角度，三要素齐了变换才被完全确定。再发方格纸，按给定中心和角度把一个三角形转出来，作图体验先行。</a:t>
             </a:r>
             <a:endParaRPr lang="en-US" sz="1350" dirty="0"/>
           </a:p>
@@ -40697,7 +43414,30 @@
                 <a:ea typeface="Microsoft YaHei" pitchFamily="34" charset="-122"/>
                 <a:cs typeface="Microsoft YaHei" pitchFamily="34" charset="-120"/>
               </a:rPr>
-              <a:t>中心对称是旋转角为 180° 的特例：把一个图形绕某点旋转 180° 能与另一图形重合，就叫关于该点中心对称。对应点连线经过对称中心且被平分——这是检验和作图的依据。辨析两个易混概念：“中心对称”说的是两个图形之间的关系，“中心对称图形”说的是一个图形自身绕中心转 180° 与自身重合（如平行四边形）。在坐标系里，绕原点旋转 180° 等价于关于原点中心对称，坐标变为 (−x, −y)。</a:t>
+              <a:t>本体：旋转三要素——旋转中心、旋转方向、旋转角。性质：对应点到旋转中心的距离相等，对应点与旋转中心连线的夹角等于旋转角，图形旋转前后形状大小不变。中心对称是旋转角为 180° 的特例：对应点连线经过对称中心且被平分；坐标系中绕原点旋转 180°，坐标变为 (−x, −y)。</a:t>
+            </a:r>
+            <a:endParaRPr lang="en-US" sz="1350" dirty="0"/>
+          </a:p>
+          <a:p>
+            <a:pPr indent="0" marL="0">
+              <a:lnSpc>
+                <a:spcPct val="130000"/>
+              </a:lnSpc>
+              <a:spcAft>
+                <a:spcPts val="1000"/>
+              </a:spcAft>
+              <a:buNone/>
+            </a:pPr>
+            <a:r>
+              <a:rPr lang="en-US" sz="1350" dirty="0">
+                <a:solidFill>
+                  <a:srgbClr val="202D37"/>
+                </a:solidFill>
+                <a:latin typeface="Microsoft YaHei" pitchFamily="34" charset="0"/>
+                <a:ea typeface="Microsoft YaHei" pitchFamily="34" charset="-122"/>
+                <a:cs typeface="Microsoft YaHei" pitchFamily="34" charset="-120"/>
+              </a:rPr>
+              <a:t>高频误区：“中心对称”（两个图形之间的关系）与“中心对称图形”（图形自身转 180° 与自身重合，如平行四边形）混为一谈；旋转角看错对象——应看对应点与旋转中心连线的夹角。适用边界：旋转 180° 时方向不影响结果；只有绕原点的中心对称才有“坐标取相反数”的简捷结论，绕其他点须按定义作图。</a:t>
             </a:r>
             <a:endParaRPr lang="en-US" sz="1350" dirty="0"/>
           </a:p>
@@ -41133,11 +43873,11 @@
         <p:spPr>
           <a:xfrm>
             <a:off x="609905" y="1748790"/>
-            <a:ext cx="10971886" cy="1234440"/>
+            <a:ext cx="10971886" cy="1147801"/>
           </a:xfrm>
           <a:prstGeom prst="roundRect">
             <a:avLst>
-              <a:gd name="adj" fmla="val 4444"/>
+              <a:gd name="adj" fmla="val 4780"/>
             </a:avLst>
           </a:prstGeom>
           <a:solidFill>
@@ -41162,7 +43902,7 @@
         <p:spPr>
           <a:xfrm>
             <a:off x="829361" y="1840230"/>
-            <a:ext cx="10532974" cy="1051560"/>
+            <a:ext cx="10532974" cy="964921"/>
           </a:xfrm>
           <a:prstGeom prst="rect">
             <a:avLst/>
@@ -41215,6 +43955,192 @@
       <p:sp>
         <p:nvSpPr>
           <p:cNvPr id="7" name="Shape 5"/>
+          <p:cNvSpPr/>
+          <p:nvPr/>
+        </p:nvSpPr>
+        <p:spPr>
+          <a:xfrm>
+            <a:off x="609905" y="3042895"/>
+            <a:ext cx="10971886" cy="1147801"/>
+          </a:xfrm>
+          <a:prstGeom prst="roundRect">
+            <a:avLst>
+              <a:gd name="adj" fmla="val 4780"/>
+            </a:avLst>
+          </a:prstGeom>
+          <a:solidFill>
+            <a:srgbClr val="FFFFFF"/>
+          </a:solidFill>
+          <a:ln/>
+          <a:effectLst>
+            <a:outerShdw sx="100000" sy="100000" kx="0" ky="0" algn="bl" rotWithShape="0" blurRad="88900" dist="25400" dir="3600000">
+              <a:srgbClr val="3A3A32">
+                <a:alpha val="16000"/>
+              </a:srgbClr>
+            </a:outerShdw>
+          </a:effectLst>
+        </p:spPr>
+      </p:sp>
+      <p:sp>
+        <p:nvSpPr>
+          <p:cNvPr id="8" name="Text 6"/>
+          <p:cNvSpPr/>
+          <p:nvPr/>
+        </p:nvSpPr>
+        <p:spPr>
+          <a:xfrm>
+            <a:off x="829361" y="3134335"/>
+            <a:ext cx="10532974" cy="964921"/>
+          </a:xfrm>
+          <a:prstGeom prst="rect">
+            <a:avLst/>
+          </a:prstGeom>
+          <a:noFill/>
+          <a:ln/>
+        </p:spPr>
+        <p:txBody>
+          <a:bodyPr wrap="square" lIns="0" tIns="0" rIns="0" bIns="0" rtlCol="0" anchor="ctr"/>
+          <a:lstStyle/>
+          <a:p>
+            <a:pPr indent="0" marL="0">
+              <a:lnSpc>
+                <a:spcPct val="115000"/>
+              </a:lnSpc>
+              <a:buNone/>
+            </a:pPr>
+            <a:r>
+              <a:rPr lang="en-US" sz="1350" b="1" dirty="0">
+                <a:solidFill>
+                  <a:srgbClr val="285C94"/>
+                </a:solidFill>
+                <a:latin typeface="Microsoft YaHei" pitchFamily="34" charset="0"/>
+                <a:ea typeface="Microsoft YaHei" pitchFamily="34" charset="-122"/>
+                <a:cs typeface="Microsoft YaHei" pitchFamily="34" charset="-120"/>
+              </a:rPr>
+              <a:t>练习 2　</a:t>
+            </a:r>
+            <a:pPr indent="0" marL="0">
+              <a:lnSpc>
+                <a:spcPct val="115000"/>
+              </a:lnSpc>
+              <a:buNone/>
+            </a:pPr>
+            <a:r>
+              <a:rPr lang="en-US" sz="1400" dirty="0">
+                <a:solidFill>
+                  <a:srgbClr val="202D37"/>
+                </a:solidFill>
+                <a:latin typeface="Microsoft YaHei" pitchFamily="34" charset="0"/>
+                <a:ea typeface="Microsoft YaHei" pitchFamily="34" charset="-122"/>
+                <a:cs typeface="Microsoft YaHei" pitchFamily="34" charset="-120"/>
+              </a:rPr>
+              <a:t>已知 |x−2|=3，求 x 的值。</a:t>
+            </a:r>
+            <a:endParaRPr lang="en-US" sz="1350" dirty="0"/>
+          </a:p>
+        </p:txBody>
+      </p:sp>
+      <p:sp>
+        <p:nvSpPr>
+          <p:cNvPr id="9" name="Shape 7"/>
+          <p:cNvSpPr/>
+          <p:nvPr/>
+        </p:nvSpPr>
+        <p:spPr>
+          <a:xfrm>
+            <a:off x="609905" y="4949647"/>
+            <a:ext cx="10971886" cy="585216"/>
+          </a:xfrm>
+          <a:prstGeom prst="roundRect">
+            <a:avLst>
+              <a:gd name="adj" fmla="val 7813"/>
+            </a:avLst>
+          </a:prstGeom>
+          <a:solidFill>
+            <a:srgbClr val="F2E3DC"/>
+          </a:solidFill>
+          <a:ln/>
+        </p:spPr>
+      </p:sp>
+      <p:sp>
+        <p:nvSpPr>
+          <p:cNvPr id="10" name="Text 8"/>
+          <p:cNvSpPr/>
+          <p:nvPr/>
+        </p:nvSpPr>
+        <p:spPr>
+          <a:xfrm>
+            <a:off x="811073" y="5004511"/>
+            <a:ext cx="10569550" cy="493776"/>
+          </a:xfrm>
+          <a:prstGeom prst="rect">
+            <a:avLst/>
+          </a:prstGeom>
+          <a:noFill/>
+          <a:ln/>
+        </p:spPr>
+        <p:txBody>
+          <a:bodyPr wrap="square" lIns="0" tIns="0" rIns="0" bIns="0" rtlCol="0" anchor="ctr"/>
+          <a:lstStyle/>
+          <a:p>
+            <a:pPr indent="0" marL="0">
+              <a:lnSpc>
+                <a:spcPct val="110000"/>
+              </a:lnSpc>
+              <a:buNone/>
+            </a:pPr>
+            <a:r>
+              <a:rPr lang="en-US" sz="1250" b="1" dirty="0">
+                <a:solidFill>
+                  <a:srgbClr val="B45F47"/>
+                </a:solidFill>
+                <a:latin typeface="Microsoft YaHei" pitchFamily="34" charset="0"/>
+                <a:ea typeface="Microsoft YaHei" pitchFamily="34" charset="-122"/>
+                <a:cs typeface="Microsoft YaHei" pitchFamily="34" charset="-120"/>
+              </a:rPr>
+              <a:t>变式挑战（选做）　</a:t>
+            </a:r>
+            <a:pPr indent="0" marL="0">
+              <a:lnSpc>
+                <a:spcPct val="110000"/>
+              </a:lnSpc>
+              <a:buNone/>
+            </a:pPr>
+            <a:r>
+              <a:rPr lang="en-US" sz="1250" dirty="0">
+                <a:solidFill>
+                  <a:srgbClr val="202D37"/>
+                </a:solidFill>
+                <a:latin typeface="Microsoft YaHei" pitchFamily="34" charset="0"/>
+                <a:ea typeface="Microsoft YaHei" pitchFamily="34" charset="-122"/>
+                <a:cs typeface="Microsoft YaHei" pitchFamily="34" charset="-120"/>
+              </a:rPr>
+              <a:t>在数轴上表示 −2.5 与 1，求这两个数的绝对值，并比较 −2.5 与 1 的大小。</a:t>
+            </a:r>
+            <a:pPr indent="0" marL="0">
+              <a:lnSpc>
+                <a:spcPct val="110000"/>
+              </a:lnSpc>
+              <a:buNone/>
+            </a:pPr>
+            <a:r>
+              <a:rPr lang="en-US" sz="1150" dirty="0">
+                <a:solidFill>
+                  <a:srgbClr val="6E7B85"/>
+                </a:solidFill>
+                <a:latin typeface="Microsoft YaHei" pitchFamily="34" charset="0"/>
+                <a:ea typeface="Microsoft YaHei" pitchFamily="34" charset="-122"/>
+                <a:cs typeface="Microsoft YaHei" pitchFamily="34" charset="-120"/>
+              </a:rPr>
+              <a:t>　提示：先画数轴描点：负数在原点左侧，正数在右侧；绝对值就是数一数到原点隔几个单位。</a:t>
+            </a:r>
+            <a:endParaRPr lang="en-US" sz="1250" dirty="0"/>
+          </a:p>
+        </p:txBody>
+      </p:sp>
+      <p:sp>
+        <p:nvSpPr>
+          <p:cNvPr id="11" name="Shape 9"/>
           <p:cNvSpPr/>
           <p:nvPr/>
         </p:nvSpPr>
@@ -41236,7 +44162,7 @@
       </p:sp>
       <p:sp>
         <p:nvSpPr>
-          <p:cNvPr id="8" name="Text 6"/>
+          <p:cNvPr id="12" name="Text 10"/>
           <p:cNvSpPr/>
           <p:nvPr/>
         </p:nvSpPr>
@@ -41275,7 +44201,7 @@
       </p:sp>
       <p:sp>
         <p:nvSpPr>
-          <p:cNvPr id="9" name="Text 7"/>
+          <p:cNvPr id="13" name="Text 11"/>
           <p:cNvSpPr/>
           <p:nvPr/>
         </p:nvSpPr>
@@ -42092,11 +45018,11 @@
         <p:spPr>
           <a:xfrm>
             <a:off x="609905" y="1748790"/>
-            <a:ext cx="10971886" cy="1234440"/>
+            <a:ext cx="10971886" cy="1147801"/>
           </a:xfrm>
           <a:prstGeom prst="roundRect">
             <a:avLst>
-              <a:gd name="adj" fmla="val 4444"/>
+              <a:gd name="adj" fmla="val 4780"/>
             </a:avLst>
           </a:prstGeom>
           <a:solidFill>
@@ -42121,7 +45047,7 @@
         <p:spPr>
           <a:xfrm>
             <a:off x="829361" y="1840230"/>
-            <a:ext cx="10532974" cy="1051560"/>
+            <a:ext cx="10532974" cy="964921"/>
           </a:xfrm>
           <a:prstGeom prst="rect">
             <a:avLst/>
@@ -42174,6 +45100,192 @@
       <p:sp>
         <p:nvSpPr>
           <p:cNvPr id="7" name="Shape 5"/>
+          <p:cNvSpPr/>
+          <p:nvPr/>
+        </p:nvSpPr>
+        <p:spPr>
+          <a:xfrm>
+            <a:off x="609905" y="3042895"/>
+            <a:ext cx="10971886" cy="1147801"/>
+          </a:xfrm>
+          <a:prstGeom prst="roundRect">
+            <a:avLst>
+              <a:gd name="adj" fmla="val 4780"/>
+            </a:avLst>
+          </a:prstGeom>
+          <a:solidFill>
+            <a:srgbClr val="FFFFFF"/>
+          </a:solidFill>
+          <a:ln/>
+          <a:effectLst>
+            <a:outerShdw sx="100000" sy="100000" kx="0" ky="0" algn="bl" rotWithShape="0" blurRad="88900" dist="25400" dir="3600000">
+              <a:srgbClr val="3A3A32">
+                <a:alpha val="16000"/>
+              </a:srgbClr>
+            </a:outerShdw>
+          </a:effectLst>
+        </p:spPr>
+      </p:sp>
+      <p:sp>
+        <p:nvSpPr>
+          <p:cNvPr id="8" name="Text 6"/>
+          <p:cNvSpPr/>
+          <p:nvPr/>
+        </p:nvSpPr>
+        <p:spPr>
+          <a:xfrm>
+            <a:off x="829361" y="3134335"/>
+            <a:ext cx="10532974" cy="964921"/>
+          </a:xfrm>
+          <a:prstGeom prst="rect">
+            <a:avLst/>
+          </a:prstGeom>
+          <a:noFill/>
+          <a:ln/>
+        </p:spPr>
+        <p:txBody>
+          <a:bodyPr wrap="square" lIns="0" tIns="0" rIns="0" bIns="0" rtlCol="0" anchor="ctr"/>
+          <a:lstStyle/>
+          <a:p>
+            <a:pPr indent="0" marL="0">
+              <a:lnSpc>
+                <a:spcPct val="115000"/>
+              </a:lnSpc>
+              <a:buNone/>
+            </a:pPr>
+            <a:r>
+              <a:rPr lang="en-US" sz="1350" b="1" dirty="0">
+                <a:solidFill>
+                  <a:srgbClr val="285C94"/>
+                </a:solidFill>
+                <a:latin typeface="Microsoft YaHei" pitchFamily="34" charset="0"/>
+                <a:ea typeface="Microsoft YaHei" pitchFamily="34" charset="-122"/>
+                <a:cs typeface="Microsoft YaHei" pitchFamily="34" charset="-120"/>
+              </a:rPr>
+              <a:t>练习 2　</a:t>
+            </a:r>
+            <a:pPr indent="0" marL="0">
+              <a:lnSpc>
+                <a:spcPct val="115000"/>
+              </a:lnSpc>
+              <a:buNone/>
+            </a:pPr>
+            <a:r>
+              <a:rPr lang="en-US" sz="1400" dirty="0">
+                <a:solidFill>
+                  <a:srgbClr val="202D37"/>
+                </a:solidFill>
+                <a:latin typeface="Microsoft YaHei" pitchFamily="34" charset="0"/>
+                <a:ea typeface="Microsoft YaHei" pitchFamily="34" charset="-122"/>
+                <a:cs typeface="Microsoft YaHei" pitchFamily="34" charset="-120"/>
+              </a:rPr>
+              <a:t>点 M(a, b) 关于原点的对称点与它关于 y 轴的对称点恰好重合，求 b 的值，并说明此时点 M 的位置特点。</a:t>
+            </a:r>
+            <a:endParaRPr lang="en-US" sz="1350" dirty="0"/>
+          </a:p>
+        </p:txBody>
+      </p:sp>
+      <p:sp>
+        <p:nvSpPr>
+          <p:cNvPr id="9" name="Shape 7"/>
+          <p:cNvSpPr/>
+          <p:nvPr/>
+        </p:nvSpPr>
+        <p:spPr>
+          <a:xfrm>
+            <a:off x="609905" y="4949647"/>
+            <a:ext cx="10971886" cy="585216"/>
+          </a:xfrm>
+          <a:prstGeom prst="roundRect">
+            <a:avLst>
+              <a:gd name="adj" fmla="val 7813"/>
+            </a:avLst>
+          </a:prstGeom>
+          <a:solidFill>
+            <a:srgbClr val="F2E3DC"/>
+          </a:solidFill>
+          <a:ln/>
+        </p:spPr>
+      </p:sp>
+      <p:sp>
+        <p:nvSpPr>
+          <p:cNvPr id="10" name="Text 8"/>
+          <p:cNvSpPr/>
+          <p:nvPr/>
+        </p:nvSpPr>
+        <p:spPr>
+          <a:xfrm>
+            <a:off x="811073" y="5004511"/>
+            <a:ext cx="10569550" cy="493776"/>
+          </a:xfrm>
+          <a:prstGeom prst="rect">
+            <a:avLst/>
+          </a:prstGeom>
+          <a:noFill/>
+          <a:ln/>
+        </p:spPr>
+        <p:txBody>
+          <a:bodyPr wrap="square" lIns="0" tIns="0" rIns="0" bIns="0" rtlCol="0" anchor="ctr"/>
+          <a:lstStyle/>
+          <a:p>
+            <a:pPr indent="0" marL="0">
+              <a:lnSpc>
+                <a:spcPct val="110000"/>
+              </a:lnSpc>
+              <a:buNone/>
+            </a:pPr>
+            <a:r>
+              <a:rPr lang="en-US" sz="1250" b="1" dirty="0">
+                <a:solidFill>
+                  <a:srgbClr val="B45F47"/>
+                </a:solidFill>
+                <a:latin typeface="Microsoft YaHei" pitchFamily="34" charset="0"/>
+                <a:ea typeface="Microsoft YaHei" pitchFamily="34" charset="-122"/>
+                <a:cs typeface="Microsoft YaHei" pitchFamily="34" charset="-120"/>
+              </a:rPr>
+              <a:t>变式挑战（选做）　</a:t>
+            </a:r>
+            <a:pPr indent="0" marL="0">
+              <a:lnSpc>
+                <a:spcPct val="110000"/>
+              </a:lnSpc>
+              <a:buNone/>
+            </a:pPr>
+            <a:r>
+              <a:rPr lang="en-US" sz="1250" dirty="0">
+                <a:solidFill>
+                  <a:srgbClr val="202D37"/>
+                </a:solidFill>
+                <a:latin typeface="Microsoft YaHei" pitchFamily="34" charset="0"/>
+                <a:ea typeface="Microsoft YaHei" pitchFamily="34" charset="-122"/>
+                <a:cs typeface="Microsoft YaHei" pitchFamily="34" charset="-120"/>
+              </a:rPr>
+              <a:t>点 P(−4, 5) 绕原点旋转 180° 得到点 P′。求 P′ 的坐标，并说明理由。</a:t>
+            </a:r>
+            <a:pPr indent="0" marL="0">
+              <a:lnSpc>
+                <a:spcPct val="110000"/>
+              </a:lnSpc>
+              <a:buNone/>
+            </a:pPr>
+            <a:r>
+              <a:rPr lang="en-US" sz="1150" dirty="0">
+                <a:solidFill>
+                  <a:srgbClr val="6E7B85"/>
+                </a:solidFill>
+                <a:latin typeface="Microsoft YaHei" pitchFamily="34" charset="0"/>
+                <a:ea typeface="Microsoft YaHei" pitchFamily="34" charset="-122"/>
+                <a:cs typeface="Microsoft YaHei" pitchFamily="34" charset="-120"/>
+              </a:rPr>
+              <a:t>　提示：绕原点旋转 180° 等价于关于原点中心对称——坐标怎么变？再用中点公式验证。</a:t>
+            </a:r>
+            <a:endParaRPr lang="en-US" sz="1250" dirty="0"/>
+          </a:p>
+        </p:txBody>
+      </p:sp>
+      <p:sp>
+        <p:nvSpPr>
+          <p:cNvPr id="11" name="Shape 9"/>
           <p:cNvSpPr/>
           <p:nvPr/>
         </p:nvSpPr>
@@ -42195,7 +45307,7 @@
       </p:sp>
       <p:sp>
         <p:nvSpPr>
-          <p:cNvPr id="8" name="Text 6"/>
+          <p:cNvPr id="12" name="Text 10"/>
           <p:cNvSpPr/>
           <p:nvPr/>
         </p:nvSpPr>
@@ -42234,7 +45346,7 @@
       </p:sp>
       <p:sp>
         <p:nvSpPr>
-          <p:cNvPr id="9" name="Text 7"/>
+          <p:cNvPr id="13" name="Text 11"/>
           <p:cNvSpPr/>
           <p:nvPr/>
         </p:nvSpPr>
@@ -42491,11 +45603,11 @@
         <p:spPr>
           <a:xfrm>
             <a:off x="609905" y="2535174"/>
-            <a:ext cx="7818120" cy="2523744"/>
+            <a:ext cx="7818120" cy="3330702"/>
           </a:xfrm>
           <a:prstGeom prst="roundRect">
             <a:avLst>
-              <a:gd name="adj" fmla="val 2174"/>
+              <a:gd name="adj" fmla="val 1647"/>
             </a:avLst>
           </a:prstGeom>
           <a:solidFill>
@@ -42520,7 +45632,7 @@
         <p:spPr>
           <a:xfrm>
             <a:off x="865937" y="2681478"/>
-            <a:ext cx="7315200" cy="2249424"/>
+            <a:ext cx="7315200" cy="3056382"/>
           </a:xfrm>
           <a:prstGeom prst="rect">
             <a:avLst/>
@@ -42550,7 +45662,7 @@
                 <a:ea typeface="Microsoft YaHei" pitchFamily="34" charset="-122"/>
                 <a:cs typeface="Microsoft YaHei" pitchFamily="34" charset="-120"/>
               </a:rPr>
-              <a:t>引入垂径定理：垂直于弦的直径平分弦，并且平分弦所对的两条弧。推导依据是圆的轴对称性——任何过圆心的直线都是对称轴。使用模型固定为“半径、弦心距、半弦”构成的直角三角形：过圆心作弦的垂线，得半弦=弦长的一半，再用勾股定理。两个条件（垂直、过圆心）缺一不可，随意连线就失去定理资格。</a:t>
+              <a:t>开场设问：圆的半径 5，一条弦长 8，圆心到这条弦的距离是多少？不许量，要“算”出来。学生尝试连半径、作垂线后自然构造出直角三角形——垂径定理的模型就从这道题里长出来。再追问“半径、弦心距、半弦三者的关系是什么”，勾股定理顺势登台。</a:t>
             </a:r>
             <a:endParaRPr lang="en-US" sz="1350" dirty="0"/>
           </a:p>
@@ -42573,7 +45685,30 @@
                 <a:ea typeface="Microsoft YaHei" pitchFamily="34" charset="-122"/>
                 <a:cs typeface="Microsoft YaHei" pitchFamily="34" charset="-120"/>
               </a:rPr>
-              <a:t>直线与圆的位置关系用 d 与 r 比大小判定：d＞r 相离、d=r 相切（唯一公共点叫切点）、d＜r 相交。切线的判定两条路：已知“过半径外端”就证垂直（连半径证垂直），已知“垂直”就证过半径外端（作垂直证半径）——方向取决于题目给了哪个条件。误区：垂径定理只记“平分弦”忘了前提是直径垂直于弦；把弦心距直接当半径用。</a:t>
+              <a:t>本体：垂径定理——垂直于弦的直径平分弦，并且平分弦所对的两条弧；推导依据是圆的轴对称性（任何过圆心的直线都是对称轴）。固定模型：过圆心作弦的垂线，得“半径、弦心距、半弦”构成的直角三角形，勾股相连，任知其二可求第三。直线与圆的位置关系用 d 与 r 比较：d＞r 相离、d=r 相切、d＜r 相交。</a:t>
+            </a:r>
+            <a:endParaRPr lang="en-US" sz="1350" dirty="0"/>
+          </a:p>
+          <a:p>
+            <a:pPr indent="0" marL="0">
+              <a:lnSpc>
+                <a:spcPct val="130000"/>
+              </a:lnSpc>
+              <a:spcAft>
+                <a:spcPts val="1000"/>
+              </a:spcAft>
+              <a:buNone/>
+            </a:pPr>
+            <a:r>
+              <a:rPr lang="en-US" sz="1350" dirty="0">
+                <a:solidFill>
+                  <a:srgbClr val="202D37"/>
+                </a:solidFill>
+                <a:latin typeface="Microsoft YaHei" pitchFamily="34" charset="0"/>
+                <a:ea typeface="Microsoft YaHei" pitchFamily="34" charset="-122"/>
+                <a:cs typeface="Microsoft YaHei" pitchFamily="34" charset="-120"/>
+              </a:rPr>
+              <a:t>高频误区：垂径定理漏用条件——必须“垂直”且“过圆心”，缺一不可，随意连线不享有定理；把弦心距当半径直接用。适用边界：求弦长时先取半弦（弦长除以 2）再进勾股；切线证明两条路——已知“过半径外端”就证垂直、已知“垂直”就证过半径外端，按题目已有条件选路，不能两头都假设。</a:t>
             </a:r>
             <a:endParaRPr lang="en-US" sz="1350" dirty="0"/>
           </a:p>
@@ -43650,11 +46785,11 @@
         <p:spPr>
           <a:xfrm>
             <a:off x="609905" y="1748790"/>
-            <a:ext cx="10971886" cy="1234440"/>
+            <a:ext cx="10971886" cy="1147801"/>
           </a:xfrm>
           <a:prstGeom prst="roundRect">
             <a:avLst>
-              <a:gd name="adj" fmla="val 4444"/>
+              <a:gd name="adj" fmla="val 4780"/>
             </a:avLst>
           </a:prstGeom>
           <a:solidFill>
@@ -43679,7 +46814,7 @@
         <p:spPr>
           <a:xfrm>
             <a:off x="829361" y="1840230"/>
-            <a:ext cx="10532974" cy="1051560"/>
+            <a:ext cx="10532974" cy="964921"/>
           </a:xfrm>
           <a:prstGeom prst="rect">
             <a:avLst/>
@@ -43732,6 +46867,192 @@
       <p:sp>
         <p:nvSpPr>
           <p:cNvPr id="7" name="Shape 5"/>
+          <p:cNvSpPr/>
+          <p:nvPr/>
+        </p:nvSpPr>
+        <p:spPr>
+          <a:xfrm>
+            <a:off x="609905" y="3042895"/>
+            <a:ext cx="10971886" cy="1147801"/>
+          </a:xfrm>
+          <a:prstGeom prst="roundRect">
+            <a:avLst>
+              <a:gd name="adj" fmla="val 4780"/>
+            </a:avLst>
+          </a:prstGeom>
+          <a:solidFill>
+            <a:srgbClr val="FFFFFF"/>
+          </a:solidFill>
+          <a:ln/>
+          <a:effectLst>
+            <a:outerShdw sx="100000" sy="100000" kx="0" ky="0" algn="bl" rotWithShape="0" blurRad="88900" dist="25400" dir="3600000">
+              <a:srgbClr val="3A3A32">
+                <a:alpha val="16000"/>
+              </a:srgbClr>
+            </a:outerShdw>
+          </a:effectLst>
+        </p:spPr>
+      </p:sp>
+      <p:sp>
+        <p:nvSpPr>
+          <p:cNvPr id="8" name="Text 6"/>
+          <p:cNvSpPr/>
+          <p:nvPr/>
+        </p:nvSpPr>
+        <p:spPr>
+          <a:xfrm>
+            <a:off x="829361" y="3134335"/>
+            <a:ext cx="10532974" cy="964921"/>
+          </a:xfrm>
+          <a:prstGeom prst="rect">
+            <a:avLst/>
+          </a:prstGeom>
+          <a:noFill/>
+          <a:ln/>
+        </p:spPr>
+        <p:txBody>
+          <a:bodyPr wrap="square" lIns="0" tIns="0" rIns="0" bIns="0" rtlCol="0" anchor="ctr"/>
+          <a:lstStyle/>
+          <a:p>
+            <a:pPr indent="0" marL="0">
+              <a:lnSpc>
+                <a:spcPct val="115000"/>
+              </a:lnSpc>
+              <a:buNone/>
+            </a:pPr>
+            <a:r>
+              <a:rPr lang="en-US" sz="1350" b="1" dirty="0">
+                <a:solidFill>
+                  <a:srgbClr val="285C94"/>
+                </a:solidFill>
+                <a:latin typeface="Microsoft YaHei" pitchFamily="34" charset="0"/>
+                <a:ea typeface="Microsoft YaHei" pitchFamily="34" charset="-122"/>
+                <a:cs typeface="Microsoft YaHei" pitchFamily="34" charset="-120"/>
+              </a:rPr>
+              <a:t>练习 2　</a:t>
+            </a:r>
+            <a:pPr indent="0" marL="0">
+              <a:lnSpc>
+                <a:spcPct val="115000"/>
+              </a:lnSpc>
+              <a:buNone/>
+            </a:pPr>
+            <a:r>
+              <a:rPr lang="en-US" sz="1400" dirty="0">
+                <a:solidFill>
+                  <a:srgbClr val="202D37"/>
+                </a:solidFill>
+                <a:latin typeface="Microsoft YaHei" pitchFamily="34" charset="0"/>
+                <a:ea typeface="Microsoft YaHei" pitchFamily="34" charset="-122"/>
+                <a:cs typeface="Microsoft YaHei" pitchFamily="34" charset="-120"/>
+              </a:rPr>
+              <a:t>⊙O 的半径为 13，OD⊥AB，垂足为 D，且 OD=5。求弦 AB 的长。</a:t>
+            </a:r>
+            <a:endParaRPr lang="en-US" sz="1350" dirty="0"/>
+          </a:p>
+        </p:txBody>
+      </p:sp>
+      <p:sp>
+        <p:nvSpPr>
+          <p:cNvPr id="9" name="Shape 7"/>
+          <p:cNvSpPr/>
+          <p:nvPr/>
+        </p:nvSpPr>
+        <p:spPr>
+          <a:xfrm>
+            <a:off x="609905" y="4949647"/>
+            <a:ext cx="10971886" cy="585216"/>
+          </a:xfrm>
+          <a:prstGeom prst="roundRect">
+            <a:avLst>
+              <a:gd name="adj" fmla="val 7813"/>
+            </a:avLst>
+          </a:prstGeom>
+          <a:solidFill>
+            <a:srgbClr val="F2E3DC"/>
+          </a:solidFill>
+          <a:ln/>
+        </p:spPr>
+      </p:sp>
+      <p:sp>
+        <p:nvSpPr>
+          <p:cNvPr id="10" name="Text 8"/>
+          <p:cNvSpPr/>
+          <p:nvPr/>
+        </p:nvSpPr>
+        <p:spPr>
+          <a:xfrm>
+            <a:off x="811073" y="5004511"/>
+            <a:ext cx="10569550" cy="493776"/>
+          </a:xfrm>
+          <a:prstGeom prst="rect">
+            <a:avLst/>
+          </a:prstGeom>
+          <a:noFill/>
+          <a:ln/>
+        </p:spPr>
+        <p:txBody>
+          <a:bodyPr wrap="square" lIns="0" tIns="0" rIns="0" bIns="0" rtlCol="0" anchor="ctr"/>
+          <a:lstStyle/>
+          <a:p>
+            <a:pPr indent="0" marL="0">
+              <a:lnSpc>
+                <a:spcPct val="110000"/>
+              </a:lnSpc>
+              <a:buNone/>
+            </a:pPr>
+            <a:r>
+              <a:rPr lang="en-US" sz="1250" b="1" dirty="0">
+                <a:solidFill>
+                  <a:srgbClr val="B45F47"/>
+                </a:solidFill>
+                <a:latin typeface="Microsoft YaHei" pitchFamily="34" charset="0"/>
+                <a:ea typeface="Microsoft YaHei" pitchFamily="34" charset="-122"/>
+                <a:cs typeface="Microsoft YaHei" pitchFamily="34" charset="-120"/>
+              </a:rPr>
+              <a:t>变式挑战（选做）　</a:t>
+            </a:r>
+            <a:pPr indent="0" marL="0">
+              <a:lnSpc>
+                <a:spcPct val="110000"/>
+              </a:lnSpc>
+              <a:buNone/>
+            </a:pPr>
+            <a:r>
+              <a:rPr lang="en-US" sz="1250" dirty="0">
+                <a:solidFill>
+                  <a:srgbClr val="202D37"/>
+                </a:solidFill>
+                <a:latin typeface="Microsoft YaHei" pitchFamily="34" charset="0"/>
+                <a:ea typeface="Microsoft YaHei" pitchFamily="34" charset="-122"/>
+                <a:cs typeface="Microsoft YaHei" pitchFamily="34" charset="-120"/>
+              </a:rPr>
+              <a:t>⊙O 的半径为 10，弦 AB=16。求圆心 O 到弦 AB 的距离。</a:t>
+            </a:r>
+            <a:pPr indent="0" marL="0">
+              <a:lnSpc>
+                <a:spcPct val="110000"/>
+              </a:lnSpc>
+              <a:buNone/>
+            </a:pPr>
+            <a:r>
+              <a:rPr lang="en-US" sz="1150" dirty="0">
+                <a:solidFill>
+                  <a:srgbClr val="6E7B85"/>
+                </a:solidFill>
+                <a:latin typeface="Microsoft YaHei" pitchFamily="34" charset="0"/>
+                <a:ea typeface="Microsoft YaHei" pitchFamily="34" charset="-122"/>
+                <a:cs typeface="Microsoft YaHei" pitchFamily="34" charset="-120"/>
+              </a:rPr>
+              <a:t>　提示：过 O 作 AB 的垂线段 OD：先由垂径定理得 AD，再在直角三角形里用勾股定理。</a:t>
+            </a:r>
+            <a:endParaRPr lang="en-US" sz="1250" dirty="0"/>
+          </a:p>
+        </p:txBody>
+      </p:sp>
+      <p:sp>
+        <p:nvSpPr>
+          <p:cNvPr id="11" name="Shape 9"/>
           <p:cNvSpPr/>
           <p:nvPr/>
         </p:nvSpPr>
@@ -43753,7 +47074,7 @@
       </p:sp>
       <p:sp>
         <p:nvSpPr>
-          <p:cNvPr id="8" name="Text 6"/>
+          <p:cNvPr id="12" name="Text 10"/>
           <p:cNvSpPr/>
           <p:nvPr/>
         </p:nvSpPr>
@@ -43792,7 +47113,7 @@
       </p:sp>
       <p:sp>
         <p:nvSpPr>
-          <p:cNvPr id="9" name="Text 7"/>
+          <p:cNvPr id="13" name="Text 11"/>
           <p:cNvSpPr/>
           <p:nvPr/>
         </p:nvSpPr>
@@ -45289,11 +48610,11 @@
         <p:spPr>
           <a:xfrm>
             <a:off x="609905" y="2535174"/>
-            <a:ext cx="7818120" cy="2750058"/>
+            <a:ext cx="7818120" cy="3548329"/>
           </a:xfrm>
           <a:prstGeom prst="roundRect">
             <a:avLst>
-              <a:gd name="adj" fmla="val 1995"/>
+              <a:gd name="adj" fmla="val 1546"/>
             </a:avLst>
           </a:prstGeom>
           <a:solidFill>
@@ -45318,7 +48639,7 @@
         <p:spPr>
           <a:xfrm>
             <a:off x="865937" y="2681478"/>
-            <a:ext cx="7315200" cy="2475738"/>
+            <a:ext cx="7315200" cy="3274009"/>
           </a:xfrm>
           <a:prstGeom prst="rect">
             <a:avLst/>
@@ -45348,7 +48669,7 @@
                 <a:ea typeface="Microsoft YaHei" pitchFamily="34" charset="-122"/>
                 <a:cs typeface="Microsoft YaHei" pitchFamily="34" charset="-120"/>
               </a:rPr>
-              <a:t>引入相似三角形的判定：平行于三角形一边的直线截其他两边，所得三角形与原三角形相似——由此派生出两个基本图形：A 字型（小三角形嵌在大三角形顶部）与 8 字型（两三角形顶点相对），识别时先找平行线再找公共角。对应关系按“长对长、短对短”定，不能凭位置猜。相似比为对应边的比，书写时统一“前比后”顺序。</a:t>
+              <a:t>开场把一张照片等比放大：形状没变、大小变了——放大前后的两张图是什么关系？再追问：边长按 1:2 放大，面积翻一倍还是翻四倍？多数人猜错，本节就用“平方”解开这个谜。先在标准图中热身找 A 字型与 8 字型，熟悉基本图形再谈计算。</a:t>
             </a:r>
             <a:endParaRPr lang="en-US" sz="1350" dirty="0"/>
           </a:p>
@@ -45371,7 +48692,30 @@
                 <a:ea typeface="Microsoft YaHei" pitchFamily="34" charset="-122"/>
                 <a:cs typeface="Microsoft YaHei" pitchFamily="34" charset="-120"/>
               </a:rPr>
-              <a:t>两个核心性质：对应角相等、对应边成比例之外，周长比等于相似比，面积比等于相似比的平方——推导：面积=底×高，底与高各按相似比缩放，乘起来就是比的平方。这是计算题最大失分点：面积不能按相似比一次方算。位似是特殊的相似：对应点连线交于位似中心，坐标变化乘位似比 k（k 可正可负，负号表示反向）。常见误区：A 字、8 字图形里用错对应边；面积比开方与平方混用。</a:t>
+              <a:t>本体：平行于三角形一边的直线截其他两边，所得三角形与原三角形相似——派生 A 字型（小三角形嵌在顶部）与 8 字型（两三角形顶点相对）两个基本图形，识别先找平行线与公共角。相似比为对应边的比；性质：对应角相等、对应边成比例，周长比等于相似比，面积比等于相似比的平方——面积=底×高，底与高各按相似比缩放，乘起来就是比的平方。位似是特殊的相似，坐标乘位似比 k（k 可负）。</a:t>
+            </a:r>
+            <a:endParaRPr lang="en-US" sz="1350" dirty="0"/>
+          </a:p>
+          <a:p>
+            <a:pPr indent="0" marL="0">
+              <a:lnSpc>
+                <a:spcPct val="130000"/>
+              </a:lnSpc>
+              <a:spcAft>
+                <a:spcPts val="1000"/>
+              </a:spcAft>
+              <a:buNone/>
+            </a:pPr>
+            <a:r>
+              <a:rPr lang="en-US" sz="1350" dirty="0">
+                <a:solidFill>
+                  <a:srgbClr val="202D37"/>
+                </a:solidFill>
+                <a:latin typeface="Microsoft YaHei" pitchFamily="34" charset="0"/>
+                <a:ea typeface="Microsoft YaHei" pitchFamily="34" charset="-122"/>
+                <a:cs typeface="Microsoft YaHei" pitchFamily="34" charset="-120"/>
+              </a:rPr>
+              <a:t>高频误区：面积比开方与平方混用——这是最大失分点，记“面积比要平方，由面积比反求相似比要开方”；A 字、8 字图中对应边找错。适用边界：相似比书写统一“前比后”，对应关系按“长对长、短对短”确定；位似比 k＜0 表示反向位似，横纵坐标都要变号，不能只乘绝对值。</a:t>
             </a:r>
             <a:endParaRPr lang="en-US" sz="1350" dirty="0"/>
           </a:p>
@@ -46741,11 +50085,11 @@
         <p:spPr>
           <a:xfrm>
             <a:off x="609905" y="1748790"/>
-            <a:ext cx="10971886" cy="1234440"/>
+            <a:ext cx="10971886" cy="1147801"/>
           </a:xfrm>
           <a:prstGeom prst="roundRect">
             <a:avLst>
-              <a:gd name="adj" fmla="val 4444"/>
+              <a:gd name="adj" fmla="val 4780"/>
             </a:avLst>
           </a:prstGeom>
           <a:solidFill>
@@ -46770,7 +50114,7 @@
         <p:spPr>
           <a:xfrm>
             <a:off x="829361" y="1840230"/>
-            <a:ext cx="10532974" cy="1051560"/>
+            <a:ext cx="10532974" cy="964921"/>
           </a:xfrm>
           <a:prstGeom prst="rect">
             <a:avLst/>
@@ -46823,6 +50167,192 @@
       <p:sp>
         <p:nvSpPr>
           <p:cNvPr id="7" name="Shape 5"/>
+          <p:cNvSpPr/>
+          <p:nvPr/>
+        </p:nvSpPr>
+        <p:spPr>
+          <a:xfrm>
+            <a:off x="609905" y="3042895"/>
+            <a:ext cx="10971886" cy="1147801"/>
+          </a:xfrm>
+          <a:prstGeom prst="roundRect">
+            <a:avLst>
+              <a:gd name="adj" fmla="val 4780"/>
+            </a:avLst>
+          </a:prstGeom>
+          <a:solidFill>
+            <a:srgbClr val="FFFFFF"/>
+          </a:solidFill>
+          <a:ln/>
+          <a:effectLst>
+            <a:outerShdw sx="100000" sy="100000" kx="0" ky="0" algn="bl" rotWithShape="0" blurRad="88900" dist="25400" dir="3600000">
+              <a:srgbClr val="3A3A32">
+                <a:alpha val="16000"/>
+              </a:srgbClr>
+            </a:outerShdw>
+          </a:effectLst>
+        </p:spPr>
+      </p:sp>
+      <p:sp>
+        <p:nvSpPr>
+          <p:cNvPr id="8" name="Text 6"/>
+          <p:cNvSpPr/>
+          <p:nvPr/>
+        </p:nvSpPr>
+        <p:spPr>
+          <a:xfrm>
+            <a:off x="829361" y="3134335"/>
+            <a:ext cx="10532974" cy="964921"/>
+          </a:xfrm>
+          <a:prstGeom prst="rect">
+            <a:avLst/>
+          </a:prstGeom>
+          <a:noFill/>
+          <a:ln/>
+        </p:spPr>
+        <p:txBody>
+          <a:bodyPr wrap="square" lIns="0" tIns="0" rIns="0" bIns="0" rtlCol="0" anchor="ctr"/>
+          <a:lstStyle/>
+          <a:p>
+            <a:pPr indent="0" marL="0">
+              <a:lnSpc>
+                <a:spcPct val="115000"/>
+              </a:lnSpc>
+              <a:buNone/>
+            </a:pPr>
+            <a:r>
+              <a:rPr lang="en-US" sz="1350" b="1" dirty="0">
+                <a:solidFill>
+                  <a:srgbClr val="285C94"/>
+                </a:solidFill>
+                <a:latin typeface="Microsoft YaHei" pitchFamily="34" charset="0"/>
+                <a:ea typeface="Microsoft YaHei" pitchFamily="34" charset="-122"/>
+                <a:cs typeface="Microsoft YaHei" pitchFamily="34" charset="-120"/>
+              </a:rPr>
+              <a:t>练习 2　</a:t>
+            </a:r>
+            <a:pPr indent="0" marL="0">
+              <a:lnSpc>
+                <a:spcPct val="115000"/>
+              </a:lnSpc>
+              <a:buNone/>
+            </a:pPr>
+            <a:r>
+              <a:rPr lang="en-US" sz="1400" dirty="0">
+                <a:solidFill>
+                  <a:srgbClr val="202D37"/>
+                </a:solidFill>
+                <a:latin typeface="Microsoft YaHei" pitchFamily="34" charset="0"/>
+                <a:ea typeface="Microsoft YaHei" pitchFamily="34" charset="-122"/>
+                <a:cs typeface="Microsoft YaHei" pitchFamily="34" charset="-120"/>
+              </a:rPr>
+              <a:t>△ABC 中，DE∥BC，AD=2，DB=3，AE=1.6。求 EC 的长。</a:t>
+            </a:r>
+            <a:endParaRPr lang="en-US" sz="1350" dirty="0"/>
+          </a:p>
+        </p:txBody>
+      </p:sp>
+      <p:sp>
+        <p:nvSpPr>
+          <p:cNvPr id="9" name="Shape 7"/>
+          <p:cNvSpPr/>
+          <p:nvPr/>
+        </p:nvSpPr>
+        <p:spPr>
+          <a:xfrm>
+            <a:off x="609905" y="4949647"/>
+            <a:ext cx="10971886" cy="585216"/>
+          </a:xfrm>
+          <a:prstGeom prst="roundRect">
+            <a:avLst>
+              <a:gd name="adj" fmla="val 7813"/>
+            </a:avLst>
+          </a:prstGeom>
+          <a:solidFill>
+            <a:srgbClr val="F2E3DC"/>
+          </a:solidFill>
+          <a:ln/>
+        </p:spPr>
+      </p:sp>
+      <p:sp>
+        <p:nvSpPr>
+          <p:cNvPr id="10" name="Text 8"/>
+          <p:cNvSpPr/>
+          <p:nvPr/>
+        </p:nvSpPr>
+        <p:spPr>
+          <a:xfrm>
+            <a:off x="811073" y="5004511"/>
+            <a:ext cx="10569550" cy="493776"/>
+          </a:xfrm>
+          <a:prstGeom prst="rect">
+            <a:avLst/>
+          </a:prstGeom>
+          <a:noFill/>
+          <a:ln/>
+        </p:spPr>
+        <p:txBody>
+          <a:bodyPr wrap="square" lIns="0" tIns="0" rIns="0" bIns="0" rtlCol="0" anchor="ctr"/>
+          <a:lstStyle/>
+          <a:p>
+            <a:pPr indent="0" marL="0">
+              <a:lnSpc>
+                <a:spcPct val="110000"/>
+              </a:lnSpc>
+              <a:buNone/>
+            </a:pPr>
+            <a:r>
+              <a:rPr lang="en-US" sz="1250" b="1" dirty="0">
+                <a:solidFill>
+                  <a:srgbClr val="B45F47"/>
+                </a:solidFill>
+                <a:latin typeface="Microsoft YaHei" pitchFamily="34" charset="0"/>
+                <a:ea typeface="Microsoft YaHei" pitchFamily="34" charset="-122"/>
+                <a:cs typeface="Microsoft YaHei" pitchFamily="34" charset="-120"/>
+              </a:rPr>
+              <a:t>变式挑战（选做）　</a:t>
+            </a:r>
+            <a:pPr indent="0" marL="0">
+              <a:lnSpc>
+                <a:spcPct val="110000"/>
+              </a:lnSpc>
+              <a:buNone/>
+            </a:pPr>
+            <a:r>
+              <a:rPr lang="en-US" sz="1250" dirty="0">
+                <a:solidFill>
+                  <a:srgbClr val="202D37"/>
+                </a:solidFill>
+                <a:latin typeface="Microsoft YaHei" pitchFamily="34" charset="0"/>
+                <a:ea typeface="Microsoft YaHei" pitchFamily="34" charset="-122"/>
+                <a:cs typeface="Microsoft YaHei" pitchFamily="34" charset="-120"/>
+              </a:rPr>
+              <a:t>两个相似三角形的相似比为 3 : 4，其中较小三角形的面积为 18。求较大三角形的面积。</a:t>
+            </a:r>
+            <a:pPr indent="0" marL="0">
+              <a:lnSpc>
+                <a:spcPct val="110000"/>
+              </a:lnSpc>
+              <a:buNone/>
+            </a:pPr>
+            <a:r>
+              <a:rPr lang="en-US" sz="1150" dirty="0">
+                <a:solidFill>
+                  <a:srgbClr val="6E7B85"/>
+                </a:solidFill>
+                <a:latin typeface="Microsoft YaHei" pitchFamily="34" charset="0"/>
+                <a:ea typeface="Microsoft YaHei" pitchFamily="34" charset="-122"/>
+                <a:cs typeface="Microsoft YaHei" pitchFamily="34" charset="-120"/>
+              </a:rPr>
+              <a:t>　提示：面积比是相似比的平方 9 : 16，不是 3 : 4；设大面积列比例式求解。</a:t>
+            </a:r>
+            <a:endParaRPr lang="en-US" sz="1250" dirty="0"/>
+          </a:p>
+        </p:txBody>
+      </p:sp>
+      <p:sp>
+        <p:nvSpPr>
+          <p:cNvPr id="11" name="Shape 9"/>
           <p:cNvSpPr/>
           <p:nvPr/>
         </p:nvSpPr>
@@ -46844,7 +50374,7 @@
       </p:sp>
       <p:sp>
         <p:nvSpPr>
-          <p:cNvPr id="8" name="Text 6"/>
+          <p:cNvPr id="12" name="Text 10"/>
           <p:cNvSpPr/>
           <p:nvPr/>
         </p:nvSpPr>
@@ -46883,7 +50413,7 @@
       </p:sp>
       <p:sp>
         <p:nvSpPr>
-          <p:cNvPr id="9" name="Text 7"/>
+          <p:cNvPr id="13" name="Text 11"/>
           <p:cNvSpPr/>
           <p:nvPr/>
         </p:nvSpPr>
@@ -47433,11 +50963,11 @@
         <p:spPr>
           <a:xfrm>
             <a:off x="609905" y="2535174"/>
-            <a:ext cx="7818120" cy="2976372"/>
+            <a:ext cx="7818120" cy="3330702"/>
           </a:xfrm>
           <a:prstGeom prst="roundRect">
             <a:avLst>
-              <a:gd name="adj" fmla="val 1843"/>
+              <a:gd name="adj" fmla="val 1647"/>
             </a:avLst>
           </a:prstGeom>
           <a:solidFill>
@@ -47462,7 +50992,7 @@
         <p:spPr>
           <a:xfrm>
             <a:off x="865937" y="2681478"/>
-            <a:ext cx="7315200" cy="2702052"/>
+            <a:ext cx="7315200" cy="3056382"/>
           </a:xfrm>
           <a:prstGeom prst="rect">
             <a:avLst/>
@@ -47492,7 +51022,7 @@
                 <a:ea typeface="Microsoft YaHei" pitchFamily="34" charset="-122"/>
                 <a:cs typeface="Microsoft YaHei" pitchFamily="34" charset="-120"/>
               </a:rPr>
-              <a:t>引入：在直角三角形中，锐角三角函数定义为三边之比：sin A=对边/斜边，cos A=邻边/斜边，tan A=对边/邻边——定义只与角的大小有关，与三角形大小无关（推导：相似三角形对应边成比例）。特殊角数值必须记牢：sin30°=1/2、tan30°=√3/3、sin45°=cos45°=√2/2、tan45°=1、sin60°=√3/2、tan60°=√3。sin 与 cos 是高频混淆点，抓“对边”还是“邻边”逐一核对。</a:t>
+              <a:t>开场抛任务：站在操场离旗杆 30 m，用量角器测得仰角 30°——不爬上去，旗杆高度能算出来吗？先让学生猜“除了角度还得量什么”。再在直角三角形上标出对边、邻边、斜边，三比定义登场，旗杆问题就变成“已知邻边求对边，选哪个函数”的选择题。</a:t>
             </a:r>
             <a:endParaRPr lang="en-US" sz="1350" dirty="0"/>
           </a:p>
@@ -47515,7 +51045,30 @@
                 <a:ea typeface="Microsoft YaHei" pitchFamily="34" charset="-122"/>
                 <a:cs typeface="Microsoft YaHei" pitchFamily="34" charset="-120"/>
               </a:rPr>
-              <a:t>解直角三角形应用题画图四步：①画示意图，把实际问题抽象成直角三角形（楼底、地面、视线）；②标已知量与仰角（仰角是视线在水平线上方、从水平线向上量）；③选函数——已知邻边求对边用 tan，已知斜边用 sin；④代入计算并按实际取近似、写单位。误区：仰角从竖直方向量起（错）；结果不带单位或不取近似。</a:t>
+              <a:t>本体：在直角三角形中，sin A=对边/斜边，cos A=邻边/斜边，tan A=对边/邻边；由相似三角形对应边成比例可知，定义只与角的大小有关、与三角形大小无关。特殊角值记牢：sin30°=1/2、tan30°=√3/3、sin45°=cos45°=√2/2、tan45°=1、sin60°=√3/2、tan60°=√3。应用题四步：画图、标角与边、选函数、算结果带单位。</a:t>
+            </a:r>
+            <a:endParaRPr lang="en-US" sz="1350" dirty="0"/>
+          </a:p>
+          <a:p>
+            <a:pPr indent="0" marL="0">
+              <a:lnSpc>
+                <a:spcPct val="130000"/>
+              </a:lnSpc>
+              <a:spcAft>
+                <a:spcPts val="1000"/>
+              </a:spcAft>
+              <a:buNone/>
+            </a:pPr>
+            <a:r>
+              <a:rPr lang="en-US" sz="1350" dirty="0">
+                <a:solidFill>
+                  <a:srgbClr val="202D37"/>
+                </a:solidFill>
+                <a:latin typeface="Microsoft YaHei" pitchFamily="34" charset="0"/>
+                <a:ea typeface="Microsoft YaHei" pitchFamily="34" charset="-122"/>
+                <a:cs typeface="Microsoft YaHei" pitchFamily="34" charset="-120"/>
+              </a:rPr>
+              <a:t>高频误区：sin 与 cos 记混——每一步都问“要的是对边还是邻边”；仰角从竖直方向量起（错，仰角从水平线向上量到视线）。适用边界：三角函数只在直角三角形中定义，斜三角形要先构造直角三角形再解；结果按题意取近似并带单位，实际测量问题必须有完整答句。</a:t>
             </a:r>
             <a:endParaRPr lang="en-US" sz="1350" dirty="0"/>
           </a:p>
@@ -48592,11 +52145,11 @@
         <p:spPr>
           <a:xfrm>
             <a:off x="609905" y="1748790"/>
-            <a:ext cx="10971886" cy="1234440"/>
+            <a:ext cx="10971886" cy="1147801"/>
           </a:xfrm>
           <a:prstGeom prst="roundRect">
             <a:avLst>
-              <a:gd name="adj" fmla="val 4444"/>
+              <a:gd name="adj" fmla="val 4780"/>
             </a:avLst>
           </a:prstGeom>
           <a:solidFill>
@@ -48621,7 +52174,7 @@
         <p:spPr>
           <a:xfrm>
             <a:off x="829361" y="1840230"/>
-            <a:ext cx="10532974" cy="1051560"/>
+            <a:ext cx="10532974" cy="964921"/>
           </a:xfrm>
           <a:prstGeom prst="rect">
             <a:avLst/>
@@ -48674,6 +52227,192 @@
       <p:sp>
         <p:nvSpPr>
           <p:cNvPr id="7" name="Shape 5"/>
+          <p:cNvSpPr/>
+          <p:nvPr/>
+        </p:nvSpPr>
+        <p:spPr>
+          <a:xfrm>
+            <a:off x="609905" y="3042895"/>
+            <a:ext cx="10971886" cy="1147801"/>
+          </a:xfrm>
+          <a:prstGeom prst="roundRect">
+            <a:avLst>
+              <a:gd name="adj" fmla="val 4780"/>
+            </a:avLst>
+          </a:prstGeom>
+          <a:solidFill>
+            <a:srgbClr val="FFFFFF"/>
+          </a:solidFill>
+          <a:ln/>
+          <a:effectLst>
+            <a:outerShdw sx="100000" sy="100000" kx="0" ky="0" algn="bl" rotWithShape="0" blurRad="88900" dist="25400" dir="3600000">
+              <a:srgbClr val="3A3A32">
+                <a:alpha val="16000"/>
+              </a:srgbClr>
+            </a:outerShdw>
+          </a:effectLst>
+        </p:spPr>
+      </p:sp>
+      <p:sp>
+        <p:nvSpPr>
+          <p:cNvPr id="8" name="Text 6"/>
+          <p:cNvSpPr/>
+          <p:nvPr/>
+        </p:nvSpPr>
+        <p:spPr>
+          <a:xfrm>
+            <a:off x="829361" y="3134335"/>
+            <a:ext cx="10532974" cy="964921"/>
+          </a:xfrm>
+          <a:prstGeom prst="rect">
+            <a:avLst/>
+          </a:prstGeom>
+          <a:noFill/>
+          <a:ln/>
+        </p:spPr>
+        <p:txBody>
+          <a:bodyPr wrap="square" lIns="0" tIns="0" rIns="0" bIns="0" rtlCol="0" anchor="ctr"/>
+          <a:lstStyle/>
+          <a:p>
+            <a:pPr indent="0" marL="0">
+              <a:lnSpc>
+                <a:spcPct val="115000"/>
+              </a:lnSpc>
+              <a:buNone/>
+            </a:pPr>
+            <a:r>
+              <a:rPr lang="en-US" sz="1350" b="1" dirty="0">
+                <a:solidFill>
+                  <a:srgbClr val="285C94"/>
+                </a:solidFill>
+                <a:latin typeface="Microsoft YaHei" pitchFamily="34" charset="0"/>
+                <a:ea typeface="Microsoft YaHei" pitchFamily="34" charset="-122"/>
+                <a:cs typeface="Microsoft YaHei" pitchFamily="34" charset="-120"/>
+              </a:rPr>
+              <a:t>练习 2　</a:t>
+            </a:r>
+            <a:pPr indent="0" marL="0">
+              <a:lnSpc>
+                <a:spcPct val="115000"/>
+              </a:lnSpc>
+              <a:buNone/>
+            </a:pPr>
+            <a:r>
+              <a:rPr lang="en-US" sz="1400" dirty="0">
+                <a:solidFill>
+                  <a:srgbClr val="202D37"/>
+                </a:solidFill>
+                <a:latin typeface="Microsoft YaHei" pitchFamily="34" charset="0"/>
+                <a:ea typeface="Microsoft YaHei" pitchFamily="34" charset="-122"/>
+                <a:cs typeface="Microsoft YaHei" pitchFamily="34" charset="-120"/>
+              </a:rPr>
+              <a:t>一架长 5 m 的梯子斜靠在竖直墙上，梯脚离墙 3 m。求梯顶离地面的高度，并写出梯子与地面夹角的正弦值和余弦值。</a:t>
+            </a:r>
+            <a:endParaRPr lang="en-US" sz="1350" dirty="0"/>
+          </a:p>
+        </p:txBody>
+      </p:sp>
+      <p:sp>
+        <p:nvSpPr>
+          <p:cNvPr id="9" name="Shape 7"/>
+          <p:cNvSpPr/>
+          <p:nvPr/>
+        </p:nvSpPr>
+        <p:spPr>
+          <a:xfrm>
+            <a:off x="609905" y="4949647"/>
+            <a:ext cx="10971886" cy="585216"/>
+          </a:xfrm>
+          <a:prstGeom prst="roundRect">
+            <a:avLst>
+              <a:gd name="adj" fmla="val 7813"/>
+            </a:avLst>
+          </a:prstGeom>
+          <a:solidFill>
+            <a:srgbClr val="F2E3DC"/>
+          </a:solidFill>
+          <a:ln/>
+        </p:spPr>
+      </p:sp>
+      <p:sp>
+        <p:nvSpPr>
+          <p:cNvPr id="10" name="Text 8"/>
+          <p:cNvSpPr/>
+          <p:nvPr/>
+        </p:nvSpPr>
+        <p:spPr>
+          <a:xfrm>
+            <a:off x="811073" y="5004511"/>
+            <a:ext cx="10569550" cy="493776"/>
+          </a:xfrm>
+          <a:prstGeom prst="rect">
+            <a:avLst/>
+          </a:prstGeom>
+          <a:noFill/>
+          <a:ln/>
+        </p:spPr>
+        <p:txBody>
+          <a:bodyPr wrap="square" lIns="0" tIns="0" rIns="0" bIns="0" rtlCol="0" anchor="ctr"/>
+          <a:lstStyle/>
+          <a:p>
+            <a:pPr indent="0" marL="0">
+              <a:lnSpc>
+                <a:spcPct val="110000"/>
+              </a:lnSpc>
+              <a:buNone/>
+            </a:pPr>
+            <a:r>
+              <a:rPr lang="en-US" sz="1250" b="1" dirty="0">
+                <a:solidFill>
+                  <a:srgbClr val="B45F47"/>
+                </a:solidFill>
+                <a:latin typeface="Microsoft YaHei" pitchFamily="34" charset="0"/>
+                <a:ea typeface="Microsoft YaHei" pitchFamily="34" charset="-122"/>
+                <a:cs typeface="Microsoft YaHei" pitchFamily="34" charset="-120"/>
+              </a:rPr>
+              <a:t>变式挑战（选做）　</a:t>
+            </a:r>
+            <a:pPr indent="0" marL="0">
+              <a:lnSpc>
+                <a:spcPct val="110000"/>
+              </a:lnSpc>
+              <a:buNone/>
+            </a:pPr>
+            <a:r>
+              <a:rPr lang="en-US" sz="1250" dirty="0">
+                <a:solidFill>
+                  <a:srgbClr val="202D37"/>
+                </a:solidFill>
+                <a:latin typeface="Microsoft YaHei" pitchFamily="34" charset="0"/>
+                <a:ea typeface="Microsoft YaHei" pitchFamily="34" charset="-122"/>
+                <a:cs typeface="Microsoft YaHei" pitchFamily="34" charset="-120"/>
+              </a:rPr>
+              <a:t>在地面上一点测得塔顶的仰角为 30°，测点到塔底的水平距离为 60 米。求塔高（结果保留根号，再取近似值精确到 0.1 米）。</a:t>
+            </a:r>
+            <a:pPr indent="0" marL="0">
+              <a:lnSpc>
+                <a:spcPct val="110000"/>
+              </a:lnSpc>
+              <a:buNone/>
+            </a:pPr>
+            <a:r>
+              <a:rPr lang="en-US" sz="1150" dirty="0">
+                <a:solidFill>
+                  <a:srgbClr val="6E7B85"/>
+                </a:solidFill>
+                <a:latin typeface="Microsoft YaHei" pitchFamily="34" charset="0"/>
+                <a:ea typeface="Microsoft YaHei" pitchFamily="34" charset="-122"/>
+                <a:cs typeface="Microsoft YaHei" pitchFamily="34" charset="-120"/>
+              </a:rPr>
+              <a:t>　提示：已知邻边（水平距离）求对边（塔高），选正切；用特殊角值 tan30°=√3/3。</a:t>
+            </a:r>
+            <a:endParaRPr lang="en-US" sz="1250" dirty="0"/>
+          </a:p>
+        </p:txBody>
+      </p:sp>
+      <p:sp>
+        <p:nvSpPr>
+          <p:cNvPr id="11" name="Shape 9"/>
           <p:cNvSpPr/>
           <p:nvPr/>
         </p:nvSpPr>
@@ -48695,7 +52434,7 @@
       </p:sp>
       <p:sp>
         <p:nvSpPr>
-          <p:cNvPr id="8" name="Text 6"/>
+          <p:cNvPr id="12" name="Text 10"/>
           <p:cNvSpPr/>
           <p:nvPr/>
         </p:nvSpPr>
@@ -48734,7 +52473,7 @@
       </p:sp>
       <p:sp>
         <p:nvSpPr>
-          <p:cNvPr id="9" name="Text 7"/>
+          <p:cNvPr id="13" name="Text 11"/>
           <p:cNvSpPr/>
           <p:nvPr/>
         </p:nvSpPr>
@@ -49284,11 +53023,11 @@
         <p:spPr>
           <a:xfrm>
             <a:off x="609905" y="2535174"/>
-            <a:ext cx="7818120" cy="2523744"/>
+            <a:ext cx="7818120" cy="3330702"/>
           </a:xfrm>
           <a:prstGeom prst="roundRect">
             <a:avLst>
-              <a:gd name="adj" fmla="val 2174"/>
+              <a:gd name="adj" fmla="val 1647"/>
             </a:avLst>
           </a:prstGeom>
           <a:solidFill>
@@ -49313,7 +53052,7 @@
         <p:spPr>
           <a:xfrm>
             <a:off x="865937" y="2681478"/>
-            <a:ext cx="7315200" cy="2249424"/>
+            <a:ext cx="7315200" cy="3056382"/>
           </a:xfrm>
           <a:prstGeom prst="rect">
             <a:avLst/>
@@ -49343,7 +53082,7 @@
                 <a:ea typeface="Microsoft YaHei" pitchFamily="34" charset="-122"/>
                 <a:cs typeface="Microsoft YaHei" pitchFamily="34" charset="-120"/>
               </a:rPr>
-              <a:t>引入：等可能事件的概率 P(A)=事件 A 包含的结果数 / 试验的全部等可能结果数，前提是每个结果等可能。树状图是列举的工具：第一层画第一次试验的所有可能，第二层接着画第二次——它的价值在于保证“不重不漏”，漏一种结果概率就错。直接凭直觉“正正、反反、一正一反各三分之一”是错的，因为一正一反其实占两个基本结果。</a:t>
+              <a:t>开场现场投票：“一正一反”和“两个正面”哪个概率大？不少同学凭直觉选“一正一反机会大”或认为两者各三分之一。让学生动手抛 20 次做统计，再用树状图把所有结果排开——直觉的漏洞当场现形，列举的意义从需要变成方法。</a:t>
             </a:r>
             <a:endParaRPr lang="en-US" sz="1350" dirty="0"/>
           </a:p>
@@ -49366,7 +53105,30 @@
                 <a:ea typeface="Microsoft YaHei" pitchFamily="34" charset="-122"/>
                 <a:cs typeface="Microsoft YaHei" pitchFamily="34" charset="-120"/>
               </a:rPr>
-              <a:t>列举完再数：分子是所求事件包含的基本结果数，分母是总数，最后约分。数据分析部分：平均数反映平均水平，方差反映波动大小，公式为各方差与平均数之差的平方的平均（先“离差”再“平方”再“平均”），方差越小越稳定；比较稳定性必须结合语境——选投篮手看稳定性，比增长幅度看平均。误区：把互斥事件当独立事件连乘；方差只比大小不看单位语境。</a:t>
+              <a:t>本体：等可能事件的概率 P(A)=事件 A 包含的结果数÷试验的全部等可能结果数。树状图是列举工具：第一层画第一次试验的所有可能，第二层接着画第二次，价值在于保证“不重不漏”。数据分析：平均数反映平均水平，方差是“离差平方的平均”，方差越小越稳定；比较稳定性必须结合语境。</a:t>
+            </a:r>
+            <a:endParaRPr lang="en-US" sz="1350" dirty="0"/>
+          </a:p>
+          <a:p>
+            <a:pPr indent="0" marL="0">
+              <a:lnSpc>
+                <a:spcPct val="130000"/>
+              </a:lnSpc>
+              <a:spcAft>
+                <a:spcPts val="1000"/>
+              </a:spcAft>
+              <a:buNone/>
+            </a:pPr>
+            <a:r>
+              <a:rPr lang="en-US" sz="1350" dirty="0">
+                <a:solidFill>
+                  <a:srgbClr val="202D37"/>
+                </a:solidFill>
+                <a:latin typeface="Microsoft YaHei" pitchFamily="34" charset="0"/>
+                <a:ea typeface="Microsoft YaHei" pitchFamily="34" charset="-122"/>
+                <a:cs typeface="Microsoft YaHei" pitchFamily="34" charset="-120"/>
+              </a:rPr>
+              <a:t>高频误区：把“一正一反”当成一种基本结果——(正,反) 与 (反,正) 是两个不同的结果；把互斥事件当独立事件连乘。适用边界：概率公式要求每个结果“等可能”，不等可能的试验（如不均匀骰子）不能直接套用；树状图层数多时可改用列表法，但同样必须不重不漏，方差比较要回到语境选指标。</a:t>
             </a:r>
             <a:endParaRPr lang="en-US" sz="1350" dirty="0"/>
           </a:p>
@@ -50443,11 +54205,11 @@
         <p:spPr>
           <a:xfrm>
             <a:off x="609905" y="1748790"/>
-            <a:ext cx="10971886" cy="1234440"/>
+            <a:ext cx="10971886" cy="1147801"/>
           </a:xfrm>
           <a:prstGeom prst="roundRect">
             <a:avLst>
-              <a:gd name="adj" fmla="val 4444"/>
+              <a:gd name="adj" fmla="val 4780"/>
             </a:avLst>
           </a:prstGeom>
           <a:solidFill>
@@ -50472,7 +54234,7 @@
         <p:spPr>
           <a:xfrm>
             <a:off x="829361" y="1840230"/>
-            <a:ext cx="10532974" cy="1051560"/>
+            <a:ext cx="10532974" cy="964921"/>
           </a:xfrm>
           <a:prstGeom prst="rect">
             <a:avLst/>
@@ -50525,6 +54287,192 @@
       <p:sp>
         <p:nvSpPr>
           <p:cNvPr id="7" name="Shape 5"/>
+          <p:cNvSpPr/>
+          <p:nvPr/>
+        </p:nvSpPr>
+        <p:spPr>
+          <a:xfrm>
+            <a:off x="609905" y="3042895"/>
+            <a:ext cx="10971886" cy="1147801"/>
+          </a:xfrm>
+          <a:prstGeom prst="roundRect">
+            <a:avLst>
+              <a:gd name="adj" fmla="val 4780"/>
+            </a:avLst>
+          </a:prstGeom>
+          <a:solidFill>
+            <a:srgbClr val="FFFFFF"/>
+          </a:solidFill>
+          <a:ln/>
+          <a:effectLst>
+            <a:outerShdw sx="100000" sy="100000" kx="0" ky="0" algn="bl" rotWithShape="0" blurRad="88900" dist="25400" dir="3600000">
+              <a:srgbClr val="3A3A32">
+                <a:alpha val="16000"/>
+              </a:srgbClr>
+            </a:outerShdw>
+          </a:effectLst>
+        </p:spPr>
+      </p:sp>
+      <p:sp>
+        <p:nvSpPr>
+          <p:cNvPr id="8" name="Text 6"/>
+          <p:cNvSpPr/>
+          <p:nvPr/>
+        </p:nvSpPr>
+        <p:spPr>
+          <a:xfrm>
+            <a:off x="829361" y="3134335"/>
+            <a:ext cx="10532974" cy="964921"/>
+          </a:xfrm>
+          <a:prstGeom prst="rect">
+            <a:avLst/>
+          </a:prstGeom>
+          <a:noFill/>
+          <a:ln/>
+        </p:spPr>
+        <p:txBody>
+          <a:bodyPr wrap="square" lIns="0" tIns="0" rIns="0" bIns="0" rtlCol="0" anchor="ctr"/>
+          <a:lstStyle/>
+          <a:p>
+            <a:pPr indent="0" marL="0">
+              <a:lnSpc>
+                <a:spcPct val="115000"/>
+              </a:lnSpc>
+              <a:buNone/>
+            </a:pPr>
+            <a:r>
+              <a:rPr lang="en-US" sz="1350" b="1" dirty="0">
+                <a:solidFill>
+                  <a:srgbClr val="285C94"/>
+                </a:solidFill>
+                <a:latin typeface="Microsoft YaHei" pitchFamily="34" charset="0"/>
+                <a:ea typeface="Microsoft YaHei" pitchFamily="34" charset="-122"/>
+                <a:cs typeface="Microsoft YaHei" pitchFamily="34" charset="-120"/>
+              </a:rPr>
+              <a:t>练习 2　</a:t>
+            </a:r>
+            <a:pPr indent="0" marL="0">
+              <a:lnSpc>
+                <a:spcPct val="115000"/>
+              </a:lnSpc>
+              <a:buNone/>
+            </a:pPr>
+            <a:r>
+              <a:rPr lang="en-US" sz="1400" dirty="0">
+                <a:solidFill>
+                  <a:srgbClr val="202D37"/>
+                </a:solidFill>
+                <a:latin typeface="Microsoft YaHei" pitchFamily="34" charset="0"/>
+                <a:ea typeface="Microsoft YaHei" pitchFamily="34" charset="-122"/>
+                <a:cs typeface="Microsoft YaHei" pitchFamily="34" charset="-120"/>
+              </a:rPr>
+              <a:t>一个转盘被均分为三格，分别标 1、2、3。转动转盘两次（每次结果等可能），求两次数字之和为偶数的概率。</a:t>
+            </a:r>
+            <a:endParaRPr lang="en-US" sz="1350" dirty="0"/>
+          </a:p>
+        </p:txBody>
+      </p:sp>
+      <p:sp>
+        <p:nvSpPr>
+          <p:cNvPr id="9" name="Shape 7"/>
+          <p:cNvSpPr/>
+          <p:nvPr/>
+        </p:nvSpPr>
+        <p:spPr>
+          <a:xfrm>
+            <a:off x="609905" y="4949647"/>
+            <a:ext cx="10971886" cy="585216"/>
+          </a:xfrm>
+          <a:prstGeom prst="roundRect">
+            <a:avLst>
+              <a:gd name="adj" fmla="val 7813"/>
+            </a:avLst>
+          </a:prstGeom>
+          <a:solidFill>
+            <a:srgbClr val="F2E3DC"/>
+          </a:solidFill>
+          <a:ln/>
+        </p:spPr>
+      </p:sp>
+      <p:sp>
+        <p:nvSpPr>
+          <p:cNvPr id="10" name="Text 8"/>
+          <p:cNvSpPr/>
+          <p:nvPr/>
+        </p:nvSpPr>
+        <p:spPr>
+          <a:xfrm>
+            <a:off x="811073" y="5004511"/>
+            <a:ext cx="10569550" cy="493776"/>
+          </a:xfrm>
+          <a:prstGeom prst="rect">
+            <a:avLst/>
+          </a:prstGeom>
+          <a:noFill/>
+          <a:ln/>
+        </p:spPr>
+        <p:txBody>
+          <a:bodyPr wrap="square" lIns="0" tIns="0" rIns="0" bIns="0" rtlCol="0" anchor="ctr"/>
+          <a:lstStyle/>
+          <a:p>
+            <a:pPr indent="0" marL="0">
+              <a:lnSpc>
+                <a:spcPct val="110000"/>
+              </a:lnSpc>
+              <a:buNone/>
+            </a:pPr>
+            <a:r>
+              <a:rPr lang="en-US" sz="1250" b="1" dirty="0">
+                <a:solidFill>
+                  <a:srgbClr val="B45F47"/>
+                </a:solidFill>
+                <a:latin typeface="Microsoft YaHei" pitchFamily="34" charset="0"/>
+                <a:ea typeface="Microsoft YaHei" pitchFamily="34" charset="-122"/>
+                <a:cs typeface="Microsoft YaHei" pitchFamily="34" charset="-120"/>
+              </a:rPr>
+              <a:t>变式挑战（选做）　</a:t>
+            </a:r>
+            <a:pPr indent="0" marL="0">
+              <a:lnSpc>
+                <a:spcPct val="110000"/>
+              </a:lnSpc>
+              <a:buNone/>
+            </a:pPr>
+            <a:r>
+              <a:rPr lang="en-US" sz="1250" dirty="0">
+                <a:solidFill>
+                  <a:srgbClr val="202D37"/>
+                </a:solidFill>
+                <a:latin typeface="Microsoft YaHei" pitchFamily="34" charset="0"/>
+                <a:ea typeface="Microsoft YaHei" pitchFamily="34" charset="-122"/>
+                <a:cs typeface="Microsoft YaHei" pitchFamily="34" charset="-120"/>
+              </a:rPr>
+              <a:t>抛一枚均匀的硬币两次，求“至少一次正面朝上”的概率。</a:t>
+            </a:r>
+            <a:pPr indent="0" marL="0">
+              <a:lnSpc>
+                <a:spcPct val="110000"/>
+              </a:lnSpc>
+              <a:buNone/>
+            </a:pPr>
+            <a:r>
+              <a:rPr lang="en-US" sz="1150" dirty="0">
+                <a:solidFill>
+                  <a:srgbClr val="6E7B85"/>
+                </a:solidFill>
+                <a:latin typeface="Microsoft YaHei" pitchFamily="34" charset="0"/>
+                <a:ea typeface="Microsoft YaHei" pitchFamily="34" charset="-122"/>
+                <a:cs typeface="Microsoft YaHei" pitchFamily="34" charset="-120"/>
+              </a:rPr>
+              <a:t>　提示：树状图列全 4 个结果：正正、正反、反正、反反；再数哪些符合“至少一次正面”。</a:t>
+            </a:r>
+            <a:endParaRPr lang="en-US" sz="1250" dirty="0"/>
+          </a:p>
+        </p:txBody>
+      </p:sp>
+      <p:sp>
+        <p:nvSpPr>
+          <p:cNvPr id="11" name="Shape 9"/>
           <p:cNvSpPr/>
           <p:nvPr/>
         </p:nvSpPr>
@@ -50546,7 +54494,7 @@
       </p:sp>
       <p:sp>
         <p:nvSpPr>
-          <p:cNvPr id="8" name="Text 6"/>
+          <p:cNvPr id="12" name="Text 10"/>
           <p:cNvSpPr/>
           <p:nvPr/>
         </p:nvSpPr>
@@ -50585,7 +54533,7 @@
       </p:sp>
       <p:sp>
         <p:nvSpPr>
-          <p:cNvPr id="9" name="Text 7"/>
+          <p:cNvPr id="13" name="Text 11"/>
           <p:cNvSpPr/>
           <p:nvPr/>
         </p:nvSpPr>
@@ -51135,11 +55083,11 @@
         <p:spPr>
           <a:xfrm>
             <a:off x="609905" y="2535174"/>
-            <a:ext cx="7818120" cy="2750058"/>
+            <a:ext cx="7818120" cy="3548329"/>
           </a:xfrm>
           <a:prstGeom prst="roundRect">
             <a:avLst>
-              <a:gd name="adj" fmla="val 1995"/>
+              <a:gd name="adj" fmla="val 1546"/>
             </a:avLst>
           </a:prstGeom>
           <a:solidFill>
@@ -51164,7 +55112,7 @@
         <p:spPr>
           <a:xfrm>
             <a:off x="865937" y="2681478"/>
-            <a:ext cx="7315200" cy="2475738"/>
+            <a:ext cx="7315200" cy="3274009"/>
           </a:xfrm>
           <a:prstGeom prst="rect">
             <a:avLst/>
@@ -51194,7 +55142,7 @@
                 <a:ea typeface="Microsoft YaHei" pitchFamily="34" charset="-122"/>
                 <a:cs typeface="Microsoft YaHei" pitchFamily="34" charset="-120"/>
               </a:rPr>
-              <a:t>引入乘方：n 个相同因数相乘记作 aⁿ，a 叫底数、n 叫指数。推导符号法则：负数的奇次幂为负、偶次幂为正，因为负因数个数为奇数时积为负、偶数时积为正。关键区分：−3² 读作“3 的平方的相反数”，底数是 3，结果是 −9；(−3)² 底数是 −3，结果是 9。看指数前先看负号在不在括号里。</a:t>
+              <a:t>开场就出这道“坑题”：−3² 与 (−3)² 一样吗？先写下答案再学。学生会给出五花八门的答案，这正说明乘方的符号法则是本节突破口。乘方是相同因数连乘的简写：n 个 a 相乘记作 aⁿ，a 叫底数、n 叫指数。带着“先定符号、再算绝对值”这条主线，把加减乘除乘方的法则串成一套。</a:t>
             </a:r>
             <a:endParaRPr lang="en-US" sz="1350" dirty="0"/>
           </a:p>
@@ -51217,7 +55165,30 @@
                 <a:ea typeface="Microsoft YaHei" pitchFamily="34" charset="-122"/>
                 <a:cs typeface="Microsoft YaHei" pitchFamily="34" charset="-120"/>
               </a:rPr>
-              <a:t>四则与乘方混合运算按“先乘方，再乘除，后加减，有括号先括号”的顺序进行；乘除统一成“先定符号，再算绝对值”：同号得正、异号得负。推导方向：乘法法则由相反数意义推得，除法可转化为乘倒数。灵活运用交换律、结合律凑整能提速，如 (−8)×(−4)×(−1.25)×0.25 先把 −8 与 −1.25 凑成 10。常见误区：分配律漏乘第二项、连续除法当成连乘处理。</a:t>
+              <a:t>符号法则的推导依据：负因数的个数为奇数时积为负、偶数时积为正，所以负数的奇次幂为负、偶次幂为正。混合运算顺序：先乘方，再乘除，后加减，有括号先算括号；乘除统一成“同号得正、异号得负，再把绝对值相乘除”。运算律在有理数范围依然成立：交换律、结合律用于凑整，分配律 a(b+c)=ab+ac 是简算的工具。</a:t>
+            </a:r>
+            <a:endParaRPr lang="en-US" sz="1350" dirty="0"/>
+          </a:p>
+          <a:p>
+            <a:pPr indent="0" marL="0">
+              <a:lnSpc>
+                <a:spcPct val="130000"/>
+              </a:lnSpc>
+              <a:spcAft>
+                <a:spcPts val="1000"/>
+              </a:spcAft>
+              <a:buNone/>
+            </a:pPr>
+            <a:r>
+              <a:rPr lang="en-US" sz="1350" dirty="0">
+                <a:solidFill>
+                  <a:srgbClr val="202D37"/>
+                </a:solidFill>
+                <a:latin typeface="Microsoft YaHei" pitchFamily="34" charset="0"/>
+                <a:ea typeface="Microsoft YaHei" pitchFamily="34" charset="-122"/>
+                <a:cs typeface="Microsoft YaHei" pitchFamily="34" charset="-120"/>
+              </a:rPr>
+              <a:t>误区显式纠正：−3² 读作“3 的平方的相反数”，底数是 3，等于 −9；(−3)² 的底数是 −3，等于 9——负号在不在括号里，底数就不一样。适用边界：乘方只表示同一底数连乘，2³ 不等于 2×3；分配律每一项都要乘，(a+b)c=ac+bc 漏乘第二项是最高频错误；连续除法要化成乘倒数后再用符号法则。</a:t>
             </a:r>
             <a:endParaRPr lang="en-US" sz="1350" dirty="0"/>
           </a:p>

--- a/pptx/数学·节级精细讲解课件.pptx
+++ b/pptx/数学·节级精细讲解课件.pptx
@@ -11718,7 +11718,7 @@
                 <a:ea typeface="Microsoft YaHei" pitchFamily="34" charset="-122"/>
                 <a:cs typeface="Microsoft YaHei" pitchFamily="34" charset="-120"/>
               </a:rPr>
-              <a:t>同类项“两同”：所含字母相同，并且相同字母的指数也相同，与系数和字母顺序无关。合并的推导依据是逆用分配律：5x²y+3x²y=(5+3)x²y，即系数相加、字母及其指数不变。整式加减两步走：先去括号，再合并同类项；去括号法则由分配律推得——a−(b+c)=a+(−1)(b+c)，所以括号前是“−”时各项都变号。</a:t>
+              <a:t>同类项“两同”：所含字母相同，并且相同字母的指数也相同，与系数和字母顺序无关。合并的推导依据是逆用分配律：5x²y+3x²y=(5+3)x²y，即系数相加、字母及其指数不变。整式加减两步走：先去括号，再合并同类项；括号前是“−”时，去括号后各项都变号（依据分配律）。</a:t>
             </a:r>
             <a:endParaRPr lang="en-US" sz="1350" dirty="0"/>
           </a:p>
@@ -29886,7 +29886,7 @@
                 <a:ea typeface="Microsoft YaHei" pitchFamily="34" charset="-122"/>
                 <a:cs typeface="Microsoft YaHei" pitchFamily="34" charset="-120"/>
               </a:rPr>
-              <a:t>高频误区：(a+b)²=a²+b²，漏中间项 2ab——把推导重走一遍即可自纠；分解不彻底，如 x⁴−1 分到 (x²+1)(x²−1) 就停手，而 x²−1 还能套平方差。适用边界：平方差要求“平方减平方”的结构，减号必须有；提公因式要提净——系数取最大公约数、字母取最低次幂，漏提会让后续无法套公式。</a:t>
+              <a:t>高频误区：(a+b)²=a²+b²，漏中间项 2ab——把推导重走一遍即可自纠；分解不彻底，如 x⁴−1 分到 (x²+1)(x²−1) 就停手，而 x²−1 还能套平方差。适用边界：平方差要求“平方减平方”的结构，减号必须有；提公因式要提净——系数取最大公约数、字母取最低次幂。</a:t>
             </a:r>
             <a:endParaRPr lang="en-US" sz="1350" dirty="0"/>
           </a:p>
@@ -35144,7 +35144,7 @@
                 <a:ea typeface="Microsoft YaHei" pitchFamily="34" charset="-122"/>
                 <a:cs typeface="Microsoft YaHei" pitchFamily="34" charset="-120"/>
               </a:rPr>
-              <a:t>本体：一次函数 y=kx+b（k≠0）有两个待定系数，图象上每个点的坐标都满足解析式，两点即可列二元一次方程组求出 k、b——设、代、解三步定型。图象语言：k 定升降（k＞0 上升、k＜0 下降），b 定 y 轴交点 (0, b)，|k| 越大直线越陡。方案比较：令两函数值相等解出分段点，交点前后“谁更省”发生对调。</a:t>
+              <a:t>本体：一次函数 y=kx+b（k≠0）有两个待定系数，图象上每个点的坐标都满足解析式，两点即可列二元一次方程组求出 k、b——设、代、解三步定型。图象语言：k 定升降（k＞0 上升、k＜0 下降），b 定 y 轴交点 (0, b)。方案比较：令两函数值相等解出分段点，交点前后“谁更省”发生对调。</a:t>
             </a:r>
             <a:endParaRPr lang="en-US" sz="1350" dirty="0"/>
           </a:p>
@@ -38634,11 +38634,11 @@
         <p:spPr>
           <a:xfrm>
             <a:off x="609905" y="2535174"/>
-            <a:ext cx="7818120" cy="3548329"/>
+            <a:ext cx="7818120" cy="3330702"/>
           </a:xfrm>
           <a:prstGeom prst="roundRect">
             <a:avLst>
-              <a:gd name="adj" fmla="val 1546"/>
+              <a:gd name="adj" fmla="val 1647"/>
             </a:avLst>
           </a:prstGeom>
           <a:solidFill>
@@ -38663,7 +38663,7 @@
         <p:spPr>
           <a:xfrm>
             <a:off x="865937" y="2681478"/>
-            <a:ext cx="7315200" cy="3274009"/>
+            <a:ext cx="7315200" cy="3056382"/>
           </a:xfrm>
           <a:prstGeom prst="rect">
             <a:avLst/>
@@ -38716,7 +38716,7 @@
                 <a:ea typeface="Microsoft YaHei" pitchFamily="34" charset="-122"/>
                 <a:cs typeface="Microsoft YaHei" pitchFamily="34" charset="-120"/>
               </a:rPr>
-              <a:t>本体：一元二次方程的一般形式 ax²+bx+c=0（a≠0），若 a=0 就退化成一次方程，前提必须先判。选法顺序：形如 (x+m)²=n（n≥0）先直接开平方；能十字相乘的用因式分解法；其余配方推出公式法。判别式 Δ=b²−4ac 判根三情形：Δ＞0 两不等实根、Δ=0 两相等实根、Δ＜0 无实根；韦达定理 x₁+x₂=−b/a、x₁x₂=c/a，由两根公式的加与乘推得。</a:t>
+              <a:t>本体：一元二次方程的一般形式 ax²+bx+c=0（a≠0），若 a=0 就退化成一次方程，前提必须先判。选法顺序：开方、因式分解、配方公式，由简到繁。判别式 Δ=b²−4ac 判根三情形：Δ＞0 两不等实根、Δ=0 两相等实根、Δ＜0 无实根；韦达定理 x₁+x₂=−b/a、x₁x₂=c/a。</a:t>
             </a:r>
             <a:endParaRPr lang="en-US" sz="1350" dirty="0"/>
           </a:p>
@@ -40401,11 +40401,11 @@
         <p:spPr>
           <a:xfrm>
             <a:off x="609905" y="2535174"/>
-            <a:ext cx="7818120" cy="3548329"/>
+            <a:ext cx="7818120" cy="3330702"/>
           </a:xfrm>
           <a:prstGeom prst="roundRect">
             <a:avLst>
-              <a:gd name="adj" fmla="val 1546"/>
+              <a:gd name="adj" fmla="val 1647"/>
             </a:avLst>
           </a:prstGeom>
           <a:solidFill>
@@ -40430,7 +40430,7 @@
         <p:spPr>
           <a:xfrm>
             <a:off x="865937" y="2681478"/>
-            <a:ext cx="7315200" cy="3274009"/>
+            <a:ext cx="7315200" cy="3056382"/>
           </a:xfrm>
           <a:prstGeom prst="rect">
             <a:avLst/>
@@ -40483,7 +40483,7 @@
                 <a:ea typeface="Microsoft YaHei" pitchFamily="34" charset="-122"/>
                 <a:cs typeface="Microsoft YaHei" pitchFamily="34" charset="-120"/>
               </a:rPr>
-              <a:t>本体：配方把 y=ax²+bx+c 化为顶点式 y=a(x−h)²+k，三要素一次读出：a 定开口方向与大小（a＞0 向上有最小值，a＜0 向下有最大值），对称轴 x=h，顶点 (h, k)。配方关键：提出 a 后在括号内加上并减去“一次项系数一半的平方”，补偿项必须乘回 a。平移法则“左加右减自变量、上加下减常数项”，检验法：把新顶点代回解析式。</a:t>
+              <a:t>本体：配方把 y=ax²+bx+c 化为顶点式 y=a(x−h)²+k，三要素一次读出：a 定开口与最值（a＞0 有最小值，a＜0 有最大值），对称轴 x=h，顶点 (h, k)。配方关键：括号内加并减“一次项系数一半的平方”，补偿项乘回 a。平移“左加右减、上加下减”，检验：新顶点代回解析式。</a:t>
             </a:r>
             <a:endParaRPr lang="en-US" sz="1350" dirty="0"/>
           </a:p>
@@ -48610,11 +48610,11 @@
         <p:spPr>
           <a:xfrm>
             <a:off x="609905" y="2535174"/>
-            <a:ext cx="7818120" cy="3548329"/>
+            <a:ext cx="7818120" cy="3330702"/>
           </a:xfrm>
           <a:prstGeom prst="roundRect">
             <a:avLst>
-              <a:gd name="adj" fmla="val 1546"/>
+              <a:gd name="adj" fmla="val 1647"/>
             </a:avLst>
           </a:prstGeom>
           <a:solidFill>
@@ -48639,7 +48639,7 @@
         <p:spPr>
           <a:xfrm>
             <a:off x="865937" y="2681478"/>
-            <a:ext cx="7315200" cy="3274009"/>
+            <a:ext cx="7315200" cy="3056382"/>
           </a:xfrm>
           <a:prstGeom prst="rect">
             <a:avLst/>
@@ -48692,7 +48692,7 @@
                 <a:ea typeface="Microsoft YaHei" pitchFamily="34" charset="-122"/>
                 <a:cs typeface="Microsoft YaHei" pitchFamily="34" charset="-120"/>
               </a:rPr>
-              <a:t>本体：平行于三角形一边的直线截其他两边，所得三角形与原三角形相似——派生 A 字型（小三角形嵌在顶部）与 8 字型（两三角形顶点相对）两个基本图形，识别先找平行线与公共角。相似比为对应边的比；性质：对应角相等、对应边成比例，周长比等于相似比，面积比等于相似比的平方——面积=底×高，底与高各按相似比缩放，乘起来就是比的平方。位似是特殊的相似，坐标乘位似比 k（k 可负）。</a:t>
+              <a:t>本体：平行于三角形一边的直线截其他两边，所得三角形与原三角形相似——派生 A 字型与 8 字型两个基本图形，识别先找平行线与公共角。相似比为对应边的比；性质：对应角相等、对应边成比例，周长比等于相似比，面积比等于相似比的平方（面积=底×高，底与高各按相似比缩放）。位似是特殊的相似。</a:t>
             </a:r>
             <a:endParaRPr lang="en-US" sz="1350" dirty="0"/>
           </a:p>
@@ -50963,11 +50963,11 @@
         <p:spPr>
           <a:xfrm>
             <a:off x="609905" y="2535174"/>
-            <a:ext cx="7818120" cy="3330702"/>
+            <a:ext cx="7818120" cy="3104388"/>
           </a:xfrm>
           <a:prstGeom prst="roundRect">
             <a:avLst>
-              <a:gd name="adj" fmla="val 1647"/>
+              <a:gd name="adj" fmla="val 1767"/>
             </a:avLst>
           </a:prstGeom>
           <a:solidFill>
@@ -50992,7 +50992,7 @@
         <p:spPr>
           <a:xfrm>
             <a:off x="865937" y="2681478"/>
-            <a:ext cx="7315200" cy="3056382"/>
+            <a:ext cx="7315200" cy="2830068"/>
           </a:xfrm>
           <a:prstGeom prst="rect">
             <a:avLst/>
@@ -51045,7 +51045,7 @@
                 <a:ea typeface="Microsoft YaHei" pitchFamily="34" charset="-122"/>
                 <a:cs typeface="Microsoft YaHei" pitchFamily="34" charset="-120"/>
               </a:rPr>
-              <a:t>本体：在直角三角形中，sin A=对边/斜边，cos A=邻边/斜边，tan A=对边/邻边；由相似三角形对应边成比例可知，定义只与角的大小有关、与三角形大小无关。特殊角值记牢：sin30°=1/2、tan30°=√3/3、sin45°=cos45°=√2/2、tan45°=1、sin60°=√3/2、tan60°=√3。应用题四步：画图、标角与边、选函数、算结果带单位。</a:t>
+              <a:t>直角三角形中，sin A=对边/斜边，cos A=邻边/斜边，tan A=对边/邻边；定义只与角的大小有关，与三角形大小无关。特殊角值：sin30°=1/2、tan30°=√3/3、sin45°=cos45°=√2/2、tan45°=1、sin60°=√3/2、tan60°=√3。</a:t>
             </a:r>
             <a:endParaRPr lang="en-US" sz="1350" dirty="0"/>
           </a:p>
@@ -55165,7 +55165,7 @@
                 <a:ea typeface="Microsoft YaHei" pitchFamily="34" charset="-122"/>
                 <a:cs typeface="Microsoft YaHei" pitchFamily="34" charset="-120"/>
               </a:rPr>
-              <a:t>符号法则的推导依据：负因数的个数为奇数时积为负、偶数时积为正，所以负数的奇次幂为负、偶次幂为正。混合运算顺序：先乘方，再乘除，后加减，有括号先算括号；乘除统一成“同号得正、异号得负，再把绝对值相乘除”。运算律在有理数范围依然成立：交换律、结合律用于凑整，分配律 a(b+c)=ab+ac 是简算的工具。</a:t>
+              <a:t>符号法则的推导依据：负因数的个数为奇数时积为负、偶数时积为正，所以负数的奇次幂为负、偶次幂为正。混合运算顺序：先乘方，再乘除，后加减，有括号先算括号；乘除统一成“同号得正、异号得负，再把绝对值相乘除”。运算律在有理数范围依然成立：交换律、结合律用于凑整，分配律是简算的工具。</a:t>
             </a:r>
             <a:endParaRPr lang="en-US" sz="1350" dirty="0"/>
           </a:p>
@@ -55188,7 +55188,7 @@
                 <a:ea typeface="Microsoft YaHei" pitchFamily="34" charset="-122"/>
                 <a:cs typeface="Microsoft YaHei" pitchFamily="34" charset="-120"/>
               </a:rPr>
-              <a:t>误区显式纠正：−3² 读作“3 的平方的相反数”，底数是 3，等于 −9；(−3)² 的底数是 −3，等于 9——负号在不在括号里，底数就不一样。适用边界：乘方只表示同一底数连乘，2³ 不等于 2×3；分配律每一项都要乘，(a+b)c=ac+bc 漏乘第二项是最高频错误；连续除法要化成乘倒数后再用符号法则。</a:t>
+              <a:t>误区显式纠正：−3² 读作“3 的平方的相反数”，底数是 3，等于 −9；(−3)² 的底数是 −3，等于 9——负号在不在括号里，底数就不一样。适用边界：乘方只表示同一底数连乘，2³ 不等于 2×3；分配律每一项都要乘，(a+b)c=ac+bc 漏乘第二项是最高频错误；连续除法先化成乘倒数。</a:t>
             </a:r>
             <a:endParaRPr lang="en-US" sz="1350" dirty="0"/>
           </a:p>
